--- a/Slides/slides.pptx
+++ b/Slides/slides.pptx
@@ -1,29 +1,27 @@
 
 <file path=ppt/presentation.xml><?xml version="1.0" encoding="utf-8"?>
-<p:presentation xmlns:a="http://schemas.openxmlformats.org/drawingml/2006/main" xmlns:p="http://schemas.openxmlformats.org/presentationml/2006/main" xmlns:r="http://schemas.openxmlformats.org/officeDocument/2006/relationships" autoCompressPictures="0" saveSubsetFonts="1">
+<p:presentation xmlns:a="http://schemas.openxmlformats.org/drawingml/2006/main" xmlns:r="http://schemas.openxmlformats.org/officeDocument/2006/relationships" xmlns:p="http://schemas.openxmlformats.org/presentationml/2006/main" saveSubsetFonts="1" autoCompressPictures="0">
   <p:sldMasterIdLst>
     <p:sldMasterId id="2147483648" r:id="rId1"/>
   </p:sldMasterIdLst>
   <p:sldIdLst>
-    <p:sldId id="256" r:id="rId2"/>
-    <p:sldId id="257" r:id="rId3"/>
-    <p:sldId id="258" r:id="rId4"/>
-    <p:sldId id="259" r:id="rId5"/>
-    <p:sldId id="260" r:id="rId6"/>
-    <p:sldId id="261" r:id="rId7"/>
-    <p:sldId id="262" r:id="rId8"/>
-    <p:sldId id="263" r:id="rId9"/>
-    <p:sldId id="264" r:id="rId10"/>
-    <p:sldId id="265" r:id="rId11"/>
+    <p:sldId id="256" r:id="rId7"/>
+    <p:sldId id="257" r:id="rId8"/>
+    <p:sldId id="258" r:id="rId9"/>
+    <p:sldId id="259" r:id="rId10"/>
+    <p:sldId id="260" r:id="rId11"/>
+    <p:sldId id="261" r:id="rId12"/>
+    <p:sldId id="262" r:id="rId13"/>
+    <p:sldId id="263" r:id="rId14"/>
   </p:sldIdLst>
-  <p:sldSz cx="9144000" cy="5143500" type="screen16x9"/>
+  <p:sldSz cx="12191695" cy="6858000" type="screen4x3"/>
   <p:notesSz cx="6858000" cy="9144000"/>
   <p:defaultTextStyle>
     <a:defPPr>
       <a:defRPr lang="en-US"/>
     </a:defPPr>
-    <a:lvl1pPr algn="l" defTabSz="457200" eaLnBrk="1" hangingPunct="1" latinLnBrk="0" marL="0" rtl="0">
-      <a:defRPr kern="1200" sz="1800">
+    <a:lvl1pPr marL="0" algn="l" defTabSz="457200" rtl="0" eaLnBrk="1" latinLnBrk="0" hangingPunct="1">
+      <a:defRPr sz="1800" kern="1200">
         <a:solidFill>
           <a:schemeClr val="tx1"/>
         </a:solidFill>
@@ -32,8 +30,8 @@
         <a:cs typeface="+mn-cs"/>
       </a:defRPr>
     </a:lvl1pPr>
-    <a:lvl2pPr algn="l" defTabSz="457200" eaLnBrk="1" hangingPunct="1" latinLnBrk="0" marL="457200" rtl="0">
-      <a:defRPr kern="1200" sz="1800">
+    <a:lvl2pPr marL="457200" algn="l" defTabSz="457200" rtl="0" eaLnBrk="1" latinLnBrk="0" hangingPunct="1">
+      <a:defRPr sz="1800" kern="1200">
         <a:solidFill>
           <a:schemeClr val="tx1"/>
         </a:solidFill>
@@ -42,8 +40,8 @@
         <a:cs typeface="+mn-cs"/>
       </a:defRPr>
     </a:lvl2pPr>
-    <a:lvl3pPr algn="l" defTabSz="457200" eaLnBrk="1" hangingPunct="1" latinLnBrk="0" marL="914400" rtl="0">
-      <a:defRPr kern="1200" sz="1800">
+    <a:lvl3pPr marL="914400" algn="l" defTabSz="457200" rtl="0" eaLnBrk="1" latinLnBrk="0" hangingPunct="1">
+      <a:defRPr sz="1800" kern="1200">
         <a:solidFill>
           <a:schemeClr val="tx1"/>
         </a:solidFill>
@@ -52,8 +50,8 @@
         <a:cs typeface="+mn-cs"/>
       </a:defRPr>
     </a:lvl3pPr>
-    <a:lvl4pPr algn="l" defTabSz="457200" eaLnBrk="1" hangingPunct="1" latinLnBrk="0" marL="1371600" rtl="0">
-      <a:defRPr kern="1200" sz="1800">
+    <a:lvl4pPr marL="1371600" algn="l" defTabSz="457200" rtl="0" eaLnBrk="1" latinLnBrk="0" hangingPunct="1">
+      <a:defRPr sz="1800" kern="1200">
         <a:solidFill>
           <a:schemeClr val="tx1"/>
         </a:solidFill>
@@ -62,8 +60,8 @@
         <a:cs typeface="+mn-cs"/>
       </a:defRPr>
     </a:lvl4pPr>
-    <a:lvl5pPr algn="l" defTabSz="457200" eaLnBrk="1" hangingPunct="1" latinLnBrk="0" marL="1828800" rtl="0">
-      <a:defRPr kern="1200" sz="1800">
+    <a:lvl5pPr marL="1828800" algn="l" defTabSz="457200" rtl="0" eaLnBrk="1" latinLnBrk="0" hangingPunct="1">
+      <a:defRPr sz="1800" kern="1200">
         <a:solidFill>
           <a:schemeClr val="tx1"/>
         </a:solidFill>
@@ -72,8 +70,8 @@
         <a:cs typeface="+mn-cs"/>
       </a:defRPr>
     </a:lvl5pPr>
-    <a:lvl6pPr algn="l" defTabSz="457200" eaLnBrk="1" hangingPunct="1" latinLnBrk="0" marL="2286000" rtl="0">
-      <a:defRPr kern="1200" sz="1800">
+    <a:lvl6pPr marL="2286000" algn="l" defTabSz="457200" rtl="0" eaLnBrk="1" latinLnBrk="0" hangingPunct="1">
+      <a:defRPr sz="1800" kern="1200">
         <a:solidFill>
           <a:schemeClr val="tx1"/>
         </a:solidFill>
@@ -82,8 +80,8 @@
         <a:cs typeface="+mn-cs"/>
       </a:defRPr>
     </a:lvl6pPr>
-    <a:lvl7pPr algn="l" defTabSz="457200" eaLnBrk="1" hangingPunct="1" latinLnBrk="0" marL="2743200" rtl="0">
-      <a:defRPr kern="1200" sz="1800">
+    <a:lvl7pPr marL="2743200" algn="l" defTabSz="457200" rtl="0" eaLnBrk="1" latinLnBrk="0" hangingPunct="1">
+      <a:defRPr sz="1800" kern="1200">
         <a:solidFill>
           <a:schemeClr val="tx1"/>
         </a:solidFill>
@@ -92,8 +90,8 @@
         <a:cs typeface="+mn-cs"/>
       </a:defRPr>
     </a:lvl7pPr>
-    <a:lvl8pPr algn="l" defTabSz="457200" eaLnBrk="1" hangingPunct="1" latinLnBrk="0" marL="3200400" rtl="0">
-      <a:defRPr kern="1200" sz="1800">
+    <a:lvl8pPr marL="3200400" algn="l" defTabSz="457200" rtl="0" eaLnBrk="1" latinLnBrk="0" hangingPunct="1">
+      <a:defRPr sz="1800" kern="1200">
         <a:solidFill>
           <a:schemeClr val="tx1"/>
         </a:solidFill>
@@ -102,8 +100,8 @@
         <a:cs typeface="+mn-cs"/>
       </a:defRPr>
     </a:lvl8pPr>
-    <a:lvl9pPr algn="l" defTabSz="457200" eaLnBrk="1" hangingPunct="1" latinLnBrk="0" marL="3657600" rtl="0">
-      <a:defRPr kern="1200" sz="1800">
+    <a:lvl9pPr marL="3657600" algn="l" defTabSz="457200" rtl="0" eaLnBrk="1" latinLnBrk="0" hangingPunct="1">
+      <a:defRPr sz="1800" kern="1200">
         <a:solidFill>
           <a:schemeClr val="tx1"/>
         </a:solidFill>
@@ -113,22 +111,6 @@
       </a:defRPr>
     </a:lvl9pPr>
   </p:defaultTextStyle>
-  <p:extLst>
-    <p:ext uri="{EFAFB233-063F-42B5-8137-9DF3F51BA10A}">
-      <p15:sldGuideLst xmlns:p15="http://schemas.microsoft.com/office/powerpoint/2012/main">
-        <p15:guide id="1" orient="horz" pos="1620" userDrawn="1">
-          <p15:clr>
-            <a:srgbClr val="A4A3A4"/>
-          </p15:clr>
-        </p15:guide>
-        <p15:guide id="2" pos="2880" userDrawn="1">
-          <p15:clr>
-            <a:srgbClr val="A4A3A4"/>
-          </p15:clr>
-        </p15:guide>
-      </p15:sldGuideLst>
-    </p:ext>
-  </p:extLst>
 </p:presentation>
 </file>
 
@@ -161,8 +143,8 @@
         </p:nvSpPr>
         <p:spPr>
           <a:xfrm>
-            <a:off x="685800" y="1597819"/>
-            <a:ext cx="7772400" cy="1102519"/>
+            <a:off x="685800" y="2130425"/>
+            <a:ext cx="7772400" cy="1470025"/>
           </a:xfrm>
         </p:spPr>
         <p:txBody>
@@ -170,9 +152,10 @@
           <a:lstStyle/>
           <a:p>
             <a:r>
-              <a:rPr lang="en-US"/>
+              <a:rPr lang="en-US" smtClean="0"/>
               <a:t>Click to edit Master title style</a:t>
             </a:r>
+            <a:endParaRPr lang="en-US"/>
           </a:p>
         </p:txBody>
       </p:sp>
@@ -188,8 +171,8 @@
         </p:nvSpPr>
         <p:spPr>
           <a:xfrm>
-            <a:off x="1371600" y="2914650"/>
-            <a:ext cx="6400800" cy="1314450"/>
+            <a:off x="1371600" y="3886200"/>
+            <a:ext cx="6400800" cy="1752600"/>
           </a:xfrm>
         </p:spPr>
         <p:txBody>
@@ -205,7 +188,7 @@
                 </a:solidFill>
               </a:defRPr>
             </a:lvl1pPr>
-            <a:lvl2pPr marL="342900" indent="0" algn="ctr">
+            <a:lvl2pPr marL="457200" indent="0" algn="ctr">
               <a:buNone/>
               <a:defRPr>
                 <a:solidFill>
@@ -215,7 +198,7 @@
                 </a:solidFill>
               </a:defRPr>
             </a:lvl2pPr>
-            <a:lvl3pPr marL="685800" indent="0" algn="ctr">
+            <a:lvl3pPr marL="914400" indent="0" algn="ctr">
               <a:buNone/>
               <a:defRPr>
                 <a:solidFill>
@@ -225,7 +208,7 @@
                 </a:solidFill>
               </a:defRPr>
             </a:lvl3pPr>
-            <a:lvl4pPr marL="1028700" indent="0" algn="ctr">
+            <a:lvl4pPr marL="1371600" indent="0" algn="ctr">
               <a:buNone/>
               <a:defRPr>
                 <a:solidFill>
@@ -235,7 +218,7 @@
                 </a:solidFill>
               </a:defRPr>
             </a:lvl4pPr>
-            <a:lvl5pPr marL="1371600" indent="0" algn="ctr">
+            <a:lvl5pPr marL="1828800" indent="0" algn="ctr">
               <a:buNone/>
               <a:defRPr>
                 <a:solidFill>
@@ -245,7 +228,7 @@
                 </a:solidFill>
               </a:defRPr>
             </a:lvl5pPr>
-            <a:lvl6pPr marL="1714500" indent="0" algn="ctr">
+            <a:lvl6pPr marL="2286000" indent="0" algn="ctr">
               <a:buNone/>
               <a:defRPr>
                 <a:solidFill>
@@ -255,7 +238,7 @@
                 </a:solidFill>
               </a:defRPr>
             </a:lvl6pPr>
-            <a:lvl7pPr marL="2057400" indent="0" algn="ctr">
+            <a:lvl7pPr marL="2743200" indent="0" algn="ctr">
               <a:buNone/>
               <a:defRPr>
                 <a:solidFill>
@@ -265,7 +248,7 @@
                 </a:solidFill>
               </a:defRPr>
             </a:lvl7pPr>
-            <a:lvl8pPr marL="2400300" indent="0" algn="ctr">
+            <a:lvl8pPr marL="3200400" indent="0" algn="ctr">
               <a:buNone/>
               <a:defRPr>
                 <a:solidFill>
@@ -275,7 +258,7 @@
                 </a:solidFill>
               </a:defRPr>
             </a:lvl8pPr>
-            <a:lvl9pPr marL="2743200" indent="0" algn="ctr">
+            <a:lvl9pPr marL="3657600" indent="0" algn="ctr">
               <a:buNone/>
               <a:defRPr>
                 <a:solidFill>
@@ -288,9 +271,10 @@
           </a:lstStyle>
           <a:p>
             <a:r>
-              <a:rPr lang="en-US"/>
+              <a:rPr lang="en-US" smtClean="0"/>
               <a:t>Click to edit Master subtitle style</a:t>
             </a:r>
+            <a:endParaRPr lang="en-US"/>
           </a:p>
         </p:txBody>
       </p:sp>
@@ -309,9 +293,9 @@
           <a:bodyPr/>
           <a:lstStyle/>
           <a:p>
-            <a:fld id="{241EB5C9-1307-BA42-ABA2-0BC069CD8E7F}" type="datetimeFigureOut">
-              <a:rPr lang="en-US" smtClean="0"/>
-              <a:t>1/2/22</a:t>
+            <a:fld id="{5BCAD085-E8A6-8845-BD4E-CB4CCA059FC4}" type="datetimeFigureOut">
+              <a:rPr lang="en-US" smtClean="0"/>
+              <a:t>1/27/13</a:t>
             </a:fld>
             <a:endParaRPr lang="en-US"/>
           </a:p>
@@ -351,7 +335,7 @@
           <a:bodyPr/>
           <a:lstStyle/>
           <a:p>
-            <a:fld id="{C5EF2332-01BF-834F-8236-50238282D533}" type="slidenum">
+            <a:fld id="{C1FF6DA9-008F-8B48-92A6-B652298478BF}" type="slidenum">
               <a:rPr lang="en-US" smtClean="0"/>
               <a:t>‹#›</a:t>
             </a:fld>
@@ -362,7 +346,7 @@
     </p:spTree>
     <p:extLst>
       <p:ext uri="{BB962C8B-B14F-4D97-AF65-F5344CB8AC3E}">
-        <p14:creationId xmlns:p14="http://schemas.microsoft.com/office/powerpoint/2010/main" val="1444357513"/>
+        <p14:creationId xmlns:p14="http://schemas.microsoft.com/office/powerpoint/2010/main" val="3168075583"/>
       </p:ext>
     </p:extLst>
   </p:cSld>
@@ -405,9 +389,10 @@
           <a:lstStyle/>
           <a:p>
             <a:r>
-              <a:rPr lang="en-US"/>
+              <a:rPr lang="en-US" smtClean="0"/>
               <a:t>Click to edit Master title style</a:t>
             </a:r>
+            <a:endParaRPr lang="en-US"/>
           </a:p>
         </p:txBody>
       </p:sp>
@@ -428,37 +413,38 @@
           <a:p>
             <a:pPr lvl="0"/>
             <a:r>
-              <a:rPr lang="en-US"/>
+              <a:rPr lang="en-US" smtClean="0"/>
               <a:t>Click to edit Master text styles</a:t>
             </a:r>
           </a:p>
           <a:p>
             <a:pPr lvl="1"/>
             <a:r>
-              <a:rPr lang="en-US"/>
+              <a:rPr lang="en-US" smtClean="0"/>
               <a:t>Second level</a:t>
             </a:r>
           </a:p>
           <a:p>
             <a:pPr lvl="2"/>
             <a:r>
-              <a:rPr lang="en-US"/>
+              <a:rPr lang="en-US" smtClean="0"/>
               <a:t>Third level</a:t>
             </a:r>
           </a:p>
           <a:p>
             <a:pPr lvl="3"/>
             <a:r>
-              <a:rPr lang="en-US"/>
+              <a:rPr lang="en-US" smtClean="0"/>
               <a:t>Fourth level</a:t>
             </a:r>
           </a:p>
           <a:p>
             <a:pPr lvl="4"/>
             <a:r>
-              <a:rPr lang="en-US"/>
+              <a:rPr lang="en-US" smtClean="0"/>
               <a:t>Fifth level</a:t>
             </a:r>
+            <a:endParaRPr lang="en-US"/>
           </a:p>
         </p:txBody>
       </p:sp>
@@ -477,9 +463,9 @@
           <a:bodyPr/>
           <a:lstStyle/>
           <a:p>
-            <a:fld id="{241EB5C9-1307-BA42-ABA2-0BC069CD8E7F}" type="datetimeFigureOut">
-              <a:rPr lang="en-US" smtClean="0"/>
-              <a:t>1/2/22</a:t>
+            <a:fld id="{5BCAD085-E8A6-8845-BD4E-CB4CCA059FC4}" type="datetimeFigureOut">
+              <a:rPr lang="en-US" smtClean="0"/>
+              <a:t>1/27/13</a:t>
             </a:fld>
             <a:endParaRPr lang="en-US"/>
           </a:p>
@@ -519,7 +505,7 @@
           <a:bodyPr/>
           <a:lstStyle/>
           <a:p>
-            <a:fld id="{C5EF2332-01BF-834F-8236-50238282D533}" type="slidenum">
+            <a:fld id="{C1FF6DA9-008F-8B48-92A6-B652298478BF}" type="slidenum">
               <a:rPr lang="en-US" smtClean="0"/>
               <a:t>‹#›</a:t>
             </a:fld>
@@ -530,7 +516,7 @@
     </p:spTree>
     <p:extLst>
       <p:ext uri="{BB962C8B-B14F-4D97-AF65-F5344CB8AC3E}">
-        <p14:creationId xmlns:p14="http://schemas.microsoft.com/office/powerpoint/2010/main" val="313914798"/>
+        <p14:creationId xmlns:p14="http://schemas.microsoft.com/office/powerpoint/2010/main" val="2910927964"/>
       </p:ext>
     </p:extLst>
   </p:cSld>
@@ -569,8 +555,8 @@
         </p:nvSpPr>
         <p:spPr>
           <a:xfrm>
-            <a:off x="6629400" y="205979"/>
-            <a:ext cx="2057400" cy="4388644"/>
+            <a:off x="6629400" y="274638"/>
+            <a:ext cx="2057400" cy="5851525"/>
           </a:xfrm>
         </p:spPr>
         <p:txBody>
@@ -578,9 +564,10 @@
           <a:lstStyle/>
           <a:p>
             <a:r>
-              <a:rPr lang="en-US"/>
+              <a:rPr lang="en-US" smtClean="0"/>
               <a:t>Click to edit Master title style</a:t>
             </a:r>
+            <a:endParaRPr lang="en-US"/>
           </a:p>
         </p:txBody>
       </p:sp>
@@ -596,8 +583,8 @@
         </p:nvSpPr>
         <p:spPr>
           <a:xfrm>
-            <a:off x="457200" y="205979"/>
-            <a:ext cx="6019800" cy="4388644"/>
+            <a:off x="457200" y="274638"/>
+            <a:ext cx="6019800" cy="5851525"/>
           </a:xfrm>
         </p:spPr>
         <p:txBody>
@@ -606,37 +593,38 @@
           <a:p>
             <a:pPr lvl="0"/>
             <a:r>
-              <a:rPr lang="en-US"/>
+              <a:rPr lang="en-US" smtClean="0"/>
               <a:t>Click to edit Master text styles</a:t>
             </a:r>
           </a:p>
           <a:p>
             <a:pPr lvl="1"/>
             <a:r>
-              <a:rPr lang="en-US"/>
+              <a:rPr lang="en-US" smtClean="0"/>
               <a:t>Second level</a:t>
             </a:r>
           </a:p>
           <a:p>
             <a:pPr lvl="2"/>
             <a:r>
-              <a:rPr lang="en-US"/>
+              <a:rPr lang="en-US" smtClean="0"/>
               <a:t>Third level</a:t>
             </a:r>
           </a:p>
           <a:p>
             <a:pPr lvl="3"/>
             <a:r>
-              <a:rPr lang="en-US"/>
+              <a:rPr lang="en-US" smtClean="0"/>
               <a:t>Fourth level</a:t>
             </a:r>
           </a:p>
           <a:p>
             <a:pPr lvl="4"/>
             <a:r>
-              <a:rPr lang="en-US"/>
+              <a:rPr lang="en-US" smtClean="0"/>
               <a:t>Fifth level</a:t>
             </a:r>
+            <a:endParaRPr lang="en-US"/>
           </a:p>
         </p:txBody>
       </p:sp>
@@ -655,9 +643,9 @@
           <a:bodyPr/>
           <a:lstStyle/>
           <a:p>
-            <a:fld id="{241EB5C9-1307-BA42-ABA2-0BC069CD8E7F}" type="datetimeFigureOut">
-              <a:rPr lang="en-US" smtClean="0"/>
-              <a:t>1/2/22</a:t>
+            <a:fld id="{5BCAD085-E8A6-8845-BD4E-CB4CCA059FC4}" type="datetimeFigureOut">
+              <a:rPr lang="en-US" smtClean="0"/>
+              <a:t>1/27/13</a:t>
             </a:fld>
             <a:endParaRPr lang="en-US"/>
           </a:p>
@@ -697,7 +685,7 @@
           <a:bodyPr/>
           <a:lstStyle/>
           <a:p>
-            <a:fld id="{C5EF2332-01BF-834F-8236-50238282D533}" type="slidenum">
+            <a:fld id="{C1FF6DA9-008F-8B48-92A6-B652298478BF}" type="slidenum">
               <a:rPr lang="en-US" smtClean="0"/>
               <a:t>‹#›</a:t>
             </a:fld>
@@ -708,7 +696,7 @@
     </p:spTree>
     <p:extLst>
       <p:ext uri="{BB962C8B-B14F-4D97-AF65-F5344CB8AC3E}">
-        <p14:creationId xmlns:p14="http://schemas.microsoft.com/office/powerpoint/2010/main" val="2581529045"/>
+        <p14:creationId xmlns:p14="http://schemas.microsoft.com/office/powerpoint/2010/main" val="3612223792"/>
       </p:ext>
     </p:extLst>
   </p:cSld>
@@ -751,9 +739,10 @@
           <a:lstStyle/>
           <a:p>
             <a:r>
-              <a:rPr lang="en-US"/>
+              <a:rPr lang="en-US" smtClean="0"/>
               <a:t>Click to edit Master title style</a:t>
             </a:r>
+            <a:endParaRPr lang="en-US"/>
           </a:p>
         </p:txBody>
       </p:sp>
@@ -774,37 +763,38 @@
           <a:p>
             <a:pPr lvl="0"/>
             <a:r>
-              <a:rPr lang="en-US"/>
+              <a:rPr lang="en-US" smtClean="0"/>
               <a:t>Click to edit Master text styles</a:t>
             </a:r>
           </a:p>
           <a:p>
             <a:pPr lvl="1"/>
             <a:r>
-              <a:rPr lang="en-US"/>
+              <a:rPr lang="en-US" smtClean="0"/>
               <a:t>Second level</a:t>
             </a:r>
           </a:p>
           <a:p>
             <a:pPr lvl="2"/>
             <a:r>
-              <a:rPr lang="en-US"/>
+              <a:rPr lang="en-US" smtClean="0"/>
               <a:t>Third level</a:t>
             </a:r>
           </a:p>
           <a:p>
             <a:pPr lvl="3"/>
             <a:r>
-              <a:rPr lang="en-US"/>
+              <a:rPr lang="en-US" smtClean="0"/>
               <a:t>Fourth level</a:t>
             </a:r>
           </a:p>
           <a:p>
             <a:pPr lvl="4"/>
             <a:r>
-              <a:rPr lang="en-US"/>
+              <a:rPr lang="en-US" smtClean="0"/>
               <a:t>Fifth level</a:t>
             </a:r>
+            <a:endParaRPr lang="en-US"/>
           </a:p>
         </p:txBody>
       </p:sp>
@@ -823,9 +813,9 @@
           <a:bodyPr/>
           <a:lstStyle/>
           <a:p>
-            <a:fld id="{241EB5C9-1307-BA42-ABA2-0BC069CD8E7F}" type="datetimeFigureOut">
-              <a:rPr lang="en-US" smtClean="0"/>
-              <a:t>1/2/22</a:t>
+            <a:fld id="{5BCAD085-E8A6-8845-BD4E-CB4CCA059FC4}" type="datetimeFigureOut">
+              <a:rPr lang="en-US" smtClean="0"/>
+              <a:t>1/27/13</a:t>
             </a:fld>
             <a:endParaRPr lang="en-US"/>
           </a:p>
@@ -865,7 +855,7 @@
           <a:bodyPr/>
           <a:lstStyle/>
           <a:p>
-            <a:fld id="{C5EF2332-01BF-834F-8236-50238282D533}" type="slidenum">
+            <a:fld id="{C1FF6DA9-008F-8B48-92A6-B652298478BF}" type="slidenum">
               <a:rPr lang="en-US" smtClean="0"/>
               <a:t>‹#›</a:t>
             </a:fld>
@@ -876,7 +866,7 @@
     </p:spTree>
     <p:extLst>
       <p:ext uri="{BB962C8B-B14F-4D97-AF65-F5344CB8AC3E}">
-        <p14:creationId xmlns:p14="http://schemas.microsoft.com/office/powerpoint/2010/main" val="338346009"/>
+        <p14:creationId xmlns:p14="http://schemas.microsoft.com/office/powerpoint/2010/main" val="2614314258"/>
       </p:ext>
     </p:extLst>
   </p:cSld>
@@ -915,22 +905,23 @@
         </p:nvSpPr>
         <p:spPr>
           <a:xfrm>
-            <a:off x="722313" y="3305176"/>
-            <a:ext cx="7772400" cy="1021556"/>
+            <a:off x="722313" y="4406900"/>
+            <a:ext cx="7772400" cy="1362075"/>
           </a:xfrm>
         </p:spPr>
         <p:txBody>
           <a:bodyPr anchor="t"/>
           <a:lstStyle>
             <a:lvl1pPr algn="l">
-              <a:defRPr sz="3000" b="1" cap="all"/>
+              <a:defRPr sz="4000" b="1" cap="all"/>
             </a:lvl1pPr>
           </a:lstStyle>
           <a:p>
             <a:r>
-              <a:rPr lang="en-US"/>
+              <a:rPr lang="en-US" smtClean="0"/>
               <a:t>Click to edit Master title style</a:t>
             </a:r>
+            <a:endParaRPr lang="en-US"/>
           </a:p>
         </p:txBody>
       </p:sp>
@@ -946,8 +937,8 @@
         </p:nvSpPr>
         <p:spPr>
           <a:xfrm>
-            <a:off x="722313" y="2180035"/>
-            <a:ext cx="7772400" cy="1125140"/>
+            <a:off x="722313" y="2906713"/>
+            <a:ext cx="7772400" cy="1500187"/>
           </a:xfrm>
         </p:spPr>
         <p:txBody>
@@ -955,7 +946,7 @@
           <a:lstStyle>
             <a:lvl1pPr marL="0" indent="0">
               <a:buNone/>
-              <a:defRPr sz="1500">
+              <a:defRPr sz="2000">
                 <a:solidFill>
                   <a:schemeClr val="tx1">
                     <a:tint val="75000"/>
@@ -963,9 +954,9 @@
                 </a:solidFill>
               </a:defRPr>
             </a:lvl1pPr>
-            <a:lvl2pPr marL="342900" indent="0">
+            <a:lvl2pPr marL="457200" indent="0">
               <a:buNone/>
-              <a:defRPr sz="1350">
+              <a:defRPr sz="1800">
                 <a:solidFill>
                   <a:schemeClr val="tx1">
                     <a:tint val="75000"/>
@@ -973,9 +964,9 @@
                 </a:solidFill>
               </a:defRPr>
             </a:lvl2pPr>
-            <a:lvl3pPr marL="685800" indent="0">
+            <a:lvl3pPr marL="914400" indent="0">
               <a:buNone/>
-              <a:defRPr sz="1200">
+              <a:defRPr sz="1600">
                 <a:solidFill>
                   <a:schemeClr val="tx1">
                     <a:tint val="75000"/>
@@ -983,9 +974,9 @@
                 </a:solidFill>
               </a:defRPr>
             </a:lvl3pPr>
-            <a:lvl4pPr marL="1028700" indent="0">
+            <a:lvl4pPr marL="1371600" indent="0">
               <a:buNone/>
-              <a:defRPr sz="1050">
+              <a:defRPr sz="1400">
                 <a:solidFill>
                   <a:schemeClr val="tx1">
                     <a:tint val="75000"/>
@@ -993,9 +984,9 @@
                 </a:solidFill>
               </a:defRPr>
             </a:lvl4pPr>
-            <a:lvl5pPr marL="1371600" indent="0">
+            <a:lvl5pPr marL="1828800" indent="0">
               <a:buNone/>
-              <a:defRPr sz="1050">
+              <a:defRPr sz="1400">
                 <a:solidFill>
                   <a:schemeClr val="tx1">
                     <a:tint val="75000"/>
@@ -1003,9 +994,9 @@
                 </a:solidFill>
               </a:defRPr>
             </a:lvl5pPr>
-            <a:lvl6pPr marL="1714500" indent="0">
+            <a:lvl6pPr marL="2286000" indent="0">
               <a:buNone/>
-              <a:defRPr sz="1050">
+              <a:defRPr sz="1400">
                 <a:solidFill>
                   <a:schemeClr val="tx1">
                     <a:tint val="75000"/>
@@ -1013,9 +1004,9 @@
                 </a:solidFill>
               </a:defRPr>
             </a:lvl6pPr>
-            <a:lvl7pPr marL="2057400" indent="0">
+            <a:lvl7pPr marL="2743200" indent="0">
               <a:buNone/>
-              <a:defRPr sz="1050">
+              <a:defRPr sz="1400">
                 <a:solidFill>
                   <a:schemeClr val="tx1">
                     <a:tint val="75000"/>
@@ -1023,9 +1014,9 @@
                 </a:solidFill>
               </a:defRPr>
             </a:lvl7pPr>
-            <a:lvl8pPr marL="2400300" indent="0">
+            <a:lvl8pPr marL="3200400" indent="0">
               <a:buNone/>
-              <a:defRPr sz="1050">
+              <a:defRPr sz="1400">
                 <a:solidFill>
                   <a:schemeClr val="tx1">
                     <a:tint val="75000"/>
@@ -1033,9 +1024,9 @@
                 </a:solidFill>
               </a:defRPr>
             </a:lvl8pPr>
-            <a:lvl9pPr marL="2743200" indent="0">
+            <a:lvl9pPr marL="3657600" indent="0">
               <a:buNone/>
-              <a:defRPr sz="1050">
+              <a:defRPr sz="1400">
                 <a:solidFill>
                   <a:schemeClr val="tx1">
                     <a:tint val="75000"/>
@@ -1047,7 +1038,7 @@
           <a:p>
             <a:pPr lvl="0"/>
             <a:r>
-              <a:rPr lang="en-US"/>
+              <a:rPr lang="en-US" smtClean="0"/>
               <a:t>Click to edit Master text styles</a:t>
             </a:r>
           </a:p>
@@ -1068,9 +1059,9 @@
           <a:bodyPr/>
           <a:lstStyle/>
           <a:p>
-            <a:fld id="{241EB5C9-1307-BA42-ABA2-0BC069CD8E7F}" type="datetimeFigureOut">
-              <a:rPr lang="en-US" smtClean="0"/>
-              <a:t>1/2/22</a:t>
+            <a:fld id="{5BCAD085-E8A6-8845-BD4E-CB4CCA059FC4}" type="datetimeFigureOut">
+              <a:rPr lang="en-US" smtClean="0"/>
+              <a:t>1/27/13</a:t>
             </a:fld>
             <a:endParaRPr lang="en-US"/>
           </a:p>
@@ -1110,7 +1101,7 @@
           <a:bodyPr/>
           <a:lstStyle/>
           <a:p>
-            <a:fld id="{C5EF2332-01BF-834F-8236-50238282D533}" type="slidenum">
+            <a:fld id="{C1FF6DA9-008F-8B48-92A6-B652298478BF}" type="slidenum">
               <a:rPr lang="en-US" smtClean="0"/>
               <a:t>‹#›</a:t>
             </a:fld>
@@ -1121,7 +1112,7 @@
     </p:spTree>
     <p:extLst>
       <p:ext uri="{BB962C8B-B14F-4D97-AF65-F5344CB8AC3E}">
-        <p14:creationId xmlns:p14="http://schemas.microsoft.com/office/powerpoint/2010/main" val="1073069076"/>
+        <p14:creationId xmlns:p14="http://schemas.microsoft.com/office/powerpoint/2010/main" val="960648375"/>
       </p:ext>
     </p:extLst>
   </p:cSld>
@@ -1164,9 +1155,10 @@
           <a:lstStyle/>
           <a:p>
             <a:r>
-              <a:rPr lang="en-US"/>
+              <a:rPr lang="en-US" smtClean="0"/>
               <a:t>Click to edit Master title style</a:t>
             </a:r>
+            <a:endParaRPr lang="en-US"/>
           </a:p>
         </p:txBody>
       </p:sp>
@@ -1182,75 +1174,76 @@
         </p:nvSpPr>
         <p:spPr>
           <a:xfrm>
-            <a:off x="457200" y="1200151"/>
-            <a:ext cx="4038600" cy="3394472"/>
+            <a:off x="457200" y="1600200"/>
+            <a:ext cx="4038600" cy="4525963"/>
           </a:xfrm>
         </p:spPr>
         <p:txBody>
           <a:bodyPr/>
           <a:lstStyle>
             <a:lvl1pPr>
-              <a:defRPr sz="2100"/>
+              <a:defRPr sz="2800"/>
             </a:lvl1pPr>
             <a:lvl2pPr>
-              <a:defRPr sz="1800"/>
+              <a:defRPr sz="2400"/>
             </a:lvl2pPr>
             <a:lvl3pPr>
-              <a:defRPr sz="1500"/>
+              <a:defRPr sz="2000"/>
             </a:lvl3pPr>
             <a:lvl4pPr>
-              <a:defRPr sz="1350"/>
+              <a:defRPr sz="1800"/>
             </a:lvl4pPr>
             <a:lvl5pPr>
-              <a:defRPr sz="1350"/>
+              <a:defRPr sz="1800"/>
             </a:lvl5pPr>
             <a:lvl6pPr>
-              <a:defRPr sz="1350"/>
+              <a:defRPr sz="1800"/>
             </a:lvl6pPr>
             <a:lvl7pPr>
-              <a:defRPr sz="1350"/>
+              <a:defRPr sz="1800"/>
             </a:lvl7pPr>
             <a:lvl8pPr>
-              <a:defRPr sz="1350"/>
+              <a:defRPr sz="1800"/>
             </a:lvl8pPr>
             <a:lvl9pPr>
-              <a:defRPr sz="1350"/>
+              <a:defRPr sz="1800"/>
             </a:lvl9pPr>
           </a:lstStyle>
           <a:p>
             <a:pPr lvl="0"/>
             <a:r>
-              <a:rPr lang="en-US"/>
+              <a:rPr lang="en-US" smtClean="0"/>
               <a:t>Click to edit Master text styles</a:t>
             </a:r>
           </a:p>
           <a:p>
             <a:pPr lvl="1"/>
             <a:r>
-              <a:rPr lang="en-US"/>
+              <a:rPr lang="en-US" smtClean="0"/>
               <a:t>Second level</a:t>
             </a:r>
           </a:p>
           <a:p>
             <a:pPr lvl="2"/>
             <a:r>
-              <a:rPr lang="en-US"/>
+              <a:rPr lang="en-US" smtClean="0"/>
               <a:t>Third level</a:t>
             </a:r>
           </a:p>
           <a:p>
             <a:pPr lvl="3"/>
             <a:r>
-              <a:rPr lang="en-US"/>
+              <a:rPr lang="en-US" smtClean="0"/>
               <a:t>Fourth level</a:t>
             </a:r>
           </a:p>
           <a:p>
             <a:pPr lvl="4"/>
             <a:r>
-              <a:rPr lang="en-US"/>
+              <a:rPr lang="en-US" smtClean="0"/>
               <a:t>Fifth level</a:t>
             </a:r>
+            <a:endParaRPr lang="en-US"/>
           </a:p>
         </p:txBody>
       </p:sp>
@@ -1266,75 +1259,76 @@
         </p:nvSpPr>
         <p:spPr>
           <a:xfrm>
-            <a:off x="4648200" y="1200151"/>
-            <a:ext cx="4038600" cy="3394472"/>
+            <a:off x="4648200" y="1600200"/>
+            <a:ext cx="4038600" cy="4525963"/>
           </a:xfrm>
         </p:spPr>
         <p:txBody>
           <a:bodyPr/>
           <a:lstStyle>
             <a:lvl1pPr>
-              <a:defRPr sz="2100"/>
+              <a:defRPr sz="2800"/>
             </a:lvl1pPr>
             <a:lvl2pPr>
-              <a:defRPr sz="1800"/>
+              <a:defRPr sz="2400"/>
             </a:lvl2pPr>
             <a:lvl3pPr>
-              <a:defRPr sz="1500"/>
+              <a:defRPr sz="2000"/>
             </a:lvl3pPr>
             <a:lvl4pPr>
-              <a:defRPr sz="1350"/>
+              <a:defRPr sz="1800"/>
             </a:lvl4pPr>
             <a:lvl5pPr>
-              <a:defRPr sz="1350"/>
+              <a:defRPr sz="1800"/>
             </a:lvl5pPr>
             <a:lvl6pPr>
-              <a:defRPr sz="1350"/>
+              <a:defRPr sz="1800"/>
             </a:lvl6pPr>
             <a:lvl7pPr>
-              <a:defRPr sz="1350"/>
+              <a:defRPr sz="1800"/>
             </a:lvl7pPr>
             <a:lvl8pPr>
-              <a:defRPr sz="1350"/>
+              <a:defRPr sz="1800"/>
             </a:lvl8pPr>
             <a:lvl9pPr>
-              <a:defRPr sz="1350"/>
+              <a:defRPr sz="1800"/>
             </a:lvl9pPr>
           </a:lstStyle>
           <a:p>
             <a:pPr lvl="0"/>
             <a:r>
-              <a:rPr lang="en-US"/>
+              <a:rPr lang="en-US" smtClean="0"/>
               <a:t>Click to edit Master text styles</a:t>
             </a:r>
           </a:p>
           <a:p>
             <a:pPr lvl="1"/>
             <a:r>
-              <a:rPr lang="en-US"/>
+              <a:rPr lang="en-US" smtClean="0"/>
               <a:t>Second level</a:t>
             </a:r>
           </a:p>
           <a:p>
             <a:pPr lvl="2"/>
             <a:r>
-              <a:rPr lang="en-US"/>
+              <a:rPr lang="en-US" smtClean="0"/>
               <a:t>Third level</a:t>
             </a:r>
           </a:p>
           <a:p>
             <a:pPr lvl="3"/>
             <a:r>
-              <a:rPr lang="en-US"/>
+              <a:rPr lang="en-US" smtClean="0"/>
               <a:t>Fourth level</a:t>
             </a:r>
           </a:p>
           <a:p>
             <a:pPr lvl="4"/>
             <a:r>
-              <a:rPr lang="en-US"/>
+              <a:rPr lang="en-US" smtClean="0"/>
               <a:t>Fifth level</a:t>
             </a:r>
+            <a:endParaRPr lang="en-US"/>
           </a:p>
         </p:txBody>
       </p:sp>
@@ -1353,9 +1347,9 @@
           <a:bodyPr/>
           <a:lstStyle/>
           <a:p>
-            <a:fld id="{241EB5C9-1307-BA42-ABA2-0BC069CD8E7F}" type="datetimeFigureOut">
-              <a:rPr lang="en-US" smtClean="0"/>
-              <a:t>1/2/22</a:t>
+            <a:fld id="{5BCAD085-E8A6-8845-BD4E-CB4CCA059FC4}" type="datetimeFigureOut">
+              <a:rPr lang="en-US" smtClean="0"/>
+              <a:t>1/27/13</a:t>
             </a:fld>
             <a:endParaRPr lang="en-US"/>
           </a:p>
@@ -1395,7 +1389,7 @@
           <a:bodyPr/>
           <a:lstStyle/>
           <a:p>
-            <a:fld id="{C5EF2332-01BF-834F-8236-50238282D533}" type="slidenum">
+            <a:fld id="{C1FF6DA9-008F-8B48-92A6-B652298478BF}" type="slidenum">
               <a:rPr lang="en-US" smtClean="0"/>
               <a:t>‹#›</a:t>
             </a:fld>
@@ -1406,7 +1400,7 @@
     </p:spTree>
     <p:extLst>
       <p:ext uri="{BB962C8B-B14F-4D97-AF65-F5344CB8AC3E}">
-        <p14:creationId xmlns:p14="http://schemas.microsoft.com/office/powerpoint/2010/main" val="2619886245"/>
+        <p14:creationId xmlns:p14="http://schemas.microsoft.com/office/powerpoint/2010/main" val="2782244947"/>
       </p:ext>
     </p:extLst>
   </p:cSld>
@@ -1453,9 +1447,10 @@
           </a:lstStyle>
           <a:p>
             <a:r>
-              <a:rPr lang="en-US"/>
+              <a:rPr lang="en-US" smtClean="0"/>
               <a:t>Click to edit Master title style</a:t>
             </a:r>
+            <a:endParaRPr lang="en-US"/>
           </a:p>
         </p:txBody>
       </p:sp>
@@ -1471,8 +1466,8 @@
         </p:nvSpPr>
         <p:spPr>
           <a:xfrm>
-            <a:off x="457200" y="1151335"/>
-            <a:ext cx="4040188" cy="479822"/>
+            <a:off x="457200" y="1535113"/>
+            <a:ext cx="4040188" cy="639762"/>
           </a:xfrm>
         </p:spPr>
         <p:txBody>
@@ -1480,45 +1475,45 @@
           <a:lstStyle>
             <a:lvl1pPr marL="0" indent="0">
               <a:buNone/>
+              <a:defRPr sz="2400" b="1"/>
+            </a:lvl1pPr>
+            <a:lvl2pPr marL="457200" indent="0">
+              <a:buNone/>
+              <a:defRPr sz="2000" b="1"/>
+            </a:lvl2pPr>
+            <a:lvl3pPr marL="914400" indent="0">
+              <a:buNone/>
               <a:defRPr sz="1800" b="1"/>
-            </a:lvl1pPr>
-            <a:lvl2pPr marL="342900" indent="0">
+            </a:lvl3pPr>
+            <a:lvl4pPr marL="1371600" indent="0">
               <a:buNone/>
-              <a:defRPr sz="1500" b="1"/>
-            </a:lvl2pPr>
-            <a:lvl3pPr marL="685800" indent="0">
+              <a:defRPr sz="1600" b="1"/>
+            </a:lvl4pPr>
+            <a:lvl5pPr marL="1828800" indent="0">
               <a:buNone/>
-              <a:defRPr sz="1350" b="1"/>
-            </a:lvl3pPr>
-            <a:lvl4pPr marL="1028700" indent="0">
+              <a:defRPr sz="1600" b="1"/>
+            </a:lvl5pPr>
+            <a:lvl6pPr marL="2286000" indent="0">
               <a:buNone/>
-              <a:defRPr sz="1200" b="1"/>
-            </a:lvl4pPr>
-            <a:lvl5pPr marL="1371600" indent="0">
+              <a:defRPr sz="1600" b="1"/>
+            </a:lvl6pPr>
+            <a:lvl7pPr marL="2743200" indent="0">
               <a:buNone/>
-              <a:defRPr sz="1200" b="1"/>
-            </a:lvl5pPr>
-            <a:lvl6pPr marL="1714500" indent="0">
+              <a:defRPr sz="1600" b="1"/>
+            </a:lvl7pPr>
+            <a:lvl8pPr marL="3200400" indent="0">
               <a:buNone/>
-              <a:defRPr sz="1200" b="1"/>
-            </a:lvl6pPr>
-            <a:lvl7pPr marL="2057400" indent="0">
+              <a:defRPr sz="1600" b="1"/>
+            </a:lvl8pPr>
+            <a:lvl9pPr marL="3657600" indent="0">
               <a:buNone/>
-              <a:defRPr sz="1200" b="1"/>
-            </a:lvl7pPr>
-            <a:lvl8pPr marL="2400300" indent="0">
-              <a:buNone/>
-              <a:defRPr sz="1200" b="1"/>
-            </a:lvl8pPr>
-            <a:lvl9pPr marL="2743200" indent="0">
-              <a:buNone/>
-              <a:defRPr sz="1200" b="1"/>
+              <a:defRPr sz="1600" b="1"/>
             </a:lvl9pPr>
           </a:lstStyle>
           <a:p>
             <a:pPr lvl="0"/>
             <a:r>
-              <a:rPr lang="en-US"/>
+              <a:rPr lang="en-US" smtClean="0"/>
               <a:t>Click to edit Master text styles</a:t>
             </a:r>
           </a:p>
@@ -1536,75 +1531,76 @@
         </p:nvSpPr>
         <p:spPr>
           <a:xfrm>
-            <a:off x="457200" y="1631156"/>
-            <a:ext cx="4040188" cy="2963466"/>
+            <a:off x="457200" y="2174875"/>
+            <a:ext cx="4040188" cy="3951288"/>
           </a:xfrm>
         </p:spPr>
         <p:txBody>
           <a:bodyPr/>
           <a:lstStyle>
             <a:lvl1pPr>
-              <a:defRPr sz="1800"/>
+              <a:defRPr sz="2400"/>
             </a:lvl1pPr>
             <a:lvl2pPr>
-              <a:defRPr sz="1500"/>
+              <a:defRPr sz="2000"/>
             </a:lvl2pPr>
             <a:lvl3pPr>
-              <a:defRPr sz="1350"/>
+              <a:defRPr sz="1800"/>
             </a:lvl3pPr>
             <a:lvl4pPr>
-              <a:defRPr sz="1200"/>
+              <a:defRPr sz="1600"/>
             </a:lvl4pPr>
             <a:lvl5pPr>
-              <a:defRPr sz="1200"/>
+              <a:defRPr sz="1600"/>
             </a:lvl5pPr>
             <a:lvl6pPr>
-              <a:defRPr sz="1200"/>
+              <a:defRPr sz="1600"/>
             </a:lvl6pPr>
             <a:lvl7pPr>
-              <a:defRPr sz="1200"/>
+              <a:defRPr sz="1600"/>
             </a:lvl7pPr>
             <a:lvl8pPr>
-              <a:defRPr sz="1200"/>
+              <a:defRPr sz="1600"/>
             </a:lvl8pPr>
             <a:lvl9pPr>
-              <a:defRPr sz="1200"/>
+              <a:defRPr sz="1600"/>
             </a:lvl9pPr>
           </a:lstStyle>
           <a:p>
             <a:pPr lvl="0"/>
             <a:r>
-              <a:rPr lang="en-US"/>
+              <a:rPr lang="en-US" smtClean="0"/>
               <a:t>Click to edit Master text styles</a:t>
             </a:r>
           </a:p>
           <a:p>
             <a:pPr lvl="1"/>
             <a:r>
-              <a:rPr lang="en-US"/>
+              <a:rPr lang="en-US" smtClean="0"/>
               <a:t>Second level</a:t>
             </a:r>
           </a:p>
           <a:p>
             <a:pPr lvl="2"/>
             <a:r>
-              <a:rPr lang="en-US"/>
+              <a:rPr lang="en-US" smtClean="0"/>
               <a:t>Third level</a:t>
             </a:r>
           </a:p>
           <a:p>
             <a:pPr lvl="3"/>
             <a:r>
-              <a:rPr lang="en-US"/>
+              <a:rPr lang="en-US" smtClean="0"/>
               <a:t>Fourth level</a:t>
             </a:r>
           </a:p>
           <a:p>
             <a:pPr lvl="4"/>
             <a:r>
-              <a:rPr lang="en-US"/>
+              <a:rPr lang="en-US" smtClean="0"/>
               <a:t>Fifth level</a:t>
             </a:r>
+            <a:endParaRPr lang="en-US"/>
           </a:p>
         </p:txBody>
       </p:sp>
@@ -1620,8 +1616,8 @@
         </p:nvSpPr>
         <p:spPr>
           <a:xfrm>
-            <a:off x="4645026" y="1151335"/>
-            <a:ext cx="4041775" cy="479822"/>
+            <a:off x="4645025" y="1535113"/>
+            <a:ext cx="4041775" cy="639762"/>
           </a:xfrm>
         </p:spPr>
         <p:txBody>
@@ -1629,45 +1625,45 @@
           <a:lstStyle>
             <a:lvl1pPr marL="0" indent="0">
               <a:buNone/>
+              <a:defRPr sz="2400" b="1"/>
+            </a:lvl1pPr>
+            <a:lvl2pPr marL="457200" indent="0">
+              <a:buNone/>
+              <a:defRPr sz="2000" b="1"/>
+            </a:lvl2pPr>
+            <a:lvl3pPr marL="914400" indent="0">
+              <a:buNone/>
               <a:defRPr sz="1800" b="1"/>
-            </a:lvl1pPr>
-            <a:lvl2pPr marL="342900" indent="0">
+            </a:lvl3pPr>
+            <a:lvl4pPr marL="1371600" indent="0">
               <a:buNone/>
-              <a:defRPr sz="1500" b="1"/>
-            </a:lvl2pPr>
-            <a:lvl3pPr marL="685800" indent="0">
+              <a:defRPr sz="1600" b="1"/>
+            </a:lvl4pPr>
+            <a:lvl5pPr marL="1828800" indent="0">
               <a:buNone/>
-              <a:defRPr sz="1350" b="1"/>
-            </a:lvl3pPr>
-            <a:lvl4pPr marL="1028700" indent="0">
+              <a:defRPr sz="1600" b="1"/>
+            </a:lvl5pPr>
+            <a:lvl6pPr marL="2286000" indent="0">
               <a:buNone/>
-              <a:defRPr sz="1200" b="1"/>
-            </a:lvl4pPr>
-            <a:lvl5pPr marL="1371600" indent="0">
+              <a:defRPr sz="1600" b="1"/>
+            </a:lvl6pPr>
+            <a:lvl7pPr marL="2743200" indent="0">
               <a:buNone/>
-              <a:defRPr sz="1200" b="1"/>
-            </a:lvl5pPr>
-            <a:lvl6pPr marL="1714500" indent="0">
+              <a:defRPr sz="1600" b="1"/>
+            </a:lvl7pPr>
+            <a:lvl8pPr marL="3200400" indent="0">
               <a:buNone/>
-              <a:defRPr sz="1200" b="1"/>
-            </a:lvl6pPr>
-            <a:lvl7pPr marL="2057400" indent="0">
+              <a:defRPr sz="1600" b="1"/>
+            </a:lvl8pPr>
+            <a:lvl9pPr marL="3657600" indent="0">
               <a:buNone/>
-              <a:defRPr sz="1200" b="1"/>
-            </a:lvl7pPr>
-            <a:lvl8pPr marL="2400300" indent="0">
-              <a:buNone/>
-              <a:defRPr sz="1200" b="1"/>
-            </a:lvl8pPr>
-            <a:lvl9pPr marL="2743200" indent="0">
-              <a:buNone/>
-              <a:defRPr sz="1200" b="1"/>
+              <a:defRPr sz="1600" b="1"/>
             </a:lvl9pPr>
           </a:lstStyle>
           <a:p>
             <a:pPr lvl="0"/>
             <a:r>
-              <a:rPr lang="en-US"/>
+              <a:rPr lang="en-US" smtClean="0"/>
               <a:t>Click to edit Master text styles</a:t>
             </a:r>
           </a:p>
@@ -1685,75 +1681,76 @@
         </p:nvSpPr>
         <p:spPr>
           <a:xfrm>
-            <a:off x="4645026" y="1631156"/>
-            <a:ext cx="4041775" cy="2963466"/>
+            <a:off x="4645025" y="2174875"/>
+            <a:ext cx="4041775" cy="3951288"/>
           </a:xfrm>
         </p:spPr>
         <p:txBody>
           <a:bodyPr/>
           <a:lstStyle>
             <a:lvl1pPr>
-              <a:defRPr sz="1800"/>
+              <a:defRPr sz="2400"/>
             </a:lvl1pPr>
             <a:lvl2pPr>
-              <a:defRPr sz="1500"/>
+              <a:defRPr sz="2000"/>
             </a:lvl2pPr>
             <a:lvl3pPr>
-              <a:defRPr sz="1350"/>
+              <a:defRPr sz="1800"/>
             </a:lvl3pPr>
             <a:lvl4pPr>
-              <a:defRPr sz="1200"/>
+              <a:defRPr sz="1600"/>
             </a:lvl4pPr>
             <a:lvl5pPr>
-              <a:defRPr sz="1200"/>
+              <a:defRPr sz="1600"/>
             </a:lvl5pPr>
             <a:lvl6pPr>
-              <a:defRPr sz="1200"/>
+              <a:defRPr sz="1600"/>
             </a:lvl6pPr>
             <a:lvl7pPr>
-              <a:defRPr sz="1200"/>
+              <a:defRPr sz="1600"/>
             </a:lvl7pPr>
             <a:lvl8pPr>
-              <a:defRPr sz="1200"/>
+              <a:defRPr sz="1600"/>
             </a:lvl8pPr>
             <a:lvl9pPr>
-              <a:defRPr sz="1200"/>
+              <a:defRPr sz="1600"/>
             </a:lvl9pPr>
           </a:lstStyle>
           <a:p>
             <a:pPr lvl="0"/>
             <a:r>
-              <a:rPr lang="en-US"/>
+              <a:rPr lang="en-US" smtClean="0"/>
               <a:t>Click to edit Master text styles</a:t>
             </a:r>
           </a:p>
           <a:p>
             <a:pPr lvl="1"/>
             <a:r>
-              <a:rPr lang="en-US"/>
+              <a:rPr lang="en-US" smtClean="0"/>
               <a:t>Second level</a:t>
             </a:r>
           </a:p>
           <a:p>
             <a:pPr lvl="2"/>
             <a:r>
-              <a:rPr lang="en-US"/>
+              <a:rPr lang="en-US" smtClean="0"/>
               <a:t>Third level</a:t>
             </a:r>
           </a:p>
           <a:p>
             <a:pPr lvl="3"/>
             <a:r>
-              <a:rPr lang="en-US"/>
+              <a:rPr lang="en-US" smtClean="0"/>
               <a:t>Fourth level</a:t>
             </a:r>
           </a:p>
           <a:p>
             <a:pPr lvl="4"/>
             <a:r>
-              <a:rPr lang="en-US"/>
+              <a:rPr lang="en-US" smtClean="0"/>
               <a:t>Fifth level</a:t>
             </a:r>
+            <a:endParaRPr lang="en-US"/>
           </a:p>
         </p:txBody>
       </p:sp>
@@ -1772,9 +1769,9 @@
           <a:bodyPr/>
           <a:lstStyle/>
           <a:p>
-            <a:fld id="{241EB5C9-1307-BA42-ABA2-0BC069CD8E7F}" type="datetimeFigureOut">
-              <a:rPr lang="en-US" smtClean="0"/>
-              <a:t>1/2/22</a:t>
+            <a:fld id="{5BCAD085-E8A6-8845-BD4E-CB4CCA059FC4}" type="datetimeFigureOut">
+              <a:rPr lang="en-US" smtClean="0"/>
+              <a:t>1/27/13</a:t>
             </a:fld>
             <a:endParaRPr lang="en-US"/>
           </a:p>
@@ -1814,7 +1811,7 @@
           <a:bodyPr/>
           <a:lstStyle/>
           <a:p>
-            <a:fld id="{C5EF2332-01BF-834F-8236-50238282D533}" type="slidenum">
+            <a:fld id="{C1FF6DA9-008F-8B48-92A6-B652298478BF}" type="slidenum">
               <a:rPr lang="en-US" smtClean="0"/>
               <a:t>‹#›</a:t>
             </a:fld>
@@ -1825,7 +1822,7 @@
     </p:spTree>
     <p:extLst>
       <p:ext uri="{BB962C8B-B14F-4D97-AF65-F5344CB8AC3E}">
-        <p14:creationId xmlns:p14="http://schemas.microsoft.com/office/powerpoint/2010/main" val="2535793967"/>
+        <p14:creationId xmlns:p14="http://schemas.microsoft.com/office/powerpoint/2010/main" val="990158736"/>
       </p:ext>
     </p:extLst>
   </p:cSld>
@@ -1868,9 +1865,10 @@
           <a:lstStyle/>
           <a:p>
             <a:r>
-              <a:rPr lang="en-US"/>
+              <a:rPr lang="en-US" smtClean="0"/>
               <a:t>Click to edit Master title style</a:t>
             </a:r>
+            <a:endParaRPr lang="en-US"/>
           </a:p>
         </p:txBody>
       </p:sp>
@@ -1889,9 +1887,9 @@
           <a:bodyPr/>
           <a:lstStyle/>
           <a:p>
-            <a:fld id="{241EB5C9-1307-BA42-ABA2-0BC069CD8E7F}" type="datetimeFigureOut">
-              <a:rPr lang="en-US" smtClean="0"/>
-              <a:t>1/2/22</a:t>
+            <a:fld id="{5BCAD085-E8A6-8845-BD4E-CB4CCA059FC4}" type="datetimeFigureOut">
+              <a:rPr lang="en-US" smtClean="0"/>
+              <a:t>1/27/13</a:t>
             </a:fld>
             <a:endParaRPr lang="en-US"/>
           </a:p>
@@ -1931,7 +1929,7 @@
           <a:bodyPr/>
           <a:lstStyle/>
           <a:p>
-            <a:fld id="{C5EF2332-01BF-834F-8236-50238282D533}" type="slidenum">
+            <a:fld id="{C1FF6DA9-008F-8B48-92A6-B652298478BF}" type="slidenum">
               <a:rPr lang="en-US" smtClean="0"/>
               <a:t>‹#›</a:t>
             </a:fld>
@@ -1942,7 +1940,7 @@
     </p:spTree>
     <p:extLst>
       <p:ext uri="{BB962C8B-B14F-4D97-AF65-F5344CB8AC3E}">
-        <p14:creationId xmlns:p14="http://schemas.microsoft.com/office/powerpoint/2010/main" val="3472721253"/>
+        <p14:creationId xmlns:p14="http://schemas.microsoft.com/office/powerpoint/2010/main" val="727027711"/>
       </p:ext>
     </p:extLst>
   </p:cSld>
@@ -1984,9 +1982,9 @@
           <a:bodyPr/>
           <a:lstStyle/>
           <a:p>
-            <a:fld id="{241EB5C9-1307-BA42-ABA2-0BC069CD8E7F}" type="datetimeFigureOut">
-              <a:rPr lang="en-US" smtClean="0"/>
-              <a:t>1/2/22</a:t>
+            <a:fld id="{5BCAD085-E8A6-8845-BD4E-CB4CCA059FC4}" type="datetimeFigureOut">
+              <a:rPr lang="en-US" smtClean="0"/>
+              <a:t>1/27/13</a:t>
             </a:fld>
             <a:endParaRPr lang="en-US"/>
           </a:p>
@@ -2026,7 +2024,7 @@
           <a:bodyPr/>
           <a:lstStyle/>
           <a:p>
-            <a:fld id="{C5EF2332-01BF-834F-8236-50238282D533}" type="slidenum">
+            <a:fld id="{C1FF6DA9-008F-8B48-92A6-B652298478BF}" type="slidenum">
               <a:rPr lang="en-US" smtClean="0"/>
               <a:t>‹#›</a:t>
             </a:fld>
@@ -2037,7 +2035,7 @@
     </p:spTree>
     <p:extLst>
       <p:ext uri="{BB962C8B-B14F-4D97-AF65-F5344CB8AC3E}">
-        <p14:creationId xmlns:p14="http://schemas.microsoft.com/office/powerpoint/2010/main" val="2130901097"/>
+        <p14:creationId xmlns:p14="http://schemas.microsoft.com/office/powerpoint/2010/main" val="1212999818"/>
       </p:ext>
     </p:extLst>
   </p:cSld>
@@ -2076,22 +2074,23 @@
         </p:nvSpPr>
         <p:spPr>
           <a:xfrm>
-            <a:off x="457201" y="204787"/>
-            <a:ext cx="3008313" cy="871538"/>
+            <a:off x="457200" y="273050"/>
+            <a:ext cx="3008313" cy="1162050"/>
           </a:xfrm>
         </p:spPr>
         <p:txBody>
           <a:bodyPr anchor="b"/>
           <a:lstStyle>
             <a:lvl1pPr algn="l">
-              <a:defRPr sz="1500" b="1"/>
+              <a:defRPr sz="2000" b="1"/>
             </a:lvl1pPr>
           </a:lstStyle>
           <a:p>
             <a:r>
-              <a:rPr lang="en-US"/>
+              <a:rPr lang="en-US" smtClean="0"/>
               <a:t>Click to edit Master title style</a:t>
             </a:r>
+            <a:endParaRPr lang="en-US"/>
           </a:p>
         </p:txBody>
       </p:sp>
@@ -2107,75 +2106,76 @@
         </p:nvSpPr>
         <p:spPr>
           <a:xfrm>
-            <a:off x="3575050" y="204788"/>
-            <a:ext cx="5111750" cy="4389835"/>
+            <a:off x="3575050" y="273050"/>
+            <a:ext cx="5111750" cy="5853113"/>
           </a:xfrm>
         </p:spPr>
         <p:txBody>
           <a:bodyPr/>
           <a:lstStyle>
             <a:lvl1pPr>
-              <a:defRPr sz="2400"/>
+              <a:defRPr sz="3200"/>
             </a:lvl1pPr>
             <a:lvl2pPr>
-              <a:defRPr sz="2100"/>
+              <a:defRPr sz="2800"/>
             </a:lvl2pPr>
             <a:lvl3pPr>
-              <a:defRPr sz="1800"/>
+              <a:defRPr sz="2400"/>
             </a:lvl3pPr>
             <a:lvl4pPr>
-              <a:defRPr sz="1500"/>
+              <a:defRPr sz="2000"/>
             </a:lvl4pPr>
             <a:lvl5pPr>
-              <a:defRPr sz="1500"/>
+              <a:defRPr sz="2000"/>
             </a:lvl5pPr>
             <a:lvl6pPr>
-              <a:defRPr sz="1500"/>
+              <a:defRPr sz="2000"/>
             </a:lvl6pPr>
             <a:lvl7pPr>
-              <a:defRPr sz="1500"/>
+              <a:defRPr sz="2000"/>
             </a:lvl7pPr>
             <a:lvl8pPr>
-              <a:defRPr sz="1500"/>
+              <a:defRPr sz="2000"/>
             </a:lvl8pPr>
             <a:lvl9pPr>
-              <a:defRPr sz="1500"/>
+              <a:defRPr sz="2000"/>
             </a:lvl9pPr>
           </a:lstStyle>
           <a:p>
             <a:pPr lvl="0"/>
             <a:r>
-              <a:rPr lang="en-US"/>
+              <a:rPr lang="en-US" smtClean="0"/>
               <a:t>Click to edit Master text styles</a:t>
             </a:r>
           </a:p>
           <a:p>
             <a:pPr lvl="1"/>
             <a:r>
-              <a:rPr lang="en-US"/>
+              <a:rPr lang="en-US" smtClean="0"/>
               <a:t>Second level</a:t>
             </a:r>
           </a:p>
           <a:p>
             <a:pPr lvl="2"/>
             <a:r>
-              <a:rPr lang="en-US"/>
+              <a:rPr lang="en-US" smtClean="0"/>
               <a:t>Third level</a:t>
             </a:r>
           </a:p>
           <a:p>
             <a:pPr lvl="3"/>
             <a:r>
-              <a:rPr lang="en-US"/>
+              <a:rPr lang="en-US" smtClean="0"/>
               <a:t>Fourth level</a:t>
             </a:r>
           </a:p>
           <a:p>
             <a:pPr lvl="4"/>
             <a:r>
-              <a:rPr lang="en-US"/>
+              <a:rPr lang="en-US" smtClean="0"/>
               <a:t>Fifth level</a:t>
             </a:r>
+            <a:endParaRPr lang="en-US"/>
           </a:p>
         </p:txBody>
       </p:sp>
@@ -2191,8 +2191,8 @@
         </p:nvSpPr>
         <p:spPr>
           <a:xfrm>
-            <a:off x="457201" y="1076326"/>
-            <a:ext cx="3008313" cy="3518297"/>
+            <a:off x="457200" y="1435100"/>
+            <a:ext cx="3008313" cy="4691063"/>
           </a:xfrm>
         </p:spPr>
         <p:txBody>
@@ -2200,45 +2200,45 @@
           <a:lstStyle>
             <a:lvl1pPr marL="0" indent="0">
               <a:buNone/>
-              <a:defRPr sz="1050"/>
+              <a:defRPr sz="1400"/>
             </a:lvl1pPr>
-            <a:lvl2pPr marL="342900" indent="0">
+            <a:lvl2pPr marL="457200" indent="0">
+              <a:buNone/>
+              <a:defRPr sz="1200"/>
+            </a:lvl2pPr>
+            <a:lvl3pPr marL="914400" indent="0">
+              <a:buNone/>
+              <a:defRPr sz="1000"/>
+            </a:lvl3pPr>
+            <a:lvl4pPr marL="1371600" indent="0">
               <a:buNone/>
               <a:defRPr sz="900"/>
-            </a:lvl2pPr>
-            <a:lvl3pPr marL="685800" indent="0">
+            </a:lvl4pPr>
+            <a:lvl5pPr marL="1828800" indent="0">
               <a:buNone/>
-              <a:defRPr sz="750"/>
-            </a:lvl3pPr>
-            <a:lvl4pPr marL="1028700" indent="0">
+              <a:defRPr sz="900"/>
+            </a:lvl5pPr>
+            <a:lvl6pPr marL="2286000" indent="0">
               <a:buNone/>
-              <a:defRPr sz="675"/>
-            </a:lvl4pPr>
-            <a:lvl5pPr marL="1371600" indent="0">
+              <a:defRPr sz="900"/>
+            </a:lvl6pPr>
+            <a:lvl7pPr marL="2743200" indent="0">
               <a:buNone/>
-              <a:defRPr sz="675"/>
-            </a:lvl5pPr>
-            <a:lvl6pPr marL="1714500" indent="0">
+              <a:defRPr sz="900"/>
+            </a:lvl7pPr>
+            <a:lvl8pPr marL="3200400" indent="0">
               <a:buNone/>
-              <a:defRPr sz="675"/>
-            </a:lvl6pPr>
-            <a:lvl7pPr marL="2057400" indent="0">
+              <a:defRPr sz="900"/>
+            </a:lvl8pPr>
+            <a:lvl9pPr marL="3657600" indent="0">
               <a:buNone/>
-              <a:defRPr sz="675"/>
-            </a:lvl7pPr>
-            <a:lvl8pPr marL="2400300" indent="0">
-              <a:buNone/>
-              <a:defRPr sz="675"/>
-            </a:lvl8pPr>
-            <a:lvl9pPr marL="2743200" indent="0">
-              <a:buNone/>
-              <a:defRPr sz="675"/>
+              <a:defRPr sz="900"/>
             </a:lvl9pPr>
           </a:lstStyle>
           <a:p>
             <a:pPr lvl="0"/>
             <a:r>
-              <a:rPr lang="en-US"/>
+              <a:rPr lang="en-US" smtClean="0"/>
               <a:t>Click to edit Master text styles</a:t>
             </a:r>
           </a:p>
@@ -2259,9 +2259,9 @@
           <a:bodyPr/>
           <a:lstStyle/>
           <a:p>
-            <a:fld id="{241EB5C9-1307-BA42-ABA2-0BC069CD8E7F}" type="datetimeFigureOut">
-              <a:rPr lang="en-US" smtClean="0"/>
-              <a:t>1/2/22</a:t>
+            <a:fld id="{5BCAD085-E8A6-8845-BD4E-CB4CCA059FC4}" type="datetimeFigureOut">
+              <a:rPr lang="en-US" smtClean="0"/>
+              <a:t>1/27/13</a:t>
             </a:fld>
             <a:endParaRPr lang="en-US"/>
           </a:p>
@@ -2301,7 +2301,7 @@
           <a:bodyPr/>
           <a:lstStyle/>
           <a:p>
-            <a:fld id="{C5EF2332-01BF-834F-8236-50238282D533}" type="slidenum">
+            <a:fld id="{C1FF6DA9-008F-8B48-92A6-B652298478BF}" type="slidenum">
               <a:rPr lang="en-US" smtClean="0"/>
               <a:t>‹#›</a:t>
             </a:fld>
@@ -2312,7 +2312,7 @@
     </p:spTree>
     <p:extLst>
       <p:ext uri="{BB962C8B-B14F-4D97-AF65-F5344CB8AC3E}">
-        <p14:creationId xmlns:p14="http://schemas.microsoft.com/office/powerpoint/2010/main" val="3540895647"/>
+        <p14:creationId xmlns:p14="http://schemas.microsoft.com/office/powerpoint/2010/main" val="1840726560"/>
       </p:ext>
     </p:extLst>
   </p:cSld>
@@ -2351,22 +2351,23 @@
         </p:nvSpPr>
         <p:spPr>
           <a:xfrm>
-            <a:off x="1792288" y="3600450"/>
-            <a:ext cx="5486400" cy="425054"/>
+            <a:off x="1792288" y="4800600"/>
+            <a:ext cx="5486400" cy="566738"/>
           </a:xfrm>
         </p:spPr>
         <p:txBody>
           <a:bodyPr anchor="b"/>
           <a:lstStyle>
             <a:lvl1pPr algn="l">
-              <a:defRPr sz="1500" b="1"/>
+              <a:defRPr sz="2000" b="1"/>
             </a:lvl1pPr>
           </a:lstStyle>
           <a:p>
             <a:r>
-              <a:rPr lang="en-US"/>
+              <a:rPr lang="en-US" smtClean="0"/>
               <a:t>Click to edit Master title style</a:t>
             </a:r>
+            <a:endParaRPr lang="en-US"/>
           </a:p>
         </p:txBody>
       </p:sp>
@@ -2382,8 +2383,8 @@
         </p:nvSpPr>
         <p:spPr>
           <a:xfrm>
-            <a:off x="1792288" y="459581"/>
-            <a:ext cx="5486400" cy="3086100"/>
+            <a:off x="1792288" y="612775"/>
+            <a:ext cx="5486400" cy="4114800"/>
           </a:xfrm>
         </p:spPr>
         <p:txBody>
@@ -2391,39 +2392,39 @@
           <a:lstStyle>
             <a:lvl1pPr marL="0" indent="0">
               <a:buNone/>
+              <a:defRPr sz="3200"/>
+            </a:lvl1pPr>
+            <a:lvl2pPr marL="457200" indent="0">
+              <a:buNone/>
+              <a:defRPr sz="2800"/>
+            </a:lvl2pPr>
+            <a:lvl3pPr marL="914400" indent="0">
+              <a:buNone/>
               <a:defRPr sz="2400"/>
-            </a:lvl1pPr>
-            <a:lvl2pPr marL="342900" indent="0">
+            </a:lvl3pPr>
+            <a:lvl4pPr marL="1371600" indent="0">
               <a:buNone/>
-              <a:defRPr sz="2100"/>
-            </a:lvl2pPr>
-            <a:lvl3pPr marL="685800" indent="0">
+              <a:defRPr sz="2000"/>
+            </a:lvl4pPr>
+            <a:lvl5pPr marL="1828800" indent="0">
               <a:buNone/>
-              <a:defRPr sz="1800"/>
-            </a:lvl3pPr>
-            <a:lvl4pPr marL="1028700" indent="0">
+              <a:defRPr sz="2000"/>
+            </a:lvl5pPr>
+            <a:lvl6pPr marL="2286000" indent="0">
               <a:buNone/>
-              <a:defRPr sz="1500"/>
-            </a:lvl4pPr>
-            <a:lvl5pPr marL="1371600" indent="0">
+              <a:defRPr sz="2000"/>
+            </a:lvl6pPr>
+            <a:lvl7pPr marL="2743200" indent="0">
               <a:buNone/>
-              <a:defRPr sz="1500"/>
-            </a:lvl5pPr>
-            <a:lvl6pPr marL="1714500" indent="0">
+              <a:defRPr sz="2000"/>
+            </a:lvl7pPr>
+            <a:lvl8pPr marL="3200400" indent="0">
               <a:buNone/>
-              <a:defRPr sz="1500"/>
-            </a:lvl6pPr>
-            <a:lvl7pPr marL="2057400" indent="0">
+              <a:defRPr sz="2000"/>
+            </a:lvl8pPr>
+            <a:lvl9pPr marL="3657600" indent="0">
               <a:buNone/>
-              <a:defRPr sz="1500"/>
-            </a:lvl7pPr>
-            <a:lvl8pPr marL="2400300" indent="0">
-              <a:buNone/>
-              <a:defRPr sz="1500"/>
-            </a:lvl8pPr>
-            <a:lvl9pPr marL="2743200" indent="0">
-              <a:buNone/>
-              <a:defRPr sz="1500"/>
+              <a:defRPr sz="2000"/>
             </a:lvl9pPr>
           </a:lstStyle>
           <a:p>
@@ -2443,8 +2444,8 @@
         </p:nvSpPr>
         <p:spPr>
           <a:xfrm>
-            <a:off x="1792288" y="4025503"/>
-            <a:ext cx="5486400" cy="603647"/>
+            <a:off x="1792288" y="5367338"/>
+            <a:ext cx="5486400" cy="804862"/>
           </a:xfrm>
         </p:spPr>
         <p:txBody>
@@ -2452,45 +2453,45 @@
           <a:lstStyle>
             <a:lvl1pPr marL="0" indent="0">
               <a:buNone/>
-              <a:defRPr sz="1050"/>
+              <a:defRPr sz="1400"/>
             </a:lvl1pPr>
-            <a:lvl2pPr marL="342900" indent="0">
+            <a:lvl2pPr marL="457200" indent="0">
+              <a:buNone/>
+              <a:defRPr sz="1200"/>
+            </a:lvl2pPr>
+            <a:lvl3pPr marL="914400" indent="0">
+              <a:buNone/>
+              <a:defRPr sz="1000"/>
+            </a:lvl3pPr>
+            <a:lvl4pPr marL="1371600" indent="0">
               <a:buNone/>
               <a:defRPr sz="900"/>
-            </a:lvl2pPr>
-            <a:lvl3pPr marL="685800" indent="0">
+            </a:lvl4pPr>
+            <a:lvl5pPr marL="1828800" indent="0">
               <a:buNone/>
-              <a:defRPr sz="750"/>
-            </a:lvl3pPr>
-            <a:lvl4pPr marL="1028700" indent="0">
+              <a:defRPr sz="900"/>
+            </a:lvl5pPr>
+            <a:lvl6pPr marL="2286000" indent="0">
               <a:buNone/>
-              <a:defRPr sz="675"/>
-            </a:lvl4pPr>
-            <a:lvl5pPr marL="1371600" indent="0">
+              <a:defRPr sz="900"/>
+            </a:lvl6pPr>
+            <a:lvl7pPr marL="2743200" indent="0">
               <a:buNone/>
-              <a:defRPr sz="675"/>
-            </a:lvl5pPr>
-            <a:lvl6pPr marL="1714500" indent="0">
+              <a:defRPr sz="900"/>
+            </a:lvl7pPr>
+            <a:lvl8pPr marL="3200400" indent="0">
               <a:buNone/>
-              <a:defRPr sz="675"/>
-            </a:lvl6pPr>
-            <a:lvl7pPr marL="2057400" indent="0">
+              <a:defRPr sz="900"/>
+            </a:lvl8pPr>
+            <a:lvl9pPr marL="3657600" indent="0">
               <a:buNone/>
-              <a:defRPr sz="675"/>
-            </a:lvl7pPr>
-            <a:lvl8pPr marL="2400300" indent="0">
-              <a:buNone/>
-              <a:defRPr sz="675"/>
-            </a:lvl8pPr>
-            <a:lvl9pPr marL="2743200" indent="0">
-              <a:buNone/>
-              <a:defRPr sz="675"/>
+              <a:defRPr sz="900"/>
             </a:lvl9pPr>
           </a:lstStyle>
           <a:p>
             <a:pPr lvl="0"/>
             <a:r>
-              <a:rPr lang="en-US"/>
+              <a:rPr lang="en-US" smtClean="0"/>
               <a:t>Click to edit Master text styles</a:t>
             </a:r>
           </a:p>
@@ -2511,9 +2512,9 @@
           <a:bodyPr/>
           <a:lstStyle/>
           <a:p>
-            <a:fld id="{241EB5C9-1307-BA42-ABA2-0BC069CD8E7F}" type="datetimeFigureOut">
-              <a:rPr lang="en-US" smtClean="0"/>
-              <a:t>1/2/22</a:t>
+            <a:fld id="{5BCAD085-E8A6-8845-BD4E-CB4CCA059FC4}" type="datetimeFigureOut">
+              <a:rPr lang="en-US" smtClean="0"/>
+              <a:t>1/27/13</a:t>
             </a:fld>
             <a:endParaRPr lang="en-US"/>
           </a:p>
@@ -2553,7 +2554,7 @@
           <a:bodyPr/>
           <a:lstStyle/>
           <a:p>
-            <a:fld id="{C5EF2332-01BF-834F-8236-50238282D533}" type="slidenum">
+            <a:fld id="{C1FF6DA9-008F-8B48-92A6-B652298478BF}" type="slidenum">
               <a:rPr lang="en-US" smtClean="0"/>
               <a:t>‹#›</a:t>
             </a:fld>
@@ -2564,7 +2565,7 @@
     </p:spTree>
     <p:extLst>
       <p:ext uri="{BB962C8B-B14F-4D97-AF65-F5344CB8AC3E}">
-        <p14:creationId xmlns:p14="http://schemas.microsoft.com/office/powerpoint/2010/main" val="3566899855"/>
+        <p14:creationId xmlns:p14="http://schemas.microsoft.com/office/powerpoint/2010/main" val="3889236939"/>
       </p:ext>
     </p:extLst>
   </p:cSld>
@@ -2575,7 +2576,7 @@
 </file>
 
 <file path=ppt/slideMasters/slideMaster1.xml><?xml version="1.0" encoding="utf-8"?>
-<p:sldMaster xmlns:a="http://schemas.openxmlformats.org/drawingml/2006/main" xmlns:p="http://schemas.openxmlformats.org/presentationml/2006/main" xmlns:r="http://schemas.openxmlformats.org/officeDocument/2006/relationships">
+<p:sldMaster xmlns:a="http://schemas.openxmlformats.org/drawingml/2006/main" xmlns:r="http://schemas.openxmlformats.org/officeDocument/2006/relationships" xmlns:p="http://schemas.openxmlformats.org/presentationml/2006/main">
   <p:cSld>
     <p:bg>
       <p:bgRef idx="1001">
@@ -2608,23 +2609,24 @@
         </p:nvSpPr>
         <p:spPr>
           <a:xfrm>
-            <a:off x="457200" y="205979"/>
-            <a:ext cx="8229600" cy="857250"/>
+            <a:off x="457200" y="274638"/>
+            <a:ext cx="8229600" cy="1143000"/>
           </a:xfrm>
           <a:prstGeom prst="rect">
             <a:avLst/>
           </a:prstGeom>
         </p:spPr>
         <p:txBody>
-          <a:bodyPr anchor="ctr" bIns="45720" lIns="91440" rIns="91440" rtlCol="0" tIns="45720" vert="horz">
+          <a:bodyPr vert="horz" lIns="91440" tIns="45720" rIns="91440" bIns="45720" rtlCol="0" anchor="ctr">
             <a:normAutofit/>
           </a:bodyPr>
           <a:lstStyle/>
           <a:p>
             <a:r>
-              <a:rPr lang="en-US"/>
+              <a:rPr lang="en-US" smtClean="0"/>
               <a:t>Click to edit Master title style</a:t>
             </a:r>
+            <a:endParaRPr lang="en-US"/>
           </a:p>
         </p:txBody>
       </p:sp>
@@ -2635,57 +2637,58 @@
             <a:spLocks noGrp="1"/>
           </p:cNvSpPr>
           <p:nvPr>
-            <p:ph idx="1" type="body"/>
+            <p:ph type="body" idx="1"/>
           </p:nvPr>
         </p:nvSpPr>
         <p:spPr>
           <a:xfrm>
-            <a:off x="457200" y="1200151"/>
-            <a:ext cx="8229600" cy="3394472"/>
+            <a:off x="457200" y="1600200"/>
+            <a:ext cx="8229600" cy="4525963"/>
           </a:xfrm>
           <a:prstGeom prst="rect">
             <a:avLst/>
           </a:prstGeom>
         </p:spPr>
         <p:txBody>
-          <a:bodyPr bIns="45720" lIns="91440" rIns="91440" rtlCol="0" tIns="45720" vert="horz">
+          <a:bodyPr vert="horz" lIns="91440" tIns="45720" rIns="91440" bIns="45720" rtlCol="0">
             <a:normAutofit/>
           </a:bodyPr>
           <a:lstStyle/>
           <a:p>
             <a:pPr lvl="0"/>
             <a:r>
-              <a:rPr lang="en-US"/>
+              <a:rPr lang="en-US" smtClean="0"/>
               <a:t>Click to edit Master text styles</a:t>
             </a:r>
           </a:p>
           <a:p>
             <a:pPr lvl="1"/>
             <a:r>
-              <a:rPr lang="en-US"/>
+              <a:rPr lang="en-US" smtClean="0"/>
               <a:t>Second level</a:t>
             </a:r>
           </a:p>
           <a:p>
             <a:pPr lvl="2"/>
             <a:r>
-              <a:rPr lang="en-US"/>
+              <a:rPr lang="en-US" smtClean="0"/>
               <a:t>Third level</a:t>
             </a:r>
           </a:p>
           <a:p>
             <a:pPr lvl="3"/>
             <a:r>
-              <a:rPr lang="en-US"/>
+              <a:rPr lang="en-US" smtClean="0"/>
               <a:t>Fourth level</a:t>
             </a:r>
           </a:p>
           <a:p>
             <a:pPr lvl="4"/>
             <a:r>
-              <a:rPr lang="en-US"/>
+              <a:rPr lang="en-US" smtClean="0"/>
               <a:t>Fifth level</a:t>
             </a:r>
+            <a:endParaRPr lang="en-US"/>
           </a:p>
         </p:txBody>
       </p:sp>
@@ -2696,23 +2699,23 @@
             <a:spLocks noGrp="1"/>
           </p:cNvSpPr>
           <p:nvPr>
-            <p:ph idx="2" sz="half" type="dt"/>
+            <p:ph type="dt" sz="half" idx="2"/>
           </p:nvPr>
         </p:nvSpPr>
         <p:spPr>
           <a:xfrm>
-            <a:off x="457200" y="4767263"/>
-            <a:ext cx="2133600" cy="273844"/>
+            <a:off x="457200" y="6356350"/>
+            <a:ext cx="2133600" cy="365125"/>
           </a:xfrm>
           <a:prstGeom prst="rect">
             <a:avLst/>
           </a:prstGeom>
         </p:spPr>
         <p:txBody>
-          <a:bodyPr anchor="ctr" bIns="45720" lIns="91440" rIns="91440" rtlCol="0" tIns="45720" vert="horz"/>
+          <a:bodyPr vert="horz" lIns="91440" tIns="45720" rIns="91440" bIns="45720" rtlCol="0" anchor="ctr"/>
           <a:lstStyle>
             <a:lvl1pPr algn="l">
-              <a:defRPr sz="900">
+              <a:defRPr sz="1200">
                 <a:solidFill>
                   <a:schemeClr val="tx1">
                     <a:tint val="75000"/>
@@ -2722,9 +2725,9 @@
             </a:lvl1pPr>
           </a:lstStyle>
           <a:p>
-            <a:fld id="{241EB5C9-1307-BA42-ABA2-0BC069CD8E7F}" type="datetimeFigureOut">
-              <a:rPr lang="en-US" smtClean="0"/>
-              <a:t>1/2/22</a:t>
+            <a:fld id="{5BCAD085-E8A6-8845-BD4E-CB4CCA059FC4}" type="datetimeFigureOut">
+              <a:rPr lang="en-US" smtClean="0"/>
+              <a:t>1/27/13</a:t>
             </a:fld>
             <a:endParaRPr lang="en-US"/>
           </a:p>
@@ -2737,23 +2740,23 @@
             <a:spLocks noGrp="1"/>
           </p:cNvSpPr>
           <p:nvPr>
-            <p:ph idx="3" sz="quarter" type="ftr"/>
+            <p:ph type="ftr" sz="quarter" idx="3"/>
           </p:nvPr>
         </p:nvSpPr>
         <p:spPr>
           <a:xfrm>
-            <a:off x="3124200" y="4767263"/>
-            <a:ext cx="2895600" cy="273844"/>
+            <a:off x="3124200" y="6356350"/>
+            <a:ext cx="2895600" cy="365125"/>
           </a:xfrm>
           <a:prstGeom prst="rect">
             <a:avLst/>
           </a:prstGeom>
         </p:spPr>
         <p:txBody>
-          <a:bodyPr anchor="ctr" bIns="45720" lIns="91440" rIns="91440" rtlCol="0" tIns="45720" vert="horz"/>
+          <a:bodyPr vert="horz" lIns="91440" tIns="45720" rIns="91440" bIns="45720" rtlCol="0" anchor="ctr"/>
           <a:lstStyle>
             <a:lvl1pPr algn="ctr">
-              <a:defRPr sz="900">
+              <a:defRPr sz="1200">
                 <a:solidFill>
                   <a:schemeClr val="tx1">
                     <a:tint val="75000"/>
@@ -2774,23 +2777,23 @@
             <a:spLocks noGrp="1"/>
           </p:cNvSpPr>
           <p:nvPr>
-            <p:ph idx="4" sz="quarter" type="sldNum"/>
+            <p:ph type="sldNum" sz="quarter" idx="4"/>
           </p:nvPr>
         </p:nvSpPr>
         <p:spPr>
           <a:xfrm>
-            <a:off x="6553200" y="4767263"/>
-            <a:ext cx="2133600" cy="273844"/>
+            <a:off x="6553200" y="6356350"/>
+            <a:ext cx="2133600" cy="365125"/>
           </a:xfrm>
           <a:prstGeom prst="rect">
             <a:avLst/>
           </a:prstGeom>
         </p:spPr>
         <p:txBody>
-          <a:bodyPr anchor="ctr" bIns="45720" lIns="91440" rIns="91440" rtlCol="0" tIns="45720" vert="horz"/>
+          <a:bodyPr vert="horz" lIns="91440" tIns="45720" rIns="91440" bIns="45720" rtlCol="0" anchor="ctr"/>
           <a:lstStyle>
             <a:lvl1pPr algn="r">
-              <a:defRPr sz="900">
+              <a:defRPr sz="1200">
                 <a:solidFill>
                   <a:schemeClr val="tx1">
                     <a:tint val="75000"/>
@@ -2800,7 +2803,7 @@
             </a:lvl1pPr>
           </a:lstStyle>
           <a:p>
-            <a:fld id="{C5EF2332-01BF-834F-8236-50238282D533}" type="slidenum">
+            <a:fld id="{C1FF6DA9-008F-8B48-92A6-B652298478BF}" type="slidenum">
               <a:rPr lang="en-US" smtClean="0"/>
               <a:t>‹#›</a:t>
             </a:fld>
@@ -2811,11 +2814,11 @@
     </p:spTree>
     <p:extLst>
       <p:ext uri="{BB962C8B-B14F-4D97-AF65-F5344CB8AC3E}">
-        <p14:creationId xmlns:p14="http://schemas.microsoft.com/office/powerpoint/2010/main" val="3676200875"/>
+        <p14:creationId xmlns:p14="http://schemas.microsoft.com/office/powerpoint/2010/main" val="2209977519"/>
       </p:ext>
     </p:extLst>
   </p:cSld>
-  <p:clrMap accent1="accent1" accent2="accent2" accent3="accent3" accent4="accent4" accent5="accent5" accent6="accent6" bg1="lt1" bg2="lt2" folHlink="folHlink" hlink="hlink" tx1="dk1" tx2="dk2"/>
+  <p:clrMap bg1="lt1" tx1="dk1" bg2="lt2" tx2="dk2" accent1="accent1" accent2="accent2" accent3="accent3" accent4="accent4" accent5="accent5" accent6="accent6" hlink="hlink" folHlink="folHlink"/>
   <p:sldLayoutIdLst>
     <p:sldLayoutId id="2147483649" r:id="rId1"/>
     <p:sldLayoutId id="2147483650" r:id="rId2"/>
@@ -2831,12 +2834,12 @@
   </p:sldLayoutIdLst>
   <p:txStyles>
     <p:titleStyle>
-      <a:lvl1pPr algn="ctr" defTabSz="342900" eaLnBrk="1" hangingPunct="1" latinLnBrk="0" rtl="0">
+      <a:lvl1pPr algn="ctr" defTabSz="457200" rtl="0" eaLnBrk="1" latinLnBrk="0" hangingPunct="1">
         <a:spcBef>
           <a:spcPct val="0"/>
         </a:spcBef>
         <a:buNone/>
-        <a:defRPr kern="1200" sz="3300">
+        <a:defRPr sz="4400" kern="1200">
           <a:solidFill>
             <a:schemeClr val="tx1"/>
           </a:solidFill>
@@ -2847,13 +2850,13 @@
       </a:lvl1pPr>
     </p:titleStyle>
     <p:bodyStyle>
-      <a:lvl1pPr algn="l" defTabSz="342900" eaLnBrk="1" hangingPunct="1" indent="-342900" latinLnBrk="0" marL="342900" rtl="0">
+      <a:lvl1pPr marL="342900" indent="-342900" algn="l" defTabSz="457200" rtl="0" eaLnBrk="1" latinLnBrk="0" hangingPunct="1">
         <a:spcBef>
           <a:spcPct val="20000"/>
         </a:spcBef>
         <a:buFont typeface="Arial"/>
         <a:buChar char="•"/>
-        <a:defRPr kern="1200" sz="2400">
+        <a:defRPr sz="3200" kern="1200">
           <a:solidFill>
             <a:schemeClr val="tx1"/>
           </a:solidFill>
@@ -2862,13 +2865,13 @@
           <a:cs typeface="+mn-cs"/>
         </a:defRPr>
       </a:lvl1pPr>
-      <a:lvl2pPr algn="l" defTabSz="342900" eaLnBrk="1" hangingPunct="1" indent="-342900" latinLnBrk="0" marL="685800" rtl="0">
+      <a:lvl2pPr marL="742950" indent="-285750" algn="l" defTabSz="457200" rtl="0" eaLnBrk="1" latinLnBrk="0" hangingPunct="1">
         <a:spcBef>
           <a:spcPct val="20000"/>
         </a:spcBef>
         <a:buFont typeface="Arial"/>
         <a:buChar char="–"/>
-        <a:defRPr kern="1200" sz="2100">
+        <a:defRPr sz="2800" kern="1200">
           <a:solidFill>
             <a:schemeClr val="tx1"/>
           </a:solidFill>
@@ -2877,13 +2880,13 @@
           <a:cs typeface="+mn-cs"/>
         </a:defRPr>
       </a:lvl2pPr>
-      <a:lvl3pPr algn="l" defTabSz="342900" eaLnBrk="1" hangingPunct="1" indent="-342900" latinLnBrk="0" marL="1028700" rtl="0">
+      <a:lvl3pPr marL="1143000" indent="-228600" algn="l" defTabSz="457200" rtl="0" eaLnBrk="1" latinLnBrk="0" hangingPunct="1">
         <a:spcBef>
           <a:spcPct val="20000"/>
         </a:spcBef>
         <a:buFont typeface="Arial"/>
         <a:buChar char="•"/>
-        <a:defRPr kern="1200" sz="1800">
+        <a:defRPr sz="2400" kern="1200">
           <a:solidFill>
             <a:schemeClr val="tx1"/>
           </a:solidFill>
@@ -2892,13 +2895,13 @@
           <a:cs typeface="+mn-cs"/>
         </a:defRPr>
       </a:lvl3pPr>
-      <a:lvl4pPr algn="l" defTabSz="342900" eaLnBrk="1" hangingPunct="1" indent="-342900" latinLnBrk="0" marL="1371600" rtl="0">
+      <a:lvl4pPr marL="1600200" indent="-228600" algn="l" defTabSz="457200" rtl="0" eaLnBrk="1" latinLnBrk="0" hangingPunct="1">
         <a:spcBef>
           <a:spcPct val="20000"/>
         </a:spcBef>
         <a:buFont typeface="Arial"/>
         <a:buChar char="–"/>
-        <a:defRPr kern="1200" sz="1500">
+        <a:defRPr sz="2000" kern="1200">
           <a:solidFill>
             <a:schemeClr val="tx1"/>
           </a:solidFill>
@@ -2907,13 +2910,13 @@
           <a:cs typeface="+mn-cs"/>
         </a:defRPr>
       </a:lvl4pPr>
-      <a:lvl5pPr algn="l" defTabSz="342900" eaLnBrk="1" hangingPunct="1" indent="-342900" latinLnBrk="0" marL="1714500" rtl="0">
+      <a:lvl5pPr marL="2057400" indent="-228600" algn="l" defTabSz="457200" rtl="0" eaLnBrk="1" latinLnBrk="0" hangingPunct="1">
         <a:spcBef>
           <a:spcPct val="20000"/>
         </a:spcBef>
         <a:buFont typeface="Arial"/>
         <a:buChar char="»"/>
-        <a:defRPr kern="1200" sz="1500">
+        <a:defRPr sz="2000" kern="1200">
           <a:solidFill>
             <a:schemeClr val="tx1"/>
           </a:solidFill>
@@ -2922,13 +2925,13 @@
           <a:cs typeface="+mn-cs"/>
         </a:defRPr>
       </a:lvl5pPr>
-      <a:lvl6pPr algn="l" defTabSz="342900" eaLnBrk="1" hangingPunct="1" indent="-342900" latinLnBrk="0" marL="2057400" rtl="0">
+      <a:lvl6pPr marL="2514600" indent="-228600" algn="l" defTabSz="457200" rtl="0" eaLnBrk="1" latinLnBrk="0" hangingPunct="1">
         <a:spcBef>
           <a:spcPct val="20000"/>
         </a:spcBef>
         <a:buFont typeface="Arial"/>
         <a:buChar char="•"/>
-        <a:defRPr kern="1200" sz="1500">
+        <a:defRPr sz="2000" kern="1200">
           <a:solidFill>
             <a:schemeClr val="tx1"/>
           </a:solidFill>
@@ -2937,13 +2940,13 @@
           <a:cs typeface="+mn-cs"/>
         </a:defRPr>
       </a:lvl6pPr>
-      <a:lvl7pPr algn="l" defTabSz="342900" eaLnBrk="1" hangingPunct="1" indent="-342900" latinLnBrk="0" marL="2400300" rtl="0">
+      <a:lvl7pPr marL="2971800" indent="-228600" algn="l" defTabSz="457200" rtl="0" eaLnBrk="1" latinLnBrk="0" hangingPunct="1">
         <a:spcBef>
           <a:spcPct val="20000"/>
         </a:spcBef>
         <a:buFont typeface="Arial"/>
         <a:buChar char="•"/>
-        <a:defRPr kern="1200" sz="1500">
+        <a:defRPr sz="2000" kern="1200">
           <a:solidFill>
             <a:schemeClr val="tx1"/>
           </a:solidFill>
@@ -2952,13 +2955,13 @@
           <a:cs typeface="+mn-cs"/>
         </a:defRPr>
       </a:lvl7pPr>
-      <a:lvl8pPr algn="l" defTabSz="342900" eaLnBrk="1" hangingPunct="1" indent="-342900" latinLnBrk="0" marL="2743200" rtl="0">
+      <a:lvl8pPr marL="3429000" indent="-228600" algn="l" defTabSz="457200" rtl="0" eaLnBrk="1" latinLnBrk="0" hangingPunct="1">
         <a:spcBef>
           <a:spcPct val="20000"/>
         </a:spcBef>
         <a:buFont typeface="Arial"/>
         <a:buChar char="•"/>
-        <a:defRPr kern="1200" sz="1500">
+        <a:defRPr sz="2000" kern="1200">
           <a:solidFill>
             <a:schemeClr val="tx1"/>
           </a:solidFill>
@@ -2967,13 +2970,13 @@
           <a:cs typeface="+mn-cs"/>
         </a:defRPr>
       </a:lvl8pPr>
-      <a:lvl9pPr algn="l" defTabSz="342900" eaLnBrk="1" hangingPunct="1" indent="-342900" latinLnBrk="0" marL="3086100" rtl="0">
+      <a:lvl9pPr marL="3886200" indent="-228600" algn="l" defTabSz="457200" rtl="0" eaLnBrk="1" latinLnBrk="0" hangingPunct="1">
         <a:spcBef>
           <a:spcPct val="20000"/>
         </a:spcBef>
         <a:buFont typeface="Arial"/>
         <a:buChar char="•"/>
-        <a:defRPr kern="1200" sz="1500">
+        <a:defRPr sz="2000" kern="1200">
           <a:solidFill>
             <a:schemeClr val="tx1"/>
           </a:solidFill>
@@ -2987,8 +2990,8 @@
       <a:defPPr>
         <a:defRPr lang="en-US"/>
       </a:defPPr>
-      <a:lvl1pPr algn="l" defTabSz="342900" eaLnBrk="1" hangingPunct="1" latinLnBrk="0" marL="0" rtl="0">
-        <a:defRPr kern="1200" sz="1350">
+      <a:lvl1pPr marL="0" algn="l" defTabSz="457200" rtl="0" eaLnBrk="1" latinLnBrk="0" hangingPunct="1">
+        <a:defRPr sz="1800" kern="1200">
           <a:solidFill>
             <a:schemeClr val="tx1"/>
           </a:solidFill>
@@ -2997,8 +3000,8 @@
           <a:cs typeface="+mn-cs"/>
         </a:defRPr>
       </a:lvl1pPr>
-      <a:lvl2pPr algn="l" defTabSz="342900" eaLnBrk="1" hangingPunct="1" latinLnBrk="0" marL="342900" rtl="0">
-        <a:defRPr kern="1200" sz="1350">
+      <a:lvl2pPr marL="457200" algn="l" defTabSz="457200" rtl="0" eaLnBrk="1" latinLnBrk="0" hangingPunct="1">
+        <a:defRPr sz="1800" kern="1200">
           <a:solidFill>
             <a:schemeClr val="tx1"/>
           </a:solidFill>
@@ -3007,8 +3010,8 @@
           <a:cs typeface="+mn-cs"/>
         </a:defRPr>
       </a:lvl2pPr>
-      <a:lvl3pPr algn="l" defTabSz="342900" eaLnBrk="1" hangingPunct="1" latinLnBrk="0" marL="685800" rtl="0">
-        <a:defRPr kern="1200" sz="1350">
+      <a:lvl3pPr marL="914400" algn="l" defTabSz="457200" rtl="0" eaLnBrk="1" latinLnBrk="0" hangingPunct="1">
+        <a:defRPr sz="1800" kern="1200">
           <a:solidFill>
             <a:schemeClr val="tx1"/>
           </a:solidFill>
@@ -3017,8 +3020,8 @@
           <a:cs typeface="+mn-cs"/>
         </a:defRPr>
       </a:lvl3pPr>
-      <a:lvl4pPr algn="l" defTabSz="342900" eaLnBrk="1" hangingPunct="1" latinLnBrk="0" marL="1028700" rtl="0">
-        <a:defRPr kern="1200" sz="1350">
+      <a:lvl4pPr marL="1371600" algn="l" defTabSz="457200" rtl="0" eaLnBrk="1" latinLnBrk="0" hangingPunct="1">
+        <a:defRPr sz="1800" kern="1200">
           <a:solidFill>
             <a:schemeClr val="tx1"/>
           </a:solidFill>
@@ -3027,8 +3030,8 @@
           <a:cs typeface="+mn-cs"/>
         </a:defRPr>
       </a:lvl4pPr>
-      <a:lvl5pPr algn="l" defTabSz="342900" eaLnBrk="1" hangingPunct="1" latinLnBrk="0" marL="1371600" rtl="0">
-        <a:defRPr kern="1200" sz="1350">
+      <a:lvl5pPr marL="1828800" algn="l" defTabSz="457200" rtl="0" eaLnBrk="1" latinLnBrk="0" hangingPunct="1">
+        <a:defRPr sz="1800" kern="1200">
           <a:solidFill>
             <a:schemeClr val="tx1"/>
           </a:solidFill>
@@ -3037,8 +3040,8 @@
           <a:cs typeface="+mn-cs"/>
         </a:defRPr>
       </a:lvl5pPr>
-      <a:lvl6pPr algn="l" defTabSz="342900" eaLnBrk="1" hangingPunct="1" latinLnBrk="0" marL="1714500" rtl="0">
-        <a:defRPr kern="1200" sz="1350">
+      <a:lvl6pPr marL="2286000" algn="l" defTabSz="457200" rtl="0" eaLnBrk="1" latinLnBrk="0" hangingPunct="1">
+        <a:defRPr sz="1800" kern="1200">
           <a:solidFill>
             <a:schemeClr val="tx1"/>
           </a:solidFill>
@@ -3047,8 +3050,8 @@
           <a:cs typeface="+mn-cs"/>
         </a:defRPr>
       </a:lvl6pPr>
-      <a:lvl7pPr algn="l" defTabSz="342900" eaLnBrk="1" hangingPunct="1" latinLnBrk="0" marL="2057400" rtl="0">
-        <a:defRPr kern="1200" sz="1350">
+      <a:lvl7pPr marL="2743200" algn="l" defTabSz="457200" rtl="0" eaLnBrk="1" latinLnBrk="0" hangingPunct="1">
+        <a:defRPr sz="1800" kern="1200">
           <a:solidFill>
             <a:schemeClr val="tx1"/>
           </a:solidFill>
@@ -3057,8 +3060,8 @@
           <a:cs typeface="+mn-cs"/>
         </a:defRPr>
       </a:lvl7pPr>
-      <a:lvl8pPr algn="l" defTabSz="342900" eaLnBrk="1" hangingPunct="1" latinLnBrk="0" marL="2400300" rtl="0">
-        <a:defRPr kern="1200" sz="1350">
+      <a:lvl8pPr marL="3200400" algn="l" defTabSz="457200" rtl="0" eaLnBrk="1" latinLnBrk="0" hangingPunct="1">
+        <a:defRPr sz="1800" kern="1200">
           <a:solidFill>
             <a:schemeClr val="tx1"/>
           </a:solidFill>
@@ -3067,8 +3070,8 @@
           <a:cs typeface="+mn-cs"/>
         </a:defRPr>
       </a:lvl8pPr>
-      <a:lvl9pPr algn="l" defTabSz="342900" eaLnBrk="1" hangingPunct="1" latinLnBrk="0" marL="2743200" rtl="0">
-        <a:defRPr kern="1200" sz="1350">
+      <a:lvl9pPr marL="3657600" algn="l" defTabSz="457200" rtl="0" eaLnBrk="1" latinLnBrk="0" hangingPunct="1">
+        <a:defRPr sz="1800" kern="1200">
           <a:solidFill>
             <a:schemeClr val="tx1"/>
           </a:solidFill>
@@ -3083,529 +3086,1056 @@
 </file>
 
 <file path=ppt/slides/slide1.xml><?xml version="1.0" encoding="utf-8"?>
-<p:sld xmlns:a="http://schemas.openxmlformats.org/drawingml/2006/main" xmlns:r="http://schemas.openxmlformats.org/officeDocument/2006/relationships" xmlns:p="http://schemas.openxmlformats.org/presentationml/2006/main">
+<p:sld xmlns:a="http://schemas.openxmlformats.org/drawingml/2006/main" xmlns:p="http://schemas.openxmlformats.org/presentationml/2006/main" xmlns:r="http://schemas.openxmlformats.org/officeDocument/2006/relationships">
   <p:cSld>
+    <p:bg>
+      <p:bgPr>
+        <a:solidFill>
+          <a:srgbClr val="FFFFFF"/>
+        </a:solidFill>
+        <a:effectLst/>
+      </p:bgPr>
+    </p:bg>
     <p:spTree>
       <p:nvGrpSpPr>
         <p:cNvPr id="1" name=""/>
         <p:cNvGrpSpPr/>
         <p:nvPr/>
       </p:nvGrpSpPr>
-      <p:grpSpPr>
-        <a:xfrm>
-          <a:off x="0" y="0"/>
-          <a:ext cx="0" cy="0"/>
-          <a:chOff x="0" y="0"/>
-          <a:chExt cx="0" cy="0"/>
-        </a:xfrm>
-      </p:grpSpPr>
-      <p:sp>
-        <p:nvSpPr>
-          <p:cNvPr id="2" name="Title 1"/>
-          <p:cNvSpPr>
-            <a:spLocks noGrp="1"/>
-          </p:cNvSpPr>
-          <p:nvPr>
-            <p:ph type="title"/>
-          </p:nvPr>
-        </p:nvSpPr>
-        <p:spPr/>
-        <p:txBody>
-          <a:bodyPr/>
-          <a:lstStyle/>
-          <a:p>
-            <a:pPr lvl="0" indent="0" marL="0">
-              <a:buNone/>
+      <p:grpSpPr/>
+      <p:sp>
+        <p:nvSpPr>
+          <p:cNvPr id="2" name="Rectangle 1"/>
+          <p:cNvSpPr/>
+          <p:nvPr/>
+        </p:nvSpPr>
+        <p:spPr>
+          <a:xfrm>
+            <a:off x="0" y="0"/>
+            <a:ext cx="411480" cy="6858000"/>
+          </a:xfrm>
+          <a:prstGeom prst="rect">
+            <a:avLst/>
+          </a:prstGeom>
+          <a:solidFill>
+            <a:srgbClr val="0A1F44"/>
+          </a:solidFill>
+          <a:ln>
+            <a:noFill/>
+          </a:ln>
+        </p:spPr>
+        <p:style>
+          <a:lnRef idx="1">
+            <a:schemeClr val="accent1"/>
+          </a:lnRef>
+          <a:fillRef idx="3">
+            <a:schemeClr val="accent1"/>
+          </a:fillRef>
+          <a:effectRef idx="2">
+            <a:schemeClr val="accent1"/>
+          </a:effectRef>
+          <a:fontRef idx="minor">
+            <a:schemeClr val="lt1"/>
+          </a:fontRef>
+        </p:style>
+        <p:txBody>
+          <a:bodyPr rtlCol="0" anchor="ctr"/>
+          <a:lstStyle/>
+          <a:p>
+            <a:pPr algn="ctr"/>
+          </a:p>
+        </p:txBody>
+      </p:sp>
+      <p:sp>
+        <p:nvSpPr>
+          <p:cNvPr id="3" name="TextBox 2"/>
+          <p:cNvSpPr txBox="1"/>
+          <p:nvPr/>
+        </p:nvSpPr>
+        <p:spPr>
+          <a:xfrm>
+            <a:off x="914400" y="2194560"/>
+            <a:ext cx="10515600" cy="2743200"/>
+          </a:xfrm>
+          <a:prstGeom prst="rect">
+            <a:avLst/>
+          </a:prstGeom>
+          <a:noFill/>
+        </p:spPr>
+        <p:txBody>
+          <a:bodyPr wrap="square" anchor="t">
+            <a:spAutoFit/>
+          </a:bodyPr>
+          <a:lstStyle/>
+          <a:p>
+            <a:pPr algn="l">
+              <a:spcBef>
+                <a:spcPts val="0"/>
+              </a:spcBef>
+              <a:spcAft>
+                <a:spcPts val="600"/>
+              </a:spcAft>
             </a:pPr>
             <a:r>
-              <a:rPr/>
-              <a:t>Health Insight Agent — Slide Deck</a:t>
-            </a:r>
-          </a:p>
-        </p:txBody>
-      </p:sp>
-      <p:sp>
-        <p:nvSpPr>
-          <p:cNvPr id="3" name="Content Placeholder 2"/>
-          <p:cNvSpPr>
-            <a:spLocks noGrp="1"/>
-          </p:cNvSpPr>
-          <p:nvPr>
-            <p:ph idx="1"/>
-          </p:nvPr>
-        </p:nvSpPr>
-        <p:spPr/>
-        <p:txBody>
-          <a:bodyPr/>
-          <a:lstStyle/>
-          <a:p>
-            <a:pPr lvl="0" indent="0" marL="1270000">
-              <a:buNone/>
+              <a:rPr sz="5200" b="1">
+                <a:solidFill>
+                  <a:srgbClr val="0A1F44"/>
+                </a:solidFill>
+                <a:latin typeface="Helvetica Neue"/>
+              </a:rPr>
+              <a:t>Health Insight Agent</a:t>
+            </a:r>
+          </a:p>
+          <a:p>
+            <a:pPr algn="l">
+              <a:spcBef>
+                <a:spcPts val="2000"/>
+              </a:spcBef>
+              <a:spcAft>
+                <a:spcPts val="600"/>
+              </a:spcAft>
             </a:pPr>
             <a:r>
-              <a:rPr sz="2000"/>
-              <a:t>8 slides. Speaker notes are in </a:t>
-            </a:r>
-            <a:r>
-              <a:rPr sz="2000">
-                <a:latin typeface="Courier"/>
-              </a:rPr>
-              <a:t>speaker_notes.md</a:t>
-            </a:r>
-            <a:r>
-              <a:rPr sz="2000"/>
-              <a:t>. Total target presentation time: 6-7 minutes.</a:t>
+              <a:rPr sz="2200" b="0">
+                <a:solidFill>
+                  <a:srgbClr val="1C1C1E"/>
+                </a:solidFill>
+                <a:latin typeface="Helvetica Neue"/>
+              </a:rPr>
+              <a:t>A Multi-Agent LLM Architecture for Personal Longitudinal Health Data Interpretation</a:t>
+            </a:r>
+          </a:p>
+        </p:txBody>
+      </p:sp>
+      <p:sp>
+        <p:nvSpPr>
+          <p:cNvPr id="4" name="TextBox 3"/>
+          <p:cNvSpPr txBox="1"/>
+          <p:nvPr/>
+        </p:nvSpPr>
+        <p:spPr>
+          <a:xfrm>
+            <a:off x="914400" y="5120640"/>
+            <a:ext cx="10515600" cy="548640"/>
+          </a:xfrm>
+          <a:prstGeom prst="rect">
+            <a:avLst/>
+          </a:prstGeom>
+          <a:noFill/>
+        </p:spPr>
+        <p:txBody>
+          <a:bodyPr wrap="square" anchor="t">
+            <a:spAutoFit/>
+          </a:bodyPr>
+          <a:lstStyle/>
+          <a:p>
+            <a:pPr algn="l">
+              <a:spcBef>
+                <a:spcPts val="0"/>
+              </a:spcBef>
+              <a:spcAft>
+                <a:spcPts val="600"/>
+              </a:spcAft>
+            </a:pPr>
+            <a:r>
+              <a:rPr sz="1800" b="1">
+                <a:solidFill>
+                  <a:srgbClr val="1C1C1E"/>
+                </a:solidFill>
+                <a:latin typeface="Helvetica Neue"/>
+              </a:rPr>
+              <a:t>Jerome Zhang</a:t>
+            </a:r>
+            <a:r>
+              <a:rPr sz="1800" b="0">
+                <a:solidFill>
+                  <a:srgbClr val="6B6B70"/>
+                </a:solidFill>
+                <a:latin typeface="Helvetica Neue"/>
+              </a:rPr>
+              <a:t>   ·   MSAI High-Risk Project   ·   Spring 2026</a:t>
             </a:r>
           </a:p>
         </p:txBody>
       </p:sp>
     </p:spTree>
   </p:cSld>
+  <p:clrMapOvr>
+    <a:masterClrMapping/>
+  </p:clrMapOvr>
 </p:sld>
 </file>
 
-<file path=ppt/slides/slide10.xml><?xml version="1.0" encoding="utf-8"?>
-<p:sld xmlns:a="http://schemas.openxmlformats.org/drawingml/2006/main" xmlns:r="http://schemas.openxmlformats.org/officeDocument/2006/relationships" xmlns:p="http://schemas.openxmlformats.org/presentationml/2006/main">
+<file path=ppt/slides/slide2.xml><?xml version="1.0" encoding="utf-8"?>
+<p:sld xmlns:a="http://schemas.openxmlformats.org/drawingml/2006/main" xmlns:p="http://schemas.openxmlformats.org/presentationml/2006/main" xmlns:r="http://schemas.openxmlformats.org/officeDocument/2006/relationships">
   <p:cSld>
+    <p:bg>
+      <p:bgPr>
+        <a:solidFill>
+          <a:srgbClr val="FFFFFF"/>
+        </a:solidFill>
+        <a:effectLst/>
+      </p:bgPr>
+    </p:bg>
     <p:spTree>
       <p:nvGrpSpPr>
         <p:cNvPr id="1" name=""/>
         <p:cNvGrpSpPr/>
         <p:nvPr/>
       </p:nvGrpSpPr>
-      <p:grpSpPr>
-        <a:xfrm>
-          <a:off x="0" y="0"/>
-          <a:ext cx="0" cy="0"/>
-          <a:chOff x="0" y="0"/>
-          <a:chExt cx="0" cy="0"/>
-        </a:xfrm>
-      </p:grpSpPr>
-      <p:sp>
-        <p:nvSpPr>
-          <p:cNvPr id="3" name="Content Placeholder 2"/>
-          <p:cNvSpPr>
-            <a:spLocks noGrp="1"/>
-          </p:cNvSpPr>
-          <p:nvPr>
-            <p:ph idx="1"/>
-          </p:nvPr>
-        </p:nvSpPr>
-        <p:spPr/>
-        <p:txBody>
-          <a:bodyPr/>
-          <a:lstStyle/>
-          <a:p>
-            <a:pPr lvl="0" indent="0" marL="0">
+      <p:grpSpPr/>
+      <p:sp>
+        <p:nvSpPr>
+          <p:cNvPr id="2" name="Rectangle 1"/>
+          <p:cNvSpPr/>
+          <p:nvPr/>
+        </p:nvSpPr>
+        <p:spPr>
+          <a:xfrm>
+            <a:off x="0" y="0"/>
+            <a:ext cx="12191695" cy="822960"/>
+          </a:xfrm>
+          <a:prstGeom prst="rect">
+            <a:avLst/>
+          </a:prstGeom>
+          <a:solidFill>
+            <a:srgbClr val="0A1F44"/>
+          </a:solidFill>
+          <a:ln>
+            <a:noFill/>
+          </a:ln>
+        </p:spPr>
+        <p:style>
+          <a:lnRef idx="1">
+            <a:schemeClr val="accent1"/>
+          </a:lnRef>
+          <a:fillRef idx="3">
+            <a:schemeClr val="accent1"/>
+          </a:fillRef>
+          <a:effectRef idx="2">
+            <a:schemeClr val="accent1"/>
+          </a:effectRef>
+          <a:fontRef idx="minor">
+            <a:schemeClr val="lt1"/>
+          </a:fontRef>
+        </p:style>
+        <p:txBody>
+          <a:bodyPr rtlCol="0" anchor="ctr" lIns="548640" rIns="548640" tIns="164592" bIns="0"/>
+          <a:lstStyle/>
+          <a:p>
+            <a:pPr algn="l"/>
+            <a:r>
+              <a:rPr sz="2600" b="1">
+                <a:solidFill>
+                  <a:srgbClr val="FFFFFF"/>
+                </a:solidFill>
+                <a:latin typeface="Helvetica Neue"/>
+              </a:rPr>
+              <a:t>The Problem</a:t>
+            </a:r>
+          </a:p>
+        </p:txBody>
+      </p:sp>
+      <p:sp>
+        <p:nvSpPr>
+          <p:cNvPr id="3" name="TextBox 2"/>
+          <p:cNvSpPr txBox="1"/>
+          <p:nvPr/>
+        </p:nvSpPr>
+        <p:spPr>
+          <a:xfrm>
+            <a:off x="548640" y="1188720"/>
+            <a:ext cx="5486400" cy="548640"/>
+          </a:xfrm>
+          <a:prstGeom prst="rect">
+            <a:avLst/>
+          </a:prstGeom>
+          <a:noFill/>
+        </p:spPr>
+        <p:txBody>
+          <a:bodyPr wrap="square" anchor="t">
+            <a:spAutoFit/>
+          </a:bodyPr>
+          <a:lstStyle/>
+          <a:p>
+            <a:pPr algn="l">
               <a:spcBef>
-                <a:spcPts val="3000"/>
+                <a:spcPts val="0"/>
               </a:spcBef>
-              <a:buNone/>
+              <a:spcAft>
+                <a:spcPts val="600"/>
+              </a:spcAft>
             </a:pPr>
             <a:r>
-              <a:rPr b="1"/>
-              <a:t>Slide 8: Thank You</a:t>
-            </a:r>
-          </a:p>
-          <a:p>
-            <a:pPr lvl="0" indent="0" marL="0">
-              <a:buNone/>
+              <a:rPr sz="2200" b="1">
+                <a:solidFill>
+                  <a:srgbClr val="0A1F44"/>
+                </a:solidFill>
+                <a:latin typeface="Helvetica Neue"/>
+              </a:rPr>
+              <a:t>Personal health data is fragmented</a:t>
+            </a:r>
+          </a:p>
+        </p:txBody>
+      </p:sp>
+      <p:sp>
+        <p:nvSpPr>
+          <p:cNvPr id="4" name="TextBox 3"/>
+          <p:cNvSpPr txBox="1"/>
+          <p:nvPr/>
+        </p:nvSpPr>
+        <p:spPr>
+          <a:xfrm>
+            <a:off x="548640" y="1828800"/>
+            <a:ext cx="5486400" cy="4114800"/>
+          </a:xfrm>
+          <a:prstGeom prst="rect">
+            <a:avLst/>
+          </a:prstGeom>
+          <a:noFill/>
+        </p:spPr>
+        <p:txBody>
+          <a:bodyPr wrap="square" anchor="t">
+            <a:spAutoFit/>
+          </a:bodyPr>
+          <a:lstStyle/>
+          <a:p>
+            <a:pPr algn="l">
+              <a:spcBef>
+                <a:spcPts val="0"/>
+              </a:spcBef>
+              <a:spcAft>
+                <a:spcPts val="800"/>
+              </a:spcAft>
             </a:pPr>
             <a:r>
-              <a:rPr b="1"/>
-              <a:t>Jerome Zhang</a:t>
-            </a:r>
-            <a:r>
-              <a:rPr/>
-              <a:t> · MSAI High-Risk Project · Spring 2026</a:t>
-            </a:r>
-          </a:p>
-          <a:p>
-            <a:pPr lvl="0" indent="0" marL="0">
-              <a:buNone/>
+              <a:rPr sz="1800" b="0">
+                <a:solidFill>
+                  <a:srgbClr val="006EE6"/>
+                </a:solidFill>
+                <a:latin typeface="Helvetica Neue"/>
+              </a:rPr>
+              <a:t>•  </a:t>
+            </a:r>
+            <a:r>
+              <a:rPr sz="1800" b="0">
+                <a:solidFill>
+                  <a:srgbClr val="1C1C1E"/>
+                </a:solidFill>
+                <a:latin typeface="Helvetica Neue"/>
+              </a:rPr>
+              <a:t>Wearables capture biometrics (HRV, sleep, body battery)</a:t>
+            </a:r>
+          </a:p>
+          <a:p>
+            <a:pPr algn="l">
+              <a:spcBef>
+                <a:spcPts val="0"/>
+              </a:spcBef>
+              <a:spcAft>
+                <a:spcPts val="800"/>
+              </a:spcAft>
             </a:pPr>
             <a:r>
-              <a:rPr/>
-              <a:t>Code &amp; report: [repository URL]</a:t>
-            </a:r>
-          </a:p>
-          <a:p>
-            <a:pPr lvl="0" indent="0" marL="0">
-              <a:buNone/>
+              <a:rPr sz="1800" b="0">
+                <a:solidFill>
+                  <a:srgbClr val="006EE6"/>
+                </a:solidFill>
+                <a:latin typeface="Helvetica Neue"/>
+              </a:rPr>
+              <a:t>•  </a:t>
+            </a:r>
+            <a:r>
+              <a:rPr sz="1800" b="0">
+                <a:solidFill>
+                  <a:srgbClr val="1C1C1E"/>
+                </a:solidFill>
+                <a:latin typeface="Helvetica Neue"/>
+              </a:rPr>
+              <a:t>Food apps track nutrition (macros, micros)</a:t>
+            </a:r>
+          </a:p>
+          <a:p>
+            <a:pPr algn="l">
+              <a:spcBef>
+                <a:spcPts val="0"/>
+              </a:spcBef>
+              <a:spcAft>
+                <a:spcPts val="800"/>
+              </a:spcAft>
             </a:pPr>
             <a:r>
-              <a:rPr/>
-              <a:t>Questions?</a:t>
+              <a:rPr sz="1800" b="0">
+                <a:solidFill>
+                  <a:srgbClr val="006EE6"/>
+                </a:solidFill>
+                <a:latin typeface="Helvetica Neue"/>
+              </a:rPr>
+              <a:t>•  </a:t>
+            </a:r>
+            <a:r>
+              <a:rPr sz="1800" b="0">
+                <a:solidFill>
+                  <a:srgbClr val="1C1C1E"/>
+                </a:solidFill>
+                <a:latin typeface="Helvetica Neue"/>
+              </a:rPr>
+              <a:t>Training journals log resistance work</a:t>
+            </a:r>
+          </a:p>
+          <a:p>
+            <a:pPr algn="l">
+              <a:spcBef>
+                <a:spcPts val="400"/>
+              </a:spcBef>
+              <a:spcAft>
+                <a:spcPts val="600"/>
+              </a:spcAft>
+            </a:pPr>
+            <a:r>
+              <a:rPr sz="1800" b="0">
+                <a:solidFill>
+                  <a:srgbClr val="1C1C1E"/>
+                </a:solidFill>
+                <a:latin typeface="Helvetica Neue"/>
+              </a:rPr>
+              <a:t>    </a:t>
+            </a:r>
+            <a:r>
+              <a:rPr sz="1800" b="0">
+                <a:solidFill>
+                  <a:srgbClr val="6B6B70"/>
+                </a:solidFill>
+                <a:latin typeface="Helvetica Neue"/>
+              </a:rPr>
+              <a:t>…but no system unifies them into actionable insights</a:t>
+            </a:r>
+          </a:p>
+        </p:txBody>
+      </p:sp>
+      <p:sp>
+        <p:nvSpPr>
+          <p:cNvPr id="5" name="TextBox 4"/>
+          <p:cNvSpPr txBox="1"/>
+          <p:nvPr/>
+        </p:nvSpPr>
+        <p:spPr>
+          <a:xfrm>
+            <a:off x="6400800" y="1188720"/>
+            <a:ext cx="5486400" cy="548640"/>
+          </a:xfrm>
+          <a:prstGeom prst="rect">
+            <a:avLst/>
+          </a:prstGeom>
+          <a:noFill/>
+        </p:spPr>
+        <p:txBody>
+          <a:bodyPr wrap="square" anchor="t">
+            <a:spAutoFit/>
+          </a:bodyPr>
+          <a:lstStyle/>
+          <a:p>
+            <a:pPr algn="l">
+              <a:spcBef>
+                <a:spcPts val="0"/>
+              </a:spcBef>
+              <a:spcAft>
+                <a:spcPts val="600"/>
+              </a:spcAft>
+            </a:pPr>
+            <a:r>
+              <a:rPr sz="2200" b="1">
+                <a:solidFill>
+                  <a:srgbClr val="0A1F44"/>
+                </a:solidFill>
+                <a:latin typeface="Helvetica Neue"/>
+              </a:rPr>
+              <a:t>Existing LLM approaches use single-shot prompting</a:t>
+            </a:r>
+          </a:p>
+        </p:txBody>
+      </p:sp>
+      <p:sp>
+        <p:nvSpPr>
+          <p:cNvPr id="6" name="TextBox 5"/>
+          <p:cNvSpPr txBox="1"/>
+          <p:nvPr/>
+        </p:nvSpPr>
+        <p:spPr>
+          <a:xfrm>
+            <a:off x="6400800" y="1828800"/>
+            <a:ext cx="5486400" cy="4114800"/>
+          </a:xfrm>
+          <a:prstGeom prst="rect">
+            <a:avLst/>
+          </a:prstGeom>
+          <a:noFill/>
+        </p:spPr>
+        <p:txBody>
+          <a:bodyPr wrap="square" anchor="t">
+            <a:spAutoFit/>
+          </a:bodyPr>
+          <a:lstStyle/>
+          <a:p>
+            <a:pPr algn="l">
+              <a:spcBef>
+                <a:spcPts val="0"/>
+              </a:spcBef>
+              <a:spcAft>
+                <a:spcPts val="800"/>
+              </a:spcAft>
+            </a:pPr>
+            <a:r>
+              <a:rPr sz="1800" b="0">
+                <a:solidFill>
+                  <a:srgbClr val="006EE6"/>
+                </a:solidFill>
+                <a:latin typeface="Helvetica Neue"/>
+              </a:rPr>
+              <a:t>•  </a:t>
+            </a:r>
+            <a:r>
+              <a:rPr sz="1800" b="0">
+                <a:solidFill>
+                  <a:srgbClr val="1C1C1E"/>
+                </a:solidFill>
+                <a:latin typeface="Helvetica Neue"/>
+              </a:rPr>
+              <a:t>Dump everything into one prompt</a:t>
+            </a:r>
+          </a:p>
+          <a:p>
+            <a:pPr algn="l">
+              <a:spcBef>
+                <a:spcPts val="0"/>
+              </a:spcBef>
+              <a:spcAft>
+                <a:spcPts val="800"/>
+              </a:spcAft>
+            </a:pPr>
+            <a:r>
+              <a:rPr sz="1800" b="0">
+                <a:solidFill>
+                  <a:srgbClr val="006EE6"/>
+                </a:solidFill>
+                <a:latin typeface="Helvetica Neue"/>
+              </a:rPr>
+              <a:t>•  </a:t>
+            </a:r>
+            <a:r>
+              <a:rPr sz="1800" b="0">
+                <a:solidFill>
+                  <a:srgbClr val="1C1C1E"/>
+                </a:solidFill>
+                <a:latin typeface="Helvetica Neue"/>
+              </a:rPr>
+              <a:t>Ask the LLM to figure it out</a:t>
+            </a:r>
+          </a:p>
+          <a:p>
+            <a:pPr algn="l">
+              <a:spcBef>
+                <a:spcPts val="0"/>
+              </a:spcBef>
+              <a:spcAft>
+                <a:spcPts val="800"/>
+              </a:spcAft>
+            </a:pPr>
+            <a:r>
+              <a:rPr sz="1800" b="0">
+                <a:solidFill>
+                  <a:srgbClr val="006EE6"/>
+                </a:solidFill>
+                <a:latin typeface="Helvetica Neue"/>
+              </a:rPr>
+              <a:t>•  </a:t>
+            </a:r>
+            <a:r>
+              <a:rPr sz="1800" b="0">
+                <a:solidFill>
+                  <a:srgbClr val="1C1C1E"/>
+                </a:solidFill>
+                <a:latin typeface="Helvetica Neue"/>
+              </a:rPr>
+              <a:t>Generic, ungrounded outputs</a:t>
+            </a:r>
+          </a:p>
+          <a:p>
+            <a:pPr algn="l">
+              <a:spcBef>
+                <a:spcPts val="0"/>
+              </a:spcBef>
+              <a:spcAft>
+                <a:spcPts val="800"/>
+              </a:spcAft>
+            </a:pPr>
+            <a:r>
+              <a:rPr sz="1800" b="0">
+                <a:solidFill>
+                  <a:srgbClr val="006EE6"/>
+                </a:solidFill>
+                <a:latin typeface="Helvetica Neue"/>
+              </a:rPr>
+              <a:t>•  </a:t>
+            </a:r>
+            <a:r>
+              <a:rPr sz="1800" b="0">
+                <a:solidFill>
+                  <a:srgbClr val="1C1C1E"/>
+                </a:solidFill>
+                <a:latin typeface="Helvetica Neue"/>
+              </a:rPr>
+              <a:t>Hidden cross-domain disagreements</a:t>
+            </a:r>
+          </a:p>
+        </p:txBody>
+      </p:sp>
+      <p:sp>
+        <p:nvSpPr>
+          <p:cNvPr id="7" name="TextBox 6"/>
+          <p:cNvSpPr txBox="1"/>
+          <p:nvPr/>
+        </p:nvSpPr>
+        <p:spPr>
+          <a:xfrm>
+            <a:off x="548640" y="6446520"/>
+            <a:ext cx="11091672" cy="320040"/>
+          </a:xfrm>
+          <a:prstGeom prst="rect">
+            <a:avLst/>
+          </a:prstGeom>
+          <a:noFill/>
+        </p:spPr>
+        <p:txBody>
+          <a:bodyPr wrap="none" lIns="0" tIns="0" bIns="0">
+            <a:spAutoFit/>
+          </a:bodyPr>
+          <a:lstStyle/>
+          <a:p>
+            <a:pPr algn="l"/>
+            <a:r>
+              <a:rPr sz="1100" b="0">
+                <a:solidFill>
+                  <a:srgbClr val="6B6B70"/>
+                </a:solidFill>
+                <a:latin typeface="Helvetica Neue"/>
+              </a:rPr>
+              <a:t>Health Insight Agent  ·  Slide 2 / 8</a:t>
             </a:r>
           </a:p>
         </p:txBody>
       </p:sp>
     </p:spTree>
   </p:cSld>
+  <p:clrMapOvr>
+    <a:masterClrMapping/>
+  </p:clrMapOvr>
 </p:sld>
 </file>
 
-<file path=ppt/slides/slide2.xml><?xml version="1.0" encoding="utf-8"?>
-<p:sld xmlns:a="http://schemas.openxmlformats.org/drawingml/2006/main" xmlns:r="http://schemas.openxmlformats.org/officeDocument/2006/relationships" xmlns:p="http://schemas.openxmlformats.org/presentationml/2006/main">
+<file path=ppt/slides/slide3.xml><?xml version="1.0" encoding="utf-8"?>
+<p:sld xmlns:a="http://schemas.openxmlformats.org/drawingml/2006/main" xmlns:p="http://schemas.openxmlformats.org/presentationml/2006/main" xmlns:r="http://schemas.openxmlformats.org/officeDocument/2006/relationships">
   <p:cSld>
+    <p:bg>
+      <p:bgPr>
+        <a:solidFill>
+          <a:srgbClr val="FFFFFF"/>
+        </a:solidFill>
+        <a:effectLst/>
+      </p:bgPr>
+    </p:bg>
     <p:spTree>
       <p:nvGrpSpPr>
         <p:cNvPr id="1" name=""/>
         <p:cNvGrpSpPr/>
         <p:nvPr/>
       </p:nvGrpSpPr>
-      <p:grpSpPr>
-        <a:xfrm>
-          <a:off x="0" y="0"/>
-          <a:ext cx="0" cy="0"/>
-          <a:chOff x="0" y="0"/>
-          <a:chExt cx="0" cy="0"/>
-        </a:xfrm>
-      </p:grpSpPr>
-      <p:sp>
-        <p:nvSpPr>
-          <p:cNvPr id="3" name="Content Placeholder 2"/>
-          <p:cNvSpPr>
-            <a:spLocks noGrp="1"/>
-          </p:cNvSpPr>
-          <p:nvPr>
-            <p:ph idx="1"/>
-          </p:nvPr>
-        </p:nvSpPr>
-        <p:spPr/>
-        <p:txBody>
-          <a:bodyPr/>
-          <a:lstStyle/>
-          <a:p>
-            <a:pPr lvl="0" indent="0" marL="0">
+      <p:grpSpPr/>
+      <p:sp>
+        <p:nvSpPr>
+          <p:cNvPr id="2" name="Rectangle 1"/>
+          <p:cNvSpPr/>
+          <p:nvPr/>
+        </p:nvSpPr>
+        <p:spPr>
+          <a:xfrm>
+            <a:off x="0" y="0"/>
+            <a:ext cx="12191695" cy="822960"/>
+          </a:xfrm>
+          <a:prstGeom prst="rect">
+            <a:avLst/>
+          </a:prstGeom>
+          <a:solidFill>
+            <a:srgbClr val="0A1F44"/>
+          </a:solidFill>
+          <a:ln>
+            <a:noFill/>
+          </a:ln>
+        </p:spPr>
+        <p:style>
+          <a:lnRef idx="1">
+            <a:schemeClr val="accent1"/>
+          </a:lnRef>
+          <a:fillRef idx="3">
+            <a:schemeClr val="accent1"/>
+          </a:fillRef>
+          <a:effectRef idx="2">
+            <a:schemeClr val="accent1"/>
+          </a:effectRef>
+          <a:fontRef idx="minor">
+            <a:schemeClr val="lt1"/>
+          </a:fontRef>
+        </p:style>
+        <p:txBody>
+          <a:bodyPr rtlCol="0" anchor="ctr" lIns="548640" rIns="548640" tIns="164592" bIns="0"/>
+          <a:lstStyle/>
+          <a:p>
+            <a:pPr algn="l"/>
+            <a:r>
+              <a:rPr sz="2600" b="1">
+                <a:solidFill>
+                  <a:srgbClr val="FFFFFF"/>
+                </a:solidFill>
+                <a:latin typeface="Helvetica Neue"/>
+              </a:rPr>
+              <a:t>Research Question</a:t>
+            </a:r>
+          </a:p>
+        </p:txBody>
+      </p:sp>
+      <p:sp>
+        <p:nvSpPr>
+          <p:cNvPr id="3" name="Rectangle 2"/>
+          <p:cNvSpPr/>
+          <p:nvPr/>
+        </p:nvSpPr>
+        <p:spPr>
+          <a:xfrm>
+            <a:off x="914400" y="2011680"/>
+            <a:ext cx="10332720" cy="2103120"/>
+          </a:xfrm>
+          <a:prstGeom prst="rect">
+            <a:avLst/>
+          </a:prstGeom>
+          <a:solidFill>
+            <a:srgbClr val="F2F2F7"/>
+          </a:solidFill>
+          <a:ln>
+            <a:noFill/>
+          </a:ln>
+        </p:spPr>
+        <p:style>
+          <a:lnRef idx="1">
+            <a:schemeClr val="accent1"/>
+          </a:lnRef>
+          <a:fillRef idx="3">
+            <a:schemeClr val="accent1"/>
+          </a:fillRef>
+          <a:effectRef idx="2">
+            <a:schemeClr val="accent1"/>
+          </a:effectRef>
+          <a:fontRef idx="minor">
+            <a:schemeClr val="lt1"/>
+          </a:fontRef>
+        </p:style>
+        <p:txBody>
+          <a:bodyPr rtlCol="0" anchor="ctr" lIns="365760" rIns="365760"/>
+          <a:lstStyle/>
+          <a:p>
+            <a:pPr algn="l"/>
+            <a:r>
+              <a:rPr sz="2200" b="1">
+                <a:solidFill>
+                  <a:srgbClr val="0A1F44"/>
+                </a:solidFill>
+                <a:latin typeface="Helvetica Neue"/>
+              </a:rPr>
+              <a:t>Does a multi-agent LLM architecture produce more grounded, domain-specific health insights than single-shot LLM prompting on identical longitudinal personal health data?</a:t>
+            </a:r>
+          </a:p>
+        </p:txBody>
+      </p:sp>
+      <p:sp>
+        <p:nvSpPr>
+          <p:cNvPr id="4" name="Rectangle 3"/>
+          <p:cNvSpPr/>
+          <p:nvPr/>
+        </p:nvSpPr>
+        <p:spPr>
+          <a:xfrm>
+            <a:off x="914400" y="2011680"/>
+            <a:ext cx="109728" cy="2103120"/>
+          </a:xfrm>
+          <a:prstGeom prst="rect">
+            <a:avLst/>
+          </a:prstGeom>
+          <a:solidFill>
+            <a:srgbClr val="006EE6"/>
+          </a:solidFill>
+          <a:ln>
+            <a:noFill/>
+          </a:ln>
+        </p:spPr>
+        <p:style>
+          <a:lnRef idx="1">
+            <a:schemeClr val="accent1"/>
+          </a:lnRef>
+          <a:fillRef idx="3">
+            <a:schemeClr val="accent1"/>
+          </a:fillRef>
+          <a:effectRef idx="2">
+            <a:schemeClr val="accent1"/>
+          </a:effectRef>
+          <a:fontRef idx="minor">
+            <a:schemeClr val="lt1"/>
+          </a:fontRef>
+        </p:style>
+        <p:txBody>
+          <a:bodyPr rtlCol="0" anchor="ctr"/>
+          <a:lstStyle/>
+          <a:p>
+            <a:pPr algn="ctr"/>
+          </a:p>
+        </p:txBody>
+      </p:sp>
+      <p:sp>
+        <p:nvSpPr>
+          <p:cNvPr id="5" name="TextBox 4"/>
+          <p:cNvSpPr txBox="1"/>
+          <p:nvPr/>
+        </p:nvSpPr>
+        <p:spPr>
+          <a:xfrm>
+            <a:off x="914400" y="4572000"/>
+            <a:ext cx="10332720" cy="1371600"/>
+          </a:xfrm>
+          <a:prstGeom prst="rect">
+            <a:avLst/>
+          </a:prstGeom>
+          <a:noFill/>
+        </p:spPr>
+        <p:txBody>
+          <a:bodyPr wrap="square" anchor="t">
+            <a:spAutoFit/>
+          </a:bodyPr>
+          <a:lstStyle/>
+          <a:p>
+            <a:pPr algn="l">
               <a:spcBef>
-                <a:spcPts val="3000"/>
+                <a:spcPts val="0"/>
               </a:spcBef>
-              <a:buNone/>
+              <a:spcAft>
+                <a:spcPts val="600"/>
+              </a:spcAft>
             </a:pPr>
             <a:r>
-              <a:rPr b="1"/>
-              <a:t>Slide 1: Title</a:t>
-            </a:r>
-          </a:p>
-          <a:p>
-            <a:pPr lvl="0" indent="0" marL="0">
-              <a:buNone/>
+              <a:rPr sz="1800" b="1">
+                <a:solidFill>
+                  <a:srgbClr val="6B6B70"/>
+                </a:solidFill>
+                <a:latin typeface="Helvetica Neue"/>
+              </a:rPr>
+              <a:t>Approach</a:t>
+            </a:r>
+          </a:p>
+          <a:p>
+            <a:pPr algn="l">
+              <a:spcBef>
+                <a:spcPts val="600"/>
+              </a:spcBef>
+              <a:spcAft>
+                <a:spcPts val="600"/>
+              </a:spcAft>
             </a:pPr>
             <a:r>
-              <a:rPr b="1"/>
-              <a:t>Health Insight Agent</a:t>
-            </a:r>
-          </a:p>
-          <a:p>
-            <a:pPr lvl="0" indent="0" marL="0">
-              <a:buNone/>
-            </a:pPr>
-            <a:r>
-              <a:rPr/>
-              <a:t>A Multi-Agent LLM Architecture for Personal Longitudinal Health Data Interpretation</a:t>
-            </a:r>
-          </a:p>
-          <a:p>
-            <a:pPr lvl="0" indent="0" marL="0">
-              <a:buNone/>
-            </a:pPr>
-            <a:r>
-              <a:rPr/>
-              <a:t>Jerome Zhang · MSAI High-Risk Project · Spring 2026</a:t>
+              <a:rPr sz="1800" b="0">
+                <a:solidFill>
+                  <a:srgbClr val="1C1C1E"/>
+                </a:solidFill>
+                <a:latin typeface="Helvetica Neue"/>
+              </a:rPr>
+              <a:t>Build both. Compare side-by-side. Measure what differs.</a:t>
+            </a:r>
+          </a:p>
+        </p:txBody>
+      </p:sp>
+      <p:sp>
+        <p:nvSpPr>
+          <p:cNvPr id="6" name="TextBox 5"/>
+          <p:cNvSpPr txBox="1"/>
+          <p:nvPr/>
+        </p:nvSpPr>
+        <p:spPr>
+          <a:xfrm>
+            <a:off x="548640" y="6446520"/>
+            <a:ext cx="11091672" cy="320040"/>
+          </a:xfrm>
+          <a:prstGeom prst="rect">
+            <a:avLst/>
+          </a:prstGeom>
+          <a:noFill/>
+        </p:spPr>
+        <p:txBody>
+          <a:bodyPr wrap="none" lIns="0" tIns="0" bIns="0">
+            <a:spAutoFit/>
+          </a:bodyPr>
+          <a:lstStyle/>
+          <a:p>
+            <a:pPr algn="l"/>
+            <a:r>
+              <a:rPr sz="1100" b="0">
+                <a:solidFill>
+                  <a:srgbClr val="6B6B70"/>
+                </a:solidFill>
+                <a:latin typeface="Helvetica Neue"/>
+              </a:rPr>
+              <a:t>Health Insight Agent  ·  Slide 3 / 8</a:t>
             </a:r>
           </a:p>
         </p:txBody>
       </p:sp>
     </p:spTree>
   </p:cSld>
+  <p:clrMapOvr>
+    <a:masterClrMapping/>
+  </p:clrMapOvr>
 </p:sld>
 </file>
 
-<file path=ppt/slides/slide3.xml><?xml version="1.0" encoding="utf-8"?>
-<p:sld xmlns:a="http://schemas.openxmlformats.org/drawingml/2006/main" xmlns:r="http://schemas.openxmlformats.org/officeDocument/2006/relationships" xmlns:p="http://schemas.openxmlformats.org/presentationml/2006/main">
+<file path=ppt/slides/slide4.xml><?xml version="1.0" encoding="utf-8"?>
+<p:sld xmlns:a="http://schemas.openxmlformats.org/drawingml/2006/main" xmlns:p="http://schemas.openxmlformats.org/presentationml/2006/main" xmlns:r="http://schemas.openxmlformats.org/officeDocument/2006/relationships">
   <p:cSld>
+    <p:bg>
+      <p:bgPr>
+        <a:solidFill>
+          <a:srgbClr val="FFFFFF"/>
+        </a:solidFill>
+        <a:effectLst/>
+      </p:bgPr>
+    </p:bg>
     <p:spTree>
       <p:nvGrpSpPr>
         <p:cNvPr id="1" name=""/>
         <p:cNvGrpSpPr/>
         <p:nvPr/>
       </p:nvGrpSpPr>
-      <p:grpSpPr>
-        <a:xfrm>
-          <a:off x="0" y="0"/>
-          <a:ext cx="0" cy="0"/>
-          <a:chOff x="0" y="0"/>
-          <a:chExt cx="0" cy="0"/>
-        </a:xfrm>
-      </p:grpSpPr>
-      <p:sp>
-        <p:nvSpPr>
-          <p:cNvPr id="3" name="Content Placeholder 2"/>
-          <p:cNvSpPr>
-            <a:spLocks noGrp="1"/>
-          </p:cNvSpPr>
-          <p:nvPr>
-            <p:ph idx="1"/>
-          </p:nvPr>
-        </p:nvSpPr>
-        <p:spPr/>
-        <p:txBody>
-          <a:bodyPr/>
-          <a:lstStyle/>
-          <a:p>
-            <a:pPr lvl="0" indent="0" marL="0">
-              <a:spcBef>
-                <a:spcPts val="3000"/>
-              </a:spcBef>
-              <a:buNone/>
+      <p:grpSpPr/>
+      <p:sp>
+        <p:nvSpPr>
+          <p:cNvPr id="2" name="Rectangle 1"/>
+          <p:cNvSpPr/>
+          <p:nvPr/>
+        </p:nvSpPr>
+        <p:spPr>
+          <a:xfrm>
+            <a:off x="0" y="0"/>
+            <a:ext cx="12191695" cy="822960"/>
+          </a:xfrm>
+          <a:prstGeom prst="rect">
+            <a:avLst/>
+          </a:prstGeom>
+          <a:solidFill>
+            <a:srgbClr val="0A1F44"/>
+          </a:solidFill>
+          <a:ln>
+            <a:noFill/>
+          </a:ln>
+        </p:spPr>
+        <p:style>
+          <a:lnRef idx="1">
+            <a:schemeClr val="accent1"/>
+          </a:lnRef>
+          <a:fillRef idx="3">
+            <a:schemeClr val="accent1"/>
+          </a:fillRef>
+          <a:effectRef idx="2">
+            <a:schemeClr val="accent1"/>
+          </a:effectRef>
+          <a:fontRef idx="minor">
+            <a:schemeClr val="lt1"/>
+          </a:fontRef>
+        </p:style>
+        <p:txBody>
+          <a:bodyPr rtlCol="0" anchor="ctr" lIns="548640" rIns="548640" tIns="164592" bIns="0"/>
+          <a:lstStyle/>
+          <a:p>
+            <a:pPr algn="l"/>
+            <a:r>
+              <a:rPr sz="2600" b="1">
+                <a:solidFill>
+                  <a:srgbClr val="FFFFFF"/>
+                </a:solidFill>
+                <a:latin typeface="Helvetica Neue"/>
+              </a:rPr>
+              <a:t>Method — Architecture</a:t>
+            </a:r>
+          </a:p>
+        </p:txBody>
+      </p:sp>
+      <p:sp>
+        <p:nvSpPr>
+          <p:cNvPr id="3" name="Rectangle 2"/>
+          <p:cNvSpPr/>
+          <p:nvPr/>
+        </p:nvSpPr>
+        <p:spPr>
+          <a:xfrm>
+            <a:off x="640080" y="1097280"/>
+            <a:ext cx="7589520" cy="4572000"/>
+          </a:xfrm>
+          <a:prstGeom prst="rect">
+            <a:avLst/>
+          </a:prstGeom>
+          <a:solidFill>
+            <a:srgbClr val="F2F2F7"/>
+          </a:solidFill>
+          <a:ln w="6350">
+            <a:solidFill>
+              <a:srgbClr val="E5E5EA"/>
+            </a:solidFill>
+          </a:ln>
+        </p:spPr>
+        <p:style>
+          <a:lnRef idx="1">
+            <a:schemeClr val="accent1"/>
+          </a:lnRef>
+          <a:fillRef idx="3">
+            <a:schemeClr val="accent1"/>
+          </a:fillRef>
+          <a:effectRef idx="2">
+            <a:schemeClr val="accent1"/>
+          </a:effectRef>
+          <a:fontRef idx="minor">
+            <a:schemeClr val="lt1"/>
+          </a:fontRef>
+        </p:style>
+        <p:txBody>
+          <a:bodyPr rtlCol="0" anchor="ctr" lIns="228600" tIns="137160" rIns="228600"/>
+          <a:lstStyle/>
+          <a:p>
+            <a:pPr algn="l">
+              <a:spcAft>
+                <a:spcPts val="0"/>
+              </a:spcAft>
             </a:pPr>
             <a:r>
-              <a:rPr b="1"/>
-              <a:t>Slide 2: The Problem</a:t>
-            </a:r>
-          </a:p>
-          <a:p>
-            <a:pPr lvl="0" indent="0" marL="0">
-              <a:spcBef>
-                <a:spcPts val="3000"/>
-              </a:spcBef>
-              <a:buNone/>
-            </a:pPr>
-            <a:r>
-              <a:rPr b="1"/>
-              <a:t>Personal Health Data Is Fragmented</a:t>
-            </a:r>
-          </a:p>
-          <a:p>
-            <a:pPr lvl="0"/>
-            <a:r>
-              <a:rPr b="1"/>
-              <a:t>Wearables</a:t>
-            </a:r>
-            <a:r>
-              <a:rPr/>
-              <a:t> capture biometrics (HRV, sleep, body battery)</a:t>
-            </a:r>
-          </a:p>
-          <a:p>
-            <a:pPr lvl="0"/>
-            <a:r>
-              <a:rPr b="1"/>
-              <a:t>Food apps</a:t>
-            </a:r>
-            <a:r>
-              <a:rPr/>
-              <a:t> track nutrition (macros, micros)</a:t>
-            </a:r>
-          </a:p>
-          <a:p>
-            <a:pPr lvl="0"/>
-            <a:r>
-              <a:rPr b="1"/>
-              <a:t>Training journals</a:t>
-            </a:r>
-            <a:r>
-              <a:rPr/>
-              <a:t> log resistance work</a:t>
-            </a:r>
-          </a:p>
-          <a:p>
-            <a:pPr lvl="0"/>
-            <a:r>
-              <a:rPr/>
-              <a:t>…but no system unifies them into actionable insights</a:t>
-            </a:r>
-          </a:p>
-          <a:p>
-            <a:pPr lvl="0" indent="0" marL="0">
-              <a:spcBef>
-                <a:spcPts val="3000"/>
-              </a:spcBef>
-              <a:buNone/>
-            </a:pPr>
-            <a:r>
-              <a:rPr b="1"/>
-              <a:t>Existing LLM approaches use single-shot prompting</a:t>
-            </a:r>
-          </a:p>
-          <a:p>
-            <a:pPr lvl="0"/>
-            <a:r>
-              <a:rPr/>
-              <a:t>Dump everything into one prompt</a:t>
-            </a:r>
-          </a:p>
-          <a:p>
-            <a:pPr lvl="0"/>
-            <a:r>
-              <a:rPr/>
-              <a:t>Ask the LLM to figure it out</a:t>
-            </a:r>
-          </a:p>
-          <a:p>
-            <a:pPr lvl="0"/>
-            <a:r>
-              <a:rPr/>
-              <a:t>Generic, ungrounded outputs</a:t>
-            </a:r>
-          </a:p>
-          <a:p>
-            <a:pPr lvl="0"/>
-            <a:r>
-              <a:rPr/>
-              <a:t>Hidden cross-domain disagreements</a:t>
-            </a:r>
-          </a:p>
-        </p:txBody>
-      </p:sp>
-    </p:spTree>
-  </p:cSld>
-</p:sld>
-</file>
-
-<file path=ppt/slides/slide4.xml><?xml version="1.0" encoding="utf-8"?>
-<p:sld xmlns:a="http://schemas.openxmlformats.org/drawingml/2006/main" xmlns:r="http://schemas.openxmlformats.org/officeDocument/2006/relationships" xmlns:p="http://schemas.openxmlformats.org/presentationml/2006/main">
-  <p:cSld>
-    <p:spTree>
-      <p:nvGrpSpPr>
-        <p:cNvPr id="1" name=""/>
-        <p:cNvGrpSpPr/>
-        <p:nvPr/>
-      </p:nvGrpSpPr>
-      <p:grpSpPr>
-        <a:xfrm>
-          <a:off x="0" y="0"/>
-          <a:ext cx="0" cy="0"/>
-          <a:chOff x="0" y="0"/>
-          <a:chExt cx="0" cy="0"/>
-        </a:xfrm>
-      </p:grpSpPr>
-      <p:sp>
-        <p:nvSpPr>
-          <p:cNvPr id="3" name="Content Placeholder 2"/>
-          <p:cNvSpPr>
-            <a:spLocks noGrp="1"/>
-          </p:cNvSpPr>
-          <p:nvPr>
-            <p:ph idx="1"/>
-          </p:nvPr>
-        </p:nvSpPr>
-        <p:spPr/>
-        <p:txBody>
-          <a:bodyPr/>
-          <a:lstStyle/>
-          <a:p>
-            <a:pPr lvl="0" indent="0" marL="0">
-              <a:spcBef>
-                <a:spcPts val="3000"/>
-              </a:spcBef>
-              <a:buNone/>
-            </a:pPr>
-            <a:r>
-              <a:rPr b="1"/>
-              <a:t>Slide 3: Research Question</a:t>
-            </a:r>
-          </a:p>
-          <a:p>
-            <a:pPr lvl="0" indent="0" marL="1270000">
-              <a:buNone/>
-            </a:pPr>
-            <a:r>
-              <a:rPr sz="2000" i="1"/>
-              <a:t>Does a multi-agent LLM architecture produce more grounded, domain-specific health insights than single-shot LLM prompting on identical longitudinal personal health data?</a:t>
-            </a:r>
-          </a:p>
-          <a:p>
-            <a:pPr lvl="0" indent="0" marL="0">
-              <a:spcBef>
-                <a:spcPts val="3000"/>
-              </a:spcBef>
-              <a:buNone/>
-            </a:pPr>
-            <a:r>
-              <a:rPr b="1"/>
-              <a:t>Approach</a:t>
-            </a:r>
-          </a:p>
-          <a:p>
-            <a:pPr lvl="0" indent="0" marL="0">
-              <a:buNone/>
-            </a:pPr>
-            <a:r>
-              <a:rPr/>
-              <a:t>Build both. Compare side-by-side. Measure what differs.</a:t>
-            </a:r>
-          </a:p>
-        </p:txBody>
-      </p:sp>
-    </p:spTree>
-  </p:cSld>
-</p:sld>
-</file>
-
-<file path=ppt/slides/slide5.xml><?xml version="1.0" encoding="utf-8"?>
-<p:sld xmlns:a="http://schemas.openxmlformats.org/drawingml/2006/main" xmlns:r="http://schemas.openxmlformats.org/officeDocument/2006/relationships" xmlns:p="http://schemas.openxmlformats.org/presentationml/2006/main">
-  <p:cSld>
-    <p:spTree>
-      <p:nvGrpSpPr>
-        <p:cNvPr id="1" name=""/>
-        <p:cNvGrpSpPr/>
-        <p:nvPr/>
-      </p:nvGrpSpPr>
-      <p:grpSpPr>
-        <a:xfrm>
-          <a:off x="0" y="0"/>
-          <a:ext cx="0" cy="0"/>
-          <a:chOff x="0" y="0"/>
-          <a:chExt cx="0" cy="0"/>
-        </a:xfrm>
-      </p:grpSpPr>
-      <p:sp>
-        <p:nvSpPr>
-          <p:cNvPr id="3" name="Content Placeholder 2"/>
-          <p:cNvSpPr>
-            <a:spLocks noGrp="1"/>
-          </p:cNvSpPr>
-          <p:nvPr>
-            <p:ph idx="1"/>
-          </p:nvPr>
-        </p:nvSpPr>
-        <p:spPr/>
-        <p:txBody>
-          <a:bodyPr/>
-          <a:lstStyle/>
-          <a:p>
-            <a:pPr lvl="0" indent="0" marL="0">
-              <a:spcBef>
-                <a:spcPts val="3000"/>
-              </a:spcBef>
-              <a:buNone/>
-            </a:pPr>
-            <a:r>
-              <a:rPr b="1"/>
-              <a:t>Slide 4: Method — Architecture</a:t>
-            </a:r>
-          </a:p>
-          <a:p>
-            <a:pPr lvl="0" indent="0">
-              <a:buNone/>
-            </a:pPr>
-            <a:r>
-              <a:rPr>
-                <a:latin typeface="Courier"/>
+              <a:rPr sz="1100" b="0">
+                <a:solidFill>
+                  <a:srgbClr val="1C1C1E"/>
+                </a:solidFill>
+                <a:latin typeface="Menlo"/>
               </a:rPr>
               <a:t>                    7-Day Personal Health Data
               (Macros + Workouts + Garmin biometrics)
                               │
        ┌──────────────────────┼──────────────────────┐
        ▼                      ▼                      ▼
-  ┌────────┐           ┌──────────┐          ┌──────────┐
+  ┌─────────┐           ┌──────────┐          ┌──────────┐
   │Nutrition│           │ Training │          │ Recovery │       Stage 1
-  │  Agent  │           │  Agent   │          │  Agent   │     (parallel)
-  └────┬────┘           └─────┬────┘          └─────┬────┘
-       │                      │                     │
-       └──────────────────────┼─────────────────────┘
+  │  Agent  │           │  Agent   │          │  Agent   │      (parallel)
+  └─────┬───┘           └─────┬────┘          └─────┬────┘
+        │                     │                     │
+        └─────────────────────┼─────────────────────┘
                               ▼
                       ┌──────────────┐
                       │ Orchestrator │                          Stage 2
@@ -3615,216 +4145,979 @@
                     3-5 Cross-Domain Insights</a:t>
             </a:r>
           </a:p>
-          <a:p>
-            <a:pPr lvl="0"/>
-            <a:r>
-              <a:rPr b="1"/>
-              <a:t>Single-shot mode:</a:t>
-            </a:r>
-            <a:r>
-              <a:rPr/>
-              <a:t> 1 LLM call. All data. Direct prompt → output.</a:t>
-            </a:r>
-          </a:p>
-          <a:p>
-            <a:pPr lvl="0"/>
-            <a:r>
-              <a:rPr b="1"/>
-              <a:t>Multi-agent mode:</a:t>
-            </a:r>
-            <a:r>
-              <a:rPr/>
-              <a:t> 4 LLM calls. 3 specialists in parallel + 1 orchestrator.</a:t>
+        </p:txBody>
+      </p:sp>
+      <p:sp>
+        <p:nvSpPr>
+          <p:cNvPr id="4" name="TextBox 3"/>
+          <p:cNvSpPr txBox="1"/>
+          <p:nvPr/>
+        </p:nvSpPr>
+        <p:spPr>
+          <a:xfrm>
+            <a:off x="8595360" y="1280160"/>
+            <a:ext cx="3291840" cy="4572000"/>
+          </a:xfrm>
+          <a:prstGeom prst="rect">
+            <a:avLst/>
+          </a:prstGeom>
+          <a:noFill/>
+        </p:spPr>
+        <p:txBody>
+          <a:bodyPr wrap="square" anchor="t">
+            <a:spAutoFit/>
+          </a:bodyPr>
+          <a:lstStyle/>
+          <a:p>
+            <a:pPr algn="l">
+              <a:spcBef>
+                <a:spcPts val="0"/>
+              </a:spcBef>
+              <a:spcAft>
+                <a:spcPts val="600"/>
+              </a:spcAft>
+            </a:pPr>
+            <a:r>
+              <a:rPr sz="1600" b="1">
+                <a:solidFill>
+                  <a:srgbClr val="0A1F44"/>
+                </a:solidFill>
+                <a:latin typeface="Helvetica Neue"/>
+              </a:rPr>
+              <a:t>Single-shot mode</a:t>
+            </a:r>
+          </a:p>
+          <a:p>
+            <a:pPr algn="l">
+              <a:spcBef>
+                <a:spcPts val="400"/>
+              </a:spcBef>
+              <a:spcAft>
+                <a:spcPts val="600"/>
+              </a:spcAft>
+            </a:pPr>
+            <a:r>
+              <a:rPr sz="1400" b="0">
+                <a:solidFill>
+                  <a:srgbClr val="1C1C1E"/>
+                </a:solidFill>
+                <a:latin typeface="Helvetica Neue"/>
+              </a:rPr>
+              <a:t>1 LLM call. All data. Direct prompt → output.</a:t>
+            </a:r>
+          </a:p>
+          <a:p>
+            <a:pPr algn="l">
+              <a:spcBef>
+                <a:spcPts val="2000"/>
+              </a:spcBef>
+              <a:spcAft>
+                <a:spcPts val="600"/>
+              </a:spcAft>
+            </a:pPr>
+            <a:r>
+              <a:rPr sz="1600" b="1">
+                <a:solidFill>
+                  <a:srgbClr val="0A1F44"/>
+                </a:solidFill>
+                <a:latin typeface="Helvetica Neue"/>
+              </a:rPr>
+              <a:t>Multi-agent mode</a:t>
+            </a:r>
+          </a:p>
+          <a:p>
+            <a:pPr algn="l">
+              <a:spcBef>
+                <a:spcPts val="400"/>
+              </a:spcBef>
+              <a:spcAft>
+                <a:spcPts val="600"/>
+              </a:spcAft>
+            </a:pPr>
+            <a:r>
+              <a:rPr sz="1400" b="0">
+                <a:solidFill>
+                  <a:srgbClr val="1C1C1E"/>
+                </a:solidFill>
+                <a:latin typeface="Helvetica Neue"/>
+              </a:rPr>
+              <a:t>4 LLM calls. 3 specialists in parallel + 1 orchestrator.</a:t>
+            </a:r>
+          </a:p>
+        </p:txBody>
+      </p:sp>
+      <p:sp>
+        <p:nvSpPr>
+          <p:cNvPr id="5" name="TextBox 4"/>
+          <p:cNvSpPr txBox="1"/>
+          <p:nvPr/>
+        </p:nvSpPr>
+        <p:spPr>
+          <a:xfrm>
+            <a:off x="548640" y="6446520"/>
+            <a:ext cx="11091672" cy="320040"/>
+          </a:xfrm>
+          <a:prstGeom prst="rect">
+            <a:avLst/>
+          </a:prstGeom>
+          <a:noFill/>
+        </p:spPr>
+        <p:txBody>
+          <a:bodyPr wrap="none" lIns="0" tIns="0" bIns="0">
+            <a:spAutoFit/>
+          </a:bodyPr>
+          <a:lstStyle/>
+          <a:p>
+            <a:pPr algn="l"/>
+            <a:r>
+              <a:rPr sz="1100" b="0">
+                <a:solidFill>
+                  <a:srgbClr val="6B6B70"/>
+                </a:solidFill>
+                <a:latin typeface="Helvetica Neue"/>
+              </a:rPr>
+              <a:t>Health Insight Agent  ·  Slide 4 / 8</a:t>
             </a:r>
           </a:p>
         </p:txBody>
       </p:sp>
     </p:spTree>
   </p:cSld>
+  <p:clrMapOvr>
+    <a:masterClrMapping/>
+  </p:clrMapOvr>
 </p:sld>
 </file>
 
-<file path=ppt/slides/slide6.xml><?xml version="1.0" encoding="utf-8"?>
-<p:sld xmlns:a="http://schemas.openxmlformats.org/drawingml/2006/main" xmlns:r="http://schemas.openxmlformats.org/officeDocument/2006/relationships" xmlns:p="http://schemas.openxmlformats.org/presentationml/2006/main">
+<file path=ppt/slides/slide5.xml><?xml version="1.0" encoding="utf-8"?>
+<p:sld xmlns:a="http://schemas.openxmlformats.org/drawingml/2006/main" xmlns:p="http://schemas.openxmlformats.org/presentationml/2006/main" xmlns:r="http://schemas.openxmlformats.org/officeDocument/2006/relationships">
   <p:cSld>
+    <p:bg>
+      <p:bgPr>
+        <a:solidFill>
+          <a:srgbClr val="FFFFFF"/>
+        </a:solidFill>
+        <a:effectLst/>
+      </p:bgPr>
+    </p:bg>
     <p:spTree>
       <p:nvGrpSpPr>
         <p:cNvPr id="1" name=""/>
         <p:cNvGrpSpPr/>
         <p:nvPr/>
       </p:nvGrpSpPr>
-      <p:grpSpPr>
-        <a:xfrm>
-          <a:off x="0" y="0"/>
-          <a:ext cx="0" cy="0"/>
-          <a:chOff x="0" y="0"/>
-          <a:chExt cx="0" cy="0"/>
-        </a:xfrm>
-      </p:grpSpPr>
-      <p:sp>
-        <p:nvSpPr>
-          <p:cNvPr id="3" name="Content Placeholder 2"/>
-          <p:cNvSpPr>
-            <a:spLocks noGrp="1"/>
-          </p:cNvSpPr>
-          <p:nvPr>
-            <p:ph idx="1"/>
-          </p:nvPr>
-        </p:nvSpPr>
-        <p:spPr/>
-        <p:txBody>
-          <a:bodyPr/>
-          <a:lstStyle/>
-          <a:p>
-            <a:pPr lvl="0" indent="0" marL="0">
+      <p:grpSpPr/>
+      <p:sp>
+        <p:nvSpPr>
+          <p:cNvPr id="2" name="Rectangle 1"/>
+          <p:cNvSpPr/>
+          <p:nvPr/>
+        </p:nvSpPr>
+        <p:spPr>
+          <a:xfrm>
+            <a:off x="0" y="0"/>
+            <a:ext cx="12191695" cy="822960"/>
+          </a:xfrm>
+          <a:prstGeom prst="rect">
+            <a:avLst/>
+          </a:prstGeom>
+          <a:solidFill>
+            <a:srgbClr val="0A1F44"/>
+          </a:solidFill>
+          <a:ln>
+            <a:noFill/>
+          </a:ln>
+        </p:spPr>
+        <p:style>
+          <a:lnRef idx="1">
+            <a:schemeClr val="accent1"/>
+          </a:lnRef>
+          <a:fillRef idx="3">
+            <a:schemeClr val="accent1"/>
+          </a:fillRef>
+          <a:effectRef idx="2">
+            <a:schemeClr val="accent1"/>
+          </a:effectRef>
+          <a:fontRef idx="minor">
+            <a:schemeClr val="lt1"/>
+          </a:fontRef>
+        </p:style>
+        <p:txBody>
+          <a:bodyPr rtlCol="0" anchor="ctr" lIns="548640" rIns="548640" tIns="164592" bIns="0"/>
+          <a:lstStyle/>
+          <a:p>
+            <a:pPr algn="l"/>
+            <a:r>
+              <a:rPr sz="2600" b="1">
+                <a:solidFill>
+                  <a:srgbClr val="FFFFFF"/>
+                </a:solidFill>
+                <a:latin typeface="Helvetica Neue"/>
+              </a:rPr>
+              <a:t>Implementation</a:t>
+            </a:r>
+          </a:p>
+        </p:txBody>
+      </p:sp>
+      <p:sp>
+        <p:nvSpPr>
+          <p:cNvPr id="3" name="Rectangle 2"/>
+          <p:cNvSpPr/>
+          <p:nvPr/>
+        </p:nvSpPr>
+        <p:spPr>
+          <a:xfrm>
+            <a:off x="548640" y="1280160"/>
+            <a:ext cx="7772400" cy="640080"/>
+          </a:xfrm>
+          <a:prstGeom prst="rect">
+            <a:avLst/>
+          </a:prstGeom>
+          <a:solidFill>
+            <a:srgbClr val="F2F2F7"/>
+          </a:solidFill>
+          <a:ln>
+            <a:noFill/>
+          </a:ln>
+        </p:spPr>
+        <p:style>
+          <a:lnRef idx="1">
+            <a:schemeClr val="accent1"/>
+          </a:lnRef>
+          <a:fillRef idx="3">
+            <a:schemeClr val="accent1"/>
+          </a:fillRef>
+          <a:effectRef idx="2">
+            <a:schemeClr val="accent1"/>
+          </a:effectRef>
+          <a:fontRef idx="minor">
+            <a:schemeClr val="lt1"/>
+          </a:fontRef>
+        </p:style>
+        <p:txBody>
+          <a:bodyPr rtlCol="0" anchor="ctr"/>
+          <a:lstStyle/>
+          <a:p>
+            <a:pPr algn="ctr"/>
+          </a:p>
+        </p:txBody>
+      </p:sp>
+      <p:sp>
+        <p:nvSpPr>
+          <p:cNvPr id="4" name="TextBox 3"/>
+          <p:cNvSpPr txBox="1"/>
+          <p:nvPr/>
+        </p:nvSpPr>
+        <p:spPr>
+          <a:xfrm>
+            <a:off x="731520" y="1389888"/>
+            <a:ext cx="1828800" cy="457200"/>
+          </a:xfrm>
+          <a:prstGeom prst="rect">
+            <a:avLst/>
+          </a:prstGeom>
+          <a:noFill/>
+        </p:spPr>
+        <p:txBody>
+          <a:bodyPr wrap="square" anchor="t">
+            <a:spAutoFit/>
+          </a:bodyPr>
+          <a:lstStyle/>
+          <a:p>
+            <a:pPr algn="l">
               <a:spcBef>
-                <a:spcPts val="3000"/>
+                <a:spcPts val="0"/>
               </a:spcBef>
-              <a:buNone/>
+              <a:spcAft>
+                <a:spcPts val="600"/>
+              </a:spcAft>
             </a:pPr>
             <a:r>
-              <a:rPr b="1"/>
-              <a:t>Slide 5: Implementation</a:t>
-            </a:r>
-          </a:p>
-          <a:p>
-            <a:pPr lvl="0"/>
-            <a:r>
-              <a:rPr b="1"/>
-              <a:t>Platform:</a:t>
-            </a:r>
-            <a:r>
-              <a:rPr/>
-              <a:t> Native iOS app (SwiftUI, iOS 17+)</a:t>
-            </a:r>
-          </a:p>
-          <a:p>
-            <a:pPr lvl="0"/>
-            <a:r>
-              <a:rPr b="1"/>
-              <a:t>LLM:</a:t>
-            </a:r>
-            <a:r>
-              <a:rPr/>
-              <a:t> GPT-4o-mini via OpenAI Chat Completions API</a:t>
-            </a:r>
-          </a:p>
-          <a:p>
-            <a:pPr lvl="0"/>
-            <a:r>
-              <a:rPr b="1"/>
-              <a:t>Networking:</a:t>
-            </a:r>
-            <a:r>
-              <a:rPr/>
-              <a:t> pure URLSession, no SDK</a:t>
-            </a:r>
-          </a:p>
-          <a:p>
-            <a:pPr lvl="0"/>
-            <a:r>
-              <a:rPr b="1"/>
-              <a:t>Data:</a:t>
-            </a:r>
-            <a:r>
-              <a:rPr/>
-              <a:t> 7 days of real self-tracked data (Apr 19-25, 2026)</a:t>
-            </a:r>
-          </a:p>
-          <a:p>
-            <a:pPr lvl="0"/>
-            <a:r>
-              <a:rPr b="1"/>
-              <a:t>Domains:</a:t>
-            </a:r>
-            <a:r>
-              <a:rPr/>
-              <a:t> macros (food log) + workouts (split + main lift) + Garmin (HRV, body battery, training readiness)</a:t>
-            </a:r>
-          </a:p>
-          <a:p>
-            <a:pPr lvl="0" indent="0" marL="0">
-              <a:buNone/>
+              <a:rPr sz="1500" b="1">
+                <a:solidFill>
+                  <a:srgbClr val="6B6B70"/>
+                </a:solidFill>
+                <a:latin typeface="Helvetica Neue"/>
+              </a:rPr>
+              <a:t>Platform</a:t>
+            </a:r>
+          </a:p>
+        </p:txBody>
+      </p:sp>
+      <p:sp>
+        <p:nvSpPr>
+          <p:cNvPr id="5" name="TextBox 4"/>
+          <p:cNvSpPr txBox="1"/>
+          <p:nvPr/>
+        </p:nvSpPr>
+        <p:spPr>
+          <a:xfrm>
+            <a:off x="2468880" y="1389888"/>
+            <a:ext cx="5760720" cy="457200"/>
+          </a:xfrm>
+          <a:prstGeom prst="rect">
+            <a:avLst/>
+          </a:prstGeom>
+          <a:noFill/>
+        </p:spPr>
+        <p:txBody>
+          <a:bodyPr wrap="square" anchor="t">
+            <a:spAutoFit/>
+          </a:bodyPr>
+          <a:lstStyle/>
+          <a:p>
+            <a:pPr algn="l">
+              <a:spcBef>
+                <a:spcPts val="0"/>
+              </a:spcBef>
+              <a:spcAft>
+                <a:spcPts val="600"/>
+              </a:spcAft>
             </a:pPr>
             <a:r>
-              <a:rPr/>
-              <a:t>[INCLUDE 1 SCREENSHOT OF THE APP HERE — recommend the segmented control + insights card]</a:t>
+              <a:rPr sz="1600" b="0">
+                <a:solidFill>
+                  <a:srgbClr val="1C1C1E"/>
+                </a:solidFill>
+                <a:latin typeface="Helvetica Neue"/>
+              </a:rPr>
+              <a:t>Native iOS app  ·  SwiftUI  ·  iOS 17+</a:t>
+            </a:r>
+          </a:p>
+        </p:txBody>
+      </p:sp>
+      <p:sp>
+        <p:nvSpPr>
+          <p:cNvPr id="6" name="TextBox 5"/>
+          <p:cNvSpPr txBox="1"/>
+          <p:nvPr/>
+        </p:nvSpPr>
+        <p:spPr>
+          <a:xfrm>
+            <a:off x="731520" y="2029968"/>
+            <a:ext cx="1828800" cy="457200"/>
+          </a:xfrm>
+          <a:prstGeom prst="rect">
+            <a:avLst/>
+          </a:prstGeom>
+          <a:noFill/>
+        </p:spPr>
+        <p:txBody>
+          <a:bodyPr wrap="square" anchor="t">
+            <a:spAutoFit/>
+          </a:bodyPr>
+          <a:lstStyle/>
+          <a:p>
+            <a:pPr algn="l">
+              <a:spcBef>
+                <a:spcPts val="0"/>
+              </a:spcBef>
+              <a:spcAft>
+                <a:spcPts val="600"/>
+              </a:spcAft>
+            </a:pPr>
+            <a:r>
+              <a:rPr sz="1500" b="1">
+                <a:solidFill>
+                  <a:srgbClr val="6B6B70"/>
+                </a:solidFill>
+                <a:latin typeface="Helvetica Neue"/>
+              </a:rPr>
+              <a:t>LLM</a:t>
+            </a:r>
+          </a:p>
+        </p:txBody>
+      </p:sp>
+      <p:sp>
+        <p:nvSpPr>
+          <p:cNvPr id="7" name="TextBox 6"/>
+          <p:cNvSpPr txBox="1"/>
+          <p:nvPr/>
+        </p:nvSpPr>
+        <p:spPr>
+          <a:xfrm>
+            <a:off x="2468880" y="2029968"/>
+            <a:ext cx="5760720" cy="457200"/>
+          </a:xfrm>
+          <a:prstGeom prst="rect">
+            <a:avLst/>
+          </a:prstGeom>
+          <a:noFill/>
+        </p:spPr>
+        <p:txBody>
+          <a:bodyPr wrap="square" anchor="t">
+            <a:spAutoFit/>
+          </a:bodyPr>
+          <a:lstStyle/>
+          <a:p>
+            <a:pPr algn="l">
+              <a:spcBef>
+                <a:spcPts val="0"/>
+              </a:spcBef>
+              <a:spcAft>
+                <a:spcPts val="600"/>
+              </a:spcAft>
+            </a:pPr>
+            <a:r>
+              <a:rPr sz="1600" b="0">
+                <a:solidFill>
+                  <a:srgbClr val="1C1C1E"/>
+                </a:solidFill>
+                <a:latin typeface="Helvetica Neue"/>
+              </a:rPr>
+              <a:t>GPT-4o-mini via OpenAI Chat Completions API</a:t>
+            </a:r>
+          </a:p>
+        </p:txBody>
+      </p:sp>
+      <p:sp>
+        <p:nvSpPr>
+          <p:cNvPr id="8" name="Rectangle 7"/>
+          <p:cNvSpPr/>
+          <p:nvPr/>
+        </p:nvSpPr>
+        <p:spPr>
+          <a:xfrm>
+            <a:off x="548640" y="2560320"/>
+            <a:ext cx="7772400" cy="640080"/>
+          </a:xfrm>
+          <a:prstGeom prst="rect">
+            <a:avLst/>
+          </a:prstGeom>
+          <a:solidFill>
+            <a:srgbClr val="F2F2F7"/>
+          </a:solidFill>
+          <a:ln>
+            <a:noFill/>
+          </a:ln>
+        </p:spPr>
+        <p:style>
+          <a:lnRef idx="1">
+            <a:schemeClr val="accent1"/>
+          </a:lnRef>
+          <a:fillRef idx="3">
+            <a:schemeClr val="accent1"/>
+          </a:fillRef>
+          <a:effectRef idx="2">
+            <a:schemeClr val="accent1"/>
+          </a:effectRef>
+          <a:fontRef idx="minor">
+            <a:schemeClr val="lt1"/>
+          </a:fontRef>
+        </p:style>
+        <p:txBody>
+          <a:bodyPr rtlCol="0" anchor="ctr"/>
+          <a:lstStyle/>
+          <a:p>
+            <a:pPr algn="ctr"/>
+          </a:p>
+        </p:txBody>
+      </p:sp>
+      <p:sp>
+        <p:nvSpPr>
+          <p:cNvPr id="9" name="TextBox 8"/>
+          <p:cNvSpPr txBox="1"/>
+          <p:nvPr/>
+        </p:nvSpPr>
+        <p:spPr>
+          <a:xfrm>
+            <a:off x="731520" y="2670048"/>
+            <a:ext cx="1828800" cy="457200"/>
+          </a:xfrm>
+          <a:prstGeom prst="rect">
+            <a:avLst/>
+          </a:prstGeom>
+          <a:noFill/>
+        </p:spPr>
+        <p:txBody>
+          <a:bodyPr wrap="square" anchor="t">
+            <a:spAutoFit/>
+          </a:bodyPr>
+          <a:lstStyle/>
+          <a:p>
+            <a:pPr algn="l">
+              <a:spcBef>
+                <a:spcPts val="0"/>
+              </a:spcBef>
+              <a:spcAft>
+                <a:spcPts val="600"/>
+              </a:spcAft>
+            </a:pPr>
+            <a:r>
+              <a:rPr sz="1500" b="1">
+                <a:solidFill>
+                  <a:srgbClr val="6B6B70"/>
+                </a:solidFill>
+                <a:latin typeface="Helvetica Neue"/>
+              </a:rPr>
+              <a:t>Networking</a:t>
+            </a:r>
+          </a:p>
+        </p:txBody>
+      </p:sp>
+      <p:sp>
+        <p:nvSpPr>
+          <p:cNvPr id="10" name="TextBox 9"/>
+          <p:cNvSpPr txBox="1"/>
+          <p:nvPr/>
+        </p:nvSpPr>
+        <p:spPr>
+          <a:xfrm>
+            <a:off x="2468880" y="2670048"/>
+            <a:ext cx="5760720" cy="457200"/>
+          </a:xfrm>
+          <a:prstGeom prst="rect">
+            <a:avLst/>
+          </a:prstGeom>
+          <a:noFill/>
+        </p:spPr>
+        <p:txBody>
+          <a:bodyPr wrap="square" anchor="t">
+            <a:spAutoFit/>
+          </a:bodyPr>
+          <a:lstStyle/>
+          <a:p>
+            <a:pPr algn="l">
+              <a:spcBef>
+                <a:spcPts val="0"/>
+              </a:spcBef>
+              <a:spcAft>
+                <a:spcPts val="600"/>
+              </a:spcAft>
+            </a:pPr>
+            <a:r>
+              <a:rPr sz="1600" b="0">
+                <a:solidFill>
+                  <a:srgbClr val="1C1C1E"/>
+                </a:solidFill>
+                <a:latin typeface="Helvetica Neue"/>
+              </a:rPr>
+              <a:t>Pure URLSession, no SDK</a:t>
+            </a:r>
+          </a:p>
+        </p:txBody>
+      </p:sp>
+      <p:sp>
+        <p:nvSpPr>
+          <p:cNvPr id="11" name="TextBox 10"/>
+          <p:cNvSpPr txBox="1"/>
+          <p:nvPr/>
+        </p:nvSpPr>
+        <p:spPr>
+          <a:xfrm>
+            <a:off x="731520" y="3310128"/>
+            <a:ext cx="1828800" cy="457200"/>
+          </a:xfrm>
+          <a:prstGeom prst="rect">
+            <a:avLst/>
+          </a:prstGeom>
+          <a:noFill/>
+        </p:spPr>
+        <p:txBody>
+          <a:bodyPr wrap="square" anchor="t">
+            <a:spAutoFit/>
+          </a:bodyPr>
+          <a:lstStyle/>
+          <a:p>
+            <a:pPr algn="l">
+              <a:spcBef>
+                <a:spcPts val="0"/>
+              </a:spcBef>
+              <a:spcAft>
+                <a:spcPts val="600"/>
+              </a:spcAft>
+            </a:pPr>
+            <a:r>
+              <a:rPr sz="1500" b="1">
+                <a:solidFill>
+                  <a:srgbClr val="6B6B70"/>
+                </a:solidFill>
+                <a:latin typeface="Helvetica Neue"/>
+              </a:rPr>
+              <a:t>Data</a:t>
+            </a:r>
+          </a:p>
+        </p:txBody>
+      </p:sp>
+      <p:sp>
+        <p:nvSpPr>
+          <p:cNvPr id="12" name="TextBox 11"/>
+          <p:cNvSpPr txBox="1"/>
+          <p:nvPr/>
+        </p:nvSpPr>
+        <p:spPr>
+          <a:xfrm>
+            <a:off x="2468880" y="3310128"/>
+            <a:ext cx="5760720" cy="457200"/>
+          </a:xfrm>
+          <a:prstGeom prst="rect">
+            <a:avLst/>
+          </a:prstGeom>
+          <a:noFill/>
+        </p:spPr>
+        <p:txBody>
+          <a:bodyPr wrap="square" anchor="t">
+            <a:spAutoFit/>
+          </a:bodyPr>
+          <a:lstStyle/>
+          <a:p>
+            <a:pPr algn="l">
+              <a:spcBef>
+                <a:spcPts val="0"/>
+              </a:spcBef>
+              <a:spcAft>
+                <a:spcPts val="600"/>
+              </a:spcAft>
+            </a:pPr>
+            <a:r>
+              <a:rPr sz="1600" b="0">
+                <a:solidFill>
+                  <a:srgbClr val="1C1C1E"/>
+                </a:solidFill>
+                <a:latin typeface="Helvetica Neue"/>
+              </a:rPr>
+              <a:t>7 days of self-tracked data (Apr 19–25, 2026)</a:t>
+            </a:r>
+          </a:p>
+        </p:txBody>
+      </p:sp>
+      <p:sp>
+        <p:nvSpPr>
+          <p:cNvPr id="13" name="Rectangle 12"/>
+          <p:cNvSpPr/>
+          <p:nvPr/>
+        </p:nvSpPr>
+        <p:spPr>
+          <a:xfrm>
+            <a:off x="548640" y="3840480"/>
+            <a:ext cx="7772400" cy="640080"/>
+          </a:xfrm>
+          <a:prstGeom prst="rect">
+            <a:avLst/>
+          </a:prstGeom>
+          <a:solidFill>
+            <a:srgbClr val="F2F2F7"/>
+          </a:solidFill>
+          <a:ln>
+            <a:noFill/>
+          </a:ln>
+        </p:spPr>
+        <p:style>
+          <a:lnRef idx="1">
+            <a:schemeClr val="accent1"/>
+          </a:lnRef>
+          <a:fillRef idx="3">
+            <a:schemeClr val="accent1"/>
+          </a:fillRef>
+          <a:effectRef idx="2">
+            <a:schemeClr val="accent1"/>
+          </a:effectRef>
+          <a:fontRef idx="minor">
+            <a:schemeClr val="lt1"/>
+          </a:fontRef>
+        </p:style>
+        <p:txBody>
+          <a:bodyPr rtlCol="0" anchor="ctr"/>
+          <a:lstStyle/>
+          <a:p>
+            <a:pPr algn="ctr"/>
+          </a:p>
+        </p:txBody>
+      </p:sp>
+      <p:sp>
+        <p:nvSpPr>
+          <p:cNvPr id="14" name="TextBox 13"/>
+          <p:cNvSpPr txBox="1"/>
+          <p:nvPr/>
+        </p:nvSpPr>
+        <p:spPr>
+          <a:xfrm>
+            <a:off x="731520" y="3950208"/>
+            <a:ext cx="1828800" cy="457200"/>
+          </a:xfrm>
+          <a:prstGeom prst="rect">
+            <a:avLst/>
+          </a:prstGeom>
+          <a:noFill/>
+        </p:spPr>
+        <p:txBody>
+          <a:bodyPr wrap="square" anchor="t">
+            <a:spAutoFit/>
+          </a:bodyPr>
+          <a:lstStyle/>
+          <a:p>
+            <a:pPr algn="l">
+              <a:spcBef>
+                <a:spcPts val="0"/>
+              </a:spcBef>
+              <a:spcAft>
+                <a:spcPts val="600"/>
+              </a:spcAft>
+            </a:pPr>
+            <a:r>
+              <a:rPr sz="1500" b="1">
+                <a:solidFill>
+                  <a:srgbClr val="6B6B70"/>
+                </a:solidFill>
+                <a:latin typeface="Helvetica Neue"/>
+              </a:rPr>
+              <a:t>Domains</a:t>
+            </a:r>
+          </a:p>
+        </p:txBody>
+      </p:sp>
+      <p:sp>
+        <p:nvSpPr>
+          <p:cNvPr id="15" name="TextBox 14"/>
+          <p:cNvSpPr txBox="1"/>
+          <p:nvPr/>
+        </p:nvSpPr>
+        <p:spPr>
+          <a:xfrm>
+            <a:off x="2468880" y="3950208"/>
+            <a:ext cx="5760720" cy="457200"/>
+          </a:xfrm>
+          <a:prstGeom prst="rect">
+            <a:avLst/>
+          </a:prstGeom>
+          <a:noFill/>
+        </p:spPr>
+        <p:txBody>
+          <a:bodyPr wrap="square" anchor="t">
+            <a:spAutoFit/>
+          </a:bodyPr>
+          <a:lstStyle/>
+          <a:p>
+            <a:pPr algn="l">
+              <a:spcBef>
+                <a:spcPts val="0"/>
+              </a:spcBef>
+              <a:spcAft>
+                <a:spcPts val="600"/>
+              </a:spcAft>
+            </a:pPr>
+            <a:r>
+              <a:rPr sz="1600" b="0">
+                <a:solidFill>
+                  <a:srgbClr val="1C1C1E"/>
+                </a:solidFill>
+                <a:latin typeface="Helvetica Neue"/>
+              </a:rPr>
+              <a:t>Macros (food log) · Workouts (split + main lift) · Garmin (HRV, body battery, training readiness)</a:t>
+            </a:r>
+          </a:p>
+        </p:txBody>
+      </p:sp>
+      <p:sp>
+        <p:nvSpPr>
+          <p:cNvPr id="16" name="Rectangle 15"/>
+          <p:cNvSpPr/>
+          <p:nvPr/>
+        </p:nvSpPr>
+        <p:spPr>
+          <a:xfrm>
+            <a:off x="8595360" y="1280160"/>
+            <a:ext cx="3108960" cy="4937760"/>
+          </a:xfrm>
+          <a:prstGeom prst="rect">
+            <a:avLst/>
+          </a:prstGeom>
+          <a:solidFill>
+            <a:srgbClr val="FFFFFF"/>
+          </a:solidFill>
+          <a:ln w="12700">
+            <a:solidFill>
+              <a:srgbClr val="C7C7CC"/>
+            </a:solidFill>
+            <a:prstDash val="lgDash"/>
+          </a:ln>
+        </p:spPr>
+        <p:style>
+          <a:lnRef idx="1">
+            <a:schemeClr val="accent1"/>
+          </a:lnRef>
+          <a:fillRef idx="3">
+            <a:schemeClr val="accent1"/>
+          </a:fillRef>
+          <a:effectRef idx="2">
+            <a:schemeClr val="accent1"/>
+          </a:effectRef>
+          <a:fontRef idx="minor">
+            <a:schemeClr val="lt1"/>
+          </a:fontRef>
+        </p:style>
+        <p:txBody>
+          <a:bodyPr rtlCol="0" anchor="ctr"/>
+          <a:lstStyle/>
+          <a:p>
+            <a:pPr algn="ctr"/>
+            <a:r>
+              <a:rPr sz="1400" b="0">
+                <a:solidFill>
+                  <a:srgbClr val="6B6B70"/>
+                </a:solidFill>
+                <a:latin typeface="Helvetica Neue"/>
+              </a:rPr>
+              <a:t>[App screenshot]</a:t>
+            </a:r>
+          </a:p>
+          <a:p>
+            <a:pPr algn="ctr">
+              <a:spcBef>
+                <a:spcPts val="600"/>
+              </a:spcBef>
+              <a:spcAft>
+                <a:spcPts val="600"/>
+              </a:spcAft>
+            </a:pPr>
+            <a:r>
+              <a:rPr sz="1100" b="0">
+                <a:solidFill>
+                  <a:srgbClr val="6B6B70"/>
+                </a:solidFill>
+                <a:latin typeface="Helvetica Neue"/>
+              </a:rPr>
+              <a:t>Drop in the segmented control + insights card view</a:t>
+            </a:r>
+          </a:p>
+        </p:txBody>
+      </p:sp>
+      <p:sp>
+        <p:nvSpPr>
+          <p:cNvPr id="17" name="TextBox 16"/>
+          <p:cNvSpPr txBox="1"/>
+          <p:nvPr/>
+        </p:nvSpPr>
+        <p:spPr>
+          <a:xfrm>
+            <a:off x="548640" y="6446520"/>
+            <a:ext cx="11091672" cy="320040"/>
+          </a:xfrm>
+          <a:prstGeom prst="rect">
+            <a:avLst/>
+          </a:prstGeom>
+          <a:noFill/>
+        </p:spPr>
+        <p:txBody>
+          <a:bodyPr wrap="none" lIns="0" tIns="0" bIns="0">
+            <a:spAutoFit/>
+          </a:bodyPr>
+          <a:lstStyle/>
+          <a:p>
+            <a:pPr algn="l"/>
+            <a:r>
+              <a:rPr sz="1100" b="0">
+                <a:solidFill>
+                  <a:srgbClr val="6B6B70"/>
+                </a:solidFill>
+                <a:latin typeface="Helvetica Neue"/>
+              </a:rPr>
+              <a:t>Health Insight Agent  ·  Slide 5 / 8</a:t>
             </a:r>
           </a:p>
         </p:txBody>
       </p:sp>
     </p:spTree>
   </p:cSld>
+  <p:clrMapOvr>
+    <a:masterClrMapping/>
+  </p:clrMapOvr>
 </p:sld>
 </file>
 
-<file path=ppt/slides/slide7.xml><?xml version="1.0" encoding="utf-8"?>
-<p:sld xmlns:a="http://schemas.openxmlformats.org/drawingml/2006/main" xmlns:r="http://schemas.openxmlformats.org/officeDocument/2006/relationships" xmlns:p="http://schemas.openxmlformats.org/presentationml/2006/main">
+<file path=ppt/slides/slide6.xml><?xml version="1.0" encoding="utf-8"?>
+<p:sld xmlns:a="http://schemas.openxmlformats.org/drawingml/2006/main" xmlns:p="http://schemas.openxmlformats.org/presentationml/2006/main" xmlns:r="http://schemas.openxmlformats.org/officeDocument/2006/relationships">
   <p:cSld>
+    <p:bg>
+      <p:bgPr>
+        <a:solidFill>
+          <a:srgbClr val="FFFFFF"/>
+        </a:solidFill>
+        <a:effectLst/>
+      </p:bgPr>
+    </p:bg>
     <p:spTree>
       <p:nvGrpSpPr>
         <p:cNvPr id="1" name=""/>
         <p:cNvGrpSpPr/>
         <p:nvPr/>
       </p:nvGrpSpPr>
-      <p:grpSpPr>
-        <a:xfrm>
-          <a:off x="0" y="0"/>
-          <a:ext cx="0" cy="0"/>
-          <a:chOff x="0" y="0"/>
-          <a:chExt cx="0" cy="0"/>
-        </a:xfrm>
-      </p:grpSpPr>
-      <p:sp>
-        <p:nvSpPr>
-          <p:cNvPr id="4" name="Text Placeholder 3"/>
-          <p:cNvSpPr>
-            <a:spLocks noGrp="1"/>
-          </p:cNvSpPr>
-          <p:nvPr>
-            <p:ph idx="2" sz="half" type="body"/>
-          </p:nvPr>
-        </p:nvSpPr>
-        <p:spPr/>
-        <p:txBody>
-          <a:bodyPr/>
-          <a:lstStyle/>
-          <a:p>
-            <a:pPr lvl="0" indent="0" marL="0">
-              <a:spcBef>
-                <a:spcPts val="3000"/>
-              </a:spcBef>
-              <a:buNone/>
-            </a:pPr>
-            <a:r>
-              <a:rPr b="1"/>
-              <a:t>Slide 6: Results</a:t>
-            </a:r>
-          </a:p>
-          <a:p>
-            <a:pPr lvl="0" indent="0" marL="0">
-              <a:buNone/>
-            </a:pPr>
-            <a:r>
-              <a:rPr/>
-              <a:t>n=5 generations per mode, identical 7-day dataset, GPT-4o-mini, temp 0.4.</a:t>
+      <p:grpSpPr/>
+      <p:sp>
+        <p:nvSpPr>
+          <p:cNvPr id="2" name="Rectangle 1"/>
+          <p:cNvSpPr/>
+          <p:nvPr/>
+        </p:nvSpPr>
+        <p:spPr>
+          <a:xfrm>
+            <a:off x="0" y="0"/>
+            <a:ext cx="12191695" cy="822960"/>
+          </a:xfrm>
+          <a:prstGeom prst="rect">
+            <a:avLst/>
+          </a:prstGeom>
+          <a:solidFill>
+            <a:srgbClr val="0A1F44"/>
+          </a:solidFill>
+          <a:ln>
+            <a:noFill/>
+          </a:ln>
+        </p:spPr>
+        <p:style>
+          <a:lnRef idx="1">
+            <a:schemeClr val="accent1"/>
+          </a:lnRef>
+          <a:fillRef idx="3">
+            <a:schemeClr val="accent1"/>
+          </a:fillRef>
+          <a:effectRef idx="2">
+            <a:schemeClr val="accent1"/>
+          </a:effectRef>
+          <a:fontRef idx="minor">
+            <a:schemeClr val="lt1"/>
+          </a:fontRef>
+        </p:style>
+        <p:txBody>
+          <a:bodyPr rtlCol="0" anchor="ctr" lIns="548640" rIns="548640" tIns="164592" bIns="0"/>
+          <a:lstStyle/>
+          <a:p>
+            <a:pPr algn="l"/>
+            <a:r>
+              <a:rPr sz="2600" b="1">
+                <a:solidFill>
+                  <a:srgbClr val="FFFFFF"/>
+                </a:solidFill>
+                <a:latin typeface="Helvetica Neue"/>
+              </a:rPr>
+              <a:t>Results</a:t>
+            </a:r>
+          </a:p>
+          <a:p>
+            <a:pPr algn="l"/>
+            <a:r>
+              <a:rPr sz="1300">
+                <a:solidFill>
+                  <a:srgbClr val="C4CCDB"/>
+                </a:solidFill>
+                <a:latin typeface="Helvetica Neue"/>
+              </a:rPr>
+              <a:t>n=5 generations per mode  ·  GPT-4o-mini  ·  temp 0.4  ·  identical 7-day dataset</a:t>
             </a:r>
           </a:p>
         </p:txBody>
       </p:sp>
       <p:graphicFrame>
         <p:nvGraphicFramePr>
-          <p:cNvPr id="6" name="Content Placeholder 5"/>
+          <p:cNvPr id="3" name="Table 2"/>
           <p:cNvGraphicFramePr>
             <a:graphicFrameLocks noGrp="1"/>
           </p:cNvGraphicFramePr>
-          <p:nvPr>
-            <p:ph idx="1"/>
-          </p:nvPr>
+          <p:nvPr/>
         </p:nvGraphicFramePr>
         <p:xfrm>
-          <a:off x="3568700" y="203200"/>
-          <a:ext cx="5105400" cy="4381500"/>
+          <a:off x="548640" y="1325880"/>
+          <a:ext cx="10241280" cy="2743200"/>
         </p:xfrm>
         <a:graphic>
           <a:graphicData uri="http://schemas.openxmlformats.org/drawingml/2006/table">
@@ -3833,493 +5126,1446 @@
                 <a:tableStyleId>{5C22544A-7EE6-4342-B048-85BDC9FD1C3A}</a:tableStyleId>
               </a:tblPr>
               <a:tblGrid>
-                <a:gridCol w="1701800"/>
-                <a:gridCol w="1701800"/>
-                <a:gridCol w="1701800"/>
+                <a:gridCol w="4206240"/>
+                <a:gridCol w="3017520"/>
+                <a:gridCol w="3017520"/>
               </a:tblGrid>
-              <a:tr h="0">
+              <a:tr h="457200">
                 <a:tc>
                   <a:txBody>
-                    <a:bodyPr/>
+                    <a:bodyPr wrap="square"/>
                     <a:lstStyle/>
                     <a:p>
-                      <a:pPr lvl="0" indent="0" marL="0">
-                        <a:buNone/>
-                      </a:pPr>
+                      <a:pPr algn="l"/>
                       <a:r>
-                        <a:rPr/>
+                        <a:rPr sz="1400" b="1">
+                          <a:solidFill>
+                            <a:srgbClr val="FFFFFF"/>
+                          </a:solidFill>
+                          <a:latin typeface="Helvetica Neue"/>
+                        </a:rPr>
                         <a:t>Metric</a:t>
                       </a:r>
                     </a:p>
                   </a:txBody>
-                  <a:tcPr/>
+                  <a:tcPr marL="164592" marR="164592" marT="45720" marB="45720" anchor="ctr">
+                    <a:solidFill>
+                      <a:srgbClr val="0A1F44"/>
+                    </a:solidFill>
+                  </a:tcPr>
                 </a:tc>
                 <a:tc>
                   <a:txBody>
-                    <a:bodyPr/>
+                    <a:bodyPr wrap="square"/>
                     <a:lstStyle/>
                     <a:p>
-                      <a:pPr lvl="0" indent="0" marL="0">
-                        <a:buNone/>
-                      </a:pPr>
+                      <a:pPr algn="ctr"/>
                       <a:r>
-                        <a:rPr/>
+                        <a:rPr sz="1400" b="1">
+                          <a:solidFill>
+                            <a:srgbClr val="FFFFFF"/>
+                          </a:solidFill>
+                          <a:latin typeface="Helvetica Neue"/>
+                        </a:rPr>
                         <a:t>Single-Shot</a:t>
                       </a:r>
                     </a:p>
                   </a:txBody>
-                  <a:tcPr/>
+                  <a:tcPr marL="164592" marR="164592" marT="45720" marB="45720" anchor="ctr">
+                    <a:solidFill>
+                      <a:srgbClr val="0A1F44"/>
+                    </a:solidFill>
+                  </a:tcPr>
                 </a:tc>
                 <a:tc>
                   <a:txBody>
-                    <a:bodyPr/>
+                    <a:bodyPr wrap="square"/>
                     <a:lstStyle/>
                     <a:p>
-                      <a:pPr lvl="0" indent="0" marL="0">
-                        <a:buNone/>
-                      </a:pPr>
+                      <a:pPr algn="ctr"/>
                       <a:r>
-                        <a:rPr/>
+                        <a:rPr sz="1400" b="1">
+                          <a:solidFill>
+                            <a:srgbClr val="FFFFFF"/>
+                          </a:solidFill>
+                          <a:latin typeface="Helvetica Neue"/>
+                        </a:rPr>
                         <a:t>Multi-Agent</a:t>
                       </a:r>
                     </a:p>
                   </a:txBody>
-                  <a:tcPr/>
+                  <a:tcPr marL="164592" marR="164592" marT="45720" marB="45720" anchor="ctr">
+                    <a:solidFill>
+                      <a:srgbClr val="0A1F44"/>
+                    </a:solidFill>
+                  </a:tcPr>
                 </a:tc>
               </a:tr>
-              <a:tr h="0">
+              <a:tr h="457200">
                 <a:tc>
                   <a:txBody>
-                    <a:bodyPr/>
+                    <a:bodyPr wrap="square"/>
                     <a:lstStyle/>
                     <a:p>
-                      <a:pPr lvl="0" indent="0" marL="0">
-                        <a:buNone/>
-                      </a:pPr>
+                      <a:pPr algn="l"/>
                       <a:r>
-                        <a:rPr/>
+                        <a:rPr sz="1400" b="0">
+                          <a:solidFill>
+                            <a:srgbClr val="1C1C1E"/>
+                          </a:solidFill>
+                          <a:latin typeface="Helvetica Neue"/>
+                        </a:rPr>
                         <a:t>Grounding rate</a:t>
                       </a:r>
                     </a:p>
                   </a:txBody>
+                  <a:tcPr marL="164592" marR="164592" marT="45720" marB="45720" anchor="ctr">
+                    <a:solidFill>
+                      <a:srgbClr val="FFFFFF"/>
+                    </a:solidFill>
+                  </a:tcPr>
                 </a:tc>
                 <a:tc>
                   <a:txBody>
-                    <a:bodyPr/>
+                    <a:bodyPr wrap="square"/>
                     <a:lstStyle/>
                     <a:p>
-                      <a:pPr lvl="0" indent="0" marL="0">
-                        <a:buNone/>
-                      </a:pPr>
+                      <a:pPr algn="ctr"/>
                       <a:r>
-                        <a:rPr b="1"/>
+                        <a:rPr sz="1400" b="1">
+                          <a:solidFill>
+                            <a:srgbClr val="1F8A42"/>
+                          </a:solidFill>
+                          <a:latin typeface="Helvetica Neue"/>
+                        </a:rPr>
                         <a:t>100%</a:t>
                       </a:r>
                     </a:p>
                   </a:txBody>
+                  <a:tcPr marL="164592" marR="164592" marT="45720" marB="45720" anchor="ctr">
+                    <a:solidFill>
+                      <a:srgbClr val="FFFFFF"/>
+                    </a:solidFill>
+                  </a:tcPr>
                 </a:tc>
                 <a:tc>
                   <a:txBody>
-                    <a:bodyPr/>
+                    <a:bodyPr wrap="square"/>
                     <a:lstStyle/>
                     <a:p>
-                      <a:pPr lvl="0" indent="0" marL="0">
-                        <a:buNone/>
-                      </a:pPr>
+                      <a:pPr algn="ctr"/>
                       <a:r>
-                        <a:rPr b="1"/>
+                        <a:rPr sz="1400" b="1">
+                          <a:solidFill>
+                            <a:srgbClr val="1F8A42"/>
+                          </a:solidFill>
+                          <a:latin typeface="Helvetica Neue"/>
+                        </a:rPr>
                         <a:t>100%</a:t>
                       </a:r>
                     </a:p>
                   </a:txBody>
+                  <a:tcPr marL="164592" marR="164592" marT="45720" marB="45720" anchor="ctr">
+                    <a:solidFill>
+                      <a:srgbClr val="FFFFFF"/>
+                    </a:solidFill>
+                  </a:tcPr>
                 </a:tc>
               </a:tr>
-              <a:tr h="0">
+              <a:tr h="457200">
                 <a:tc>
                   <a:txBody>
-                    <a:bodyPr/>
+                    <a:bodyPr wrap="square"/>
                     <a:lstStyle/>
                     <a:p>
-                      <a:pPr lvl="0" indent="0" marL="0">
-                        <a:buNone/>
-                      </a:pPr>
+                      <a:pPr algn="l"/>
                       <a:r>
-                        <a:rPr/>
+                        <a:rPr sz="1400" b="0">
+                          <a:solidFill>
+                            <a:srgbClr val="1C1C1E"/>
+                          </a:solidFill>
+                          <a:latin typeface="Helvetica Neue"/>
+                        </a:rPr>
                         <a:t>Cross-domain integration rate</a:t>
                       </a:r>
                     </a:p>
                   </a:txBody>
+                  <a:tcPr marL="164592" marR="164592" marT="45720" marB="45720" anchor="ctr">
+                    <a:solidFill>
+                      <a:srgbClr val="F2F2F7"/>
+                    </a:solidFill>
+                  </a:tcPr>
                 </a:tc>
                 <a:tc>
                   <a:txBody>
-                    <a:bodyPr/>
+                    <a:bodyPr wrap="square"/>
                     <a:lstStyle/>
                     <a:p>
-                      <a:pPr lvl="0" indent="0" marL="0">
-                        <a:buNone/>
-                      </a:pPr>
+                      <a:pPr algn="ctr"/>
                       <a:r>
-                        <a:rPr/>
-                        <a:t>76% (range 40-100%)</a:t>
+                        <a:rPr sz="1400" b="0">
+                          <a:solidFill>
+                            <a:srgbClr val="1C1C1E"/>
+                          </a:solidFill>
+                          <a:latin typeface="Helvetica Neue"/>
+                        </a:rPr>
+                        <a:t>76%  (range 40–100%)</a:t>
                       </a:r>
                     </a:p>
                   </a:txBody>
+                  <a:tcPr marL="164592" marR="164592" marT="45720" marB="45720" anchor="ctr">
+                    <a:solidFill>
+                      <a:srgbClr val="F2F2F7"/>
+                    </a:solidFill>
+                  </a:tcPr>
                 </a:tc>
                 <a:tc>
                   <a:txBody>
-                    <a:bodyPr/>
+                    <a:bodyPr wrap="square"/>
                     <a:lstStyle/>
                     <a:p>
-                      <a:pPr lvl="0" indent="0" marL="0">
-                        <a:buNone/>
-                      </a:pPr>
+                      <a:pPr algn="ctr"/>
                       <a:r>
-                        <a:rPr b="1"/>
-                        <a:t>100%</a:t>
-                      </a:r>
-                      <a:r>
-                        <a:rPr/>
-                        <a:t> (no variance)</a:t>
+                        <a:rPr sz="1400" b="1">
+                          <a:solidFill>
+                            <a:srgbClr val="1C1C1E"/>
+                          </a:solidFill>
+                          <a:latin typeface="Helvetica Neue"/>
+                        </a:rPr>
+                        <a:t>100%  (no variance)</a:t>
                       </a:r>
                     </a:p>
                   </a:txBody>
+                  <a:tcPr marL="164592" marR="164592" marT="45720" marB="45720" anchor="ctr">
+                    <a:solidFill>
+                      <a:srgbClr val="F2F2F7"/>
+                    </a:solidFill>
+                  </a:tcPr>
                 </a:tc>
               </a:tr>
-              <a:tr h="0">
+              <a:tr h="457200">
                 <a:tc>
                   <a:txBody>
-                    <a:bodyPr/>
+                    <a:bodyPr wrap="square"/>
                     <a:lstStyle/>
                     <a:p>
-                      <a:pPr lvl="0" indent="0" marL="0">
-                        <a:buNone/>
-                      </a:pPr>
+                      <a:pPr algn="l"/>
                       <a:r>
-                        <a:rPr/>
+                        <a:rPr sz="1400" b="0">
+                          <a:solidFill>
+                            <a:srgbClr val="1C1C1E"/>
+                          </a:solidFill>
+                          <a:latin typeface="Helvetica Neue"/>
+                        </a:rPr>
                         <a:t>Total tokens (mean)</a:t>
                       </a:r>
                     </a:p>
                   </a:txBody>
+                  <a:tcPr marL="164592" marR="164592" marT="45720" marB="45720" anchor="ctr">
+                    <a:solidFill>
+                      <a:srgbClr val="FFFFFF"/>
+                    </a:solidFill>
+                  </a:tcPr>
                 </a:tc>
                 <a:tc>
                   <a:txBody>
-                    <a:bodyPr/>
+                    <a:bodyPr wrap="square"/>
                     <a:lstStyle/>
                     <a:p>
-                      <a:pPr lvl="0" indent="0" marL="0">
-                        <a:buNone/>
-                      </a:pPr>
+                      <a:pPr algn="ctr"/>
                       <a:r>
-                        <a:rPr/>
+                        <a:rPr sz="1400" b="0">
+                          <a:solidFill>
+                            <a:srgbClr val="1C1C1E"/>
+                          </a:solidFill>
+                          <a:latin typeface="Helvetica Neue"/>
+                        </a:rPr>
                         <a:t>1352</a:t>
                       </a:r>
                     </a:p>
                   </a:txBody>
+                  <a:tcPr marL="164592" marR="164592" marT="45720" marB="45720" anchor="ctr">
+                    <a:solidFill>
+                      <a:srgbClr val="FFFFFF"/>
+                    </a:solidFill>
+                  </a:tcPr>
                 </a:tc>
                 <a:tc>
                   <a:txBody>
-                    <a:bodyPr/>
+                    <a:bodyPr wrap="square"/>
                     <a:lstStyle/>
                     <a:p>
-                      <a:pPr lvl="0" indent="0" marL="0">
-                        <a:buNone/>
-                      </a:pPr>
+                      <a:pPr algn="ctr"/>
                       <a:r>
-                        <a:rPr/>
-                        <a:t>3603 (</a:t>
-                      </a:r>
-                      <a:r>
-                        <a:rPr b="1"/>
-                        <a:t>2.66×</a:t>
-                      </a:r>
-                      <a:r>
-                        <a:rPr/>
-                        <a:t>)</a:t>
+                        <a:rPr sz="1400" b="0">
+                          <a:solidFill>
+                            <a:srgbClr val="1C1C1E"/>
+                          </a:solidFill>
+                          <a:latin typeface="Helvetica Neue"/>
+                        </a:rPr>
+                        <a:t>3603  (2.66×)</a:t>
                       </a:r>
                     </a:p>
                   </a:txBody>
+                  <a:tcPr marL="164592" marR="164592" marT="45720" marB="45720" anchor="ctr">
+                    <a:solidFill>
+                      <a:srgbClr val="FFFFFF"/>
+                    </a:solidFill>
+                  </a:tcPr>
                 </a:tc>
               </a:tr>
-              <a:tr h="0">
+              <a:tr h="457200">
                 <a:tc>
                   <a:txBody>
-                    <a:bodyPr/>
+                    <a:bodyPr wrap="square"/>
                     <a:lstStyle/>
                     <a:p>
-                      <a:pPr lvl="0" indent="0" marL="0">
-                        <a:buNone/>
-                      </a:pPr>
+                      <a:pPr algn="l"/>
                       <a:r>
-                        <a:rPr/>
+                        <a:rPr sz="1400" b="0">
+                          <a:solidFill>
+                            <a:srgbClr val="1C1C1E"/>
+                          </a:solidFill>
+                          <a:latin typeface="Helvetica Neue"/>
+                        </a:rPr>
                         <a:t>Wall-clock latency (mean)</a:t>
                       </a:r>
                     </a:p>
                   </a:txBody>
+                  <a:tcPr marL="164592" marR="164592" marT="45720" marB="45720" anchor="ctr">
+                    <a:solidFill>
+                      <a:srgbClr val="F2F2F7"/>
+                    </a:solidFill>
+                  </a:tcPr>
                 </a:tc>
                 <a:tc>
                   <a:txBody>
-                    <a:bodyPr/>
+                    <a:bodyPr wrap="square"/>
                     <a:lstStyle/>
                     <a:p>
-                      <a:pPr lvl="0" indent="0" marL="0">
-                        <a:buNone/>
-                      </a:pPr>
+                      <a:pPr algn="ctr"/>
                       <a:r>
-                        <a:rPr/>
+                        <a:rPr sz="1400" b="0">
+                          <a:solidFill>
+                            <a:srgbClr val="1C1C1E"/>
+                          </a:solidFill>
+                          <a:latin typeface="Helvetica Neue"/>
+                        </a:rPr>
                         <a:t>9.80s</a:t>
                       </a:r>
                     </a:p>
                   </a:txBody>
+                  <a:tcPr marL="164592" marR="164592" marT="45720" marB="45720" anchor="ctr">
+                    <a:solidFill>
+                      <a:srgbClr val="F2F2F7"/>
+                    </a:solidFill>
+                  </a:tcPr>
                 </a:tc>
                 <a:tc>
                   <a:txBody>
-                    <a:bodyPr/>
+                    <a:bodyPr wrap="square"/>
                     <a:lstStyle/>
                     <a:p>
-                      <a:pPr lvl="0" indent="0" marL="0">
-                        <a:buNone/>
-                      </a:pPr>
+                      <a:pPr algn="ctr"/>
                       <a:r>
-                        <a:rPr/>
-                        <a:t>13.90s (</a:t>
-                      </a:r>
-                      <a:r>
-                        <a:rPr b="1"/>
-                        <a:t>1.42×</a:t>
-                      </a:r>
-                      <a:r>
-                        <a:rPr/>
-                        <a:t>)</a:t>
+                        <a:rPr sz="1400" b="0">
+                          <a:solidFill>
+                            <a:srgbClr val="1C1C1E"/>
+                          </a:solidFill>
+                          <a:latin typeface="Helvetica Neue"/>
+                        </a:rPr>
+                        <a:t>13.90s  (1.42×)</a:t>
                       </a:r>
                     </a:p>
                   </a:txBody>
+                  <a:tcPr marL="164592" marR="164592" marT="45720" marB="45720" anchor="ctr">
+                    <a:solidFill>
+                      <a:srgbClr val="F2F2F7"/>
+                    </a:solidFill>
+                  </a:tcPr>
                 </a:tc>
               </a:tr>
-              <a:tr h="0">
+              <a:tr h="457200">
                 <a:tc>
                   <a:txBody>
-                    <a:bodyPr/>
+                    <a:bodyPr wrap="square"/>
                     <a:lstStyle/>
                     <a:p>
-                      <a:pPr lvl="0" indent="0" marL="0">
-                        <a:buNone/>
-                      </a:pPr>
+                      <a:pPr algn="l"/>
                       <a:r>
-                        <a:rPr/>
+                        <a:rPr sz="1400" b="0">
+                          <a:solidFill>
+                            <a:srgbClr val="1C1C1E"/>
+                          </a:solidFill>
+                          <a:latin typeface="Helvetica Neue"/>
+                        </a:rPr>
                         <a:t>LLM calls / generation</a:t>
                       </a:r>
                     </a:p>
                   </a:txBody>
+                  <a:tcPr marL="164592" marR="164592" marT="45720" marB="45720" anchor="ctr">
+                    <a:solidFill>
+                      <a:srgbClr val="FFFFFF"/>
+                    </a:solidFill>
+                  </a:tcPr>
                 </a:tc>
                 <a:tc>
                   <a:txBody>
-                    <a:bodyPr/>
+                    <a:bodyPr wrap="square"/>
                     <a:lstStyle/>
                     <a:p>
-                      <a:pPr lvl="0" indent="0" marL="0">
-                        <a:buNone/>
-                      </a:pPr>
+                      <a:pPr algn="ctr"/>
                       <a:r>
-                        <a:rPr/>
+                        <a:rPr sz="1400" b="0">
+                          <a:solidFill>
+                            <a:srgbClr val="1C1C1E"/>
+                          </a:solidFill>
+                          <a:latin typeface="Helvetica Neue"/>
+                        </a:rPr>
                         <a:t>1</a:t>
                       </a:r>
                     </a:p>
                   </a:txBody>
+                  <a:tcPr marL="164592" marR="164592" marT="45720" marB="45720" anchor="ctr">
+                    <a:solidFill>
+                      <a:srgbClr val="FFFFFF"/>
+                    </a:solidFill>
+                  </a:tcPr>
                 </a:tc>
                 <a:tc>
                   <a:txBody>
-                    <a:bodyPr/>
+                    <a:bodyPr wrap="square"/>
                     <a:lstStyle/>
                     <a:p>
-                      <a:pPr lvl="0" indent="0" marL="0">
-                        <a:buNone/>
-                      </a:pPr>
+                      <a:pPr algn="ctr"/>
                       <a:r>
-                        <a:rPr/>
+                        <a:rPr sz="1400" b="0">
+                          <a:solidFill>
+                            <a:srgbClr val="1C1C1E"/>
+                          </a:solidFill>
+                          <a:latin typeface="Helvetica Neue"/>
+                        </a:rPr>
                         <a:t>4</a:t>
                       </a:r>
                     </a:p>
                   </a:txBody>
+                  <a:tcPr marL="164592" marR="164592" marT="45720" marB="45720" anchor="ctr">
+                    <a:solidFill>
+                      <a:srgbClr val="FFFFFF"/>
+                    </a:solidFill>
+                  </a:tcPr>
                 </a:tc>
               </a:tr>
             </a:tbl>
           </a:graphicData>
         </a:graphic>
       </p:graphicFrame>
+      <p:sp>
+        <p:nvSpPr>
+          <p:cNvPr id="4" name="TextBox 3"/>
+          <p:cNvSpPr txBox="1"/>
+          <p:nvPr/>
+        </p:nvSpPr>
+        <p:spPr>
+          <a:xfrm>
+            <a:off x="548640" y="4983480"/>
+            <a:ext cx="11064240" cy="1463040"/>
+          </a:xfrm>
+          <a:prstGeom prst="rect">
+            <a:avLst/>
+          </a:prstGeom>
+          <a:noFill/>
+        </p:spPr>
+        <p:txBody>
+          <a:bodyPr wrap="square" anchor="t">
+            <a:spAutoFit/>
+          </a:bodyPr>
+          <a:lstStyle/>
+          <a:p>
+            <a:pPr algn="l">
+              <a:spcBef>
+                <a:spcPts val="0"/>
+              </a:spcBef>
+              <a:spcAft>
+                <a:spcPts val="600"/>
+              </a:spcAft>
+            </a:pPr>
+            <a:r>
+              <a:rPr sz="1500" b="1">
+                <a:solidFill>
+                  <a:srgbClr val="6B6B70"/>
+                </a:solidFill>
+                <a:latin typeface="Helvetica Neue"/>
+              </a:rPr>
+              <a:t>Headline finding</a:t>
+            </a:r>
+          </a:p>
+          <a:p>
+            <a:pPr algn="l">
+              <a:spcBef>
+                <a:spcPts val="600"/>
+              </a:spcBef>
+              <a:spcAft>
+                <a:spcPts val="600"/>
+              </a:spcAft>
+            </a:pPr>
+            <a:r>
+              <a:rPr sz="1500" b="0">
+                <a:solidFill>
+                  <a:srgbClr val="1C1C1E"/>
+                </a:solidFill>
+                <a:latin typeface="Helvetica Neue"/>
+              </a:rPr>
+              <a:t>Both architectures hit 100% grounding (no hallucinated values). </a:t>
+            </a:r>
+            <a:r>
+              <a:rPr sz="1500" b="1">
+                <a:solidFill>
+                  <a:srgbClr val="0A1F44"/>
+                </a:solidFill>
+                <a:latin typeface="Helvetica Neue"/>
+              </a:rPr>
+              <a:t>Multi-agent's win is consistency on cross-domain integration</a:t>
+            </a:r>
+            <a:r>
+              <a:rPr sz="1500" b="0">
+                <a:solidFill>
+                  <a:srgbClr val="1C1C1E"/>
+                </a:solidFill>
+                <a:latin typeface="Helvetica Neue"/>
+              </a:rPr>
+              <a:t> — it never dropped below 100%, while single-shot had one run at 40%. Cost: 2.66× tokens, 1.42× latency.</a:t>
+            </a:r>
+          </a:p>
+        </p:txBody>
+      </p:sp>
+      <p:sp>
+        <p:nvSpPr>
+          <p:cNvPr id="5" name="TextBox 4"/>
+          <p:cNvSpPr txBox="1"/>
+          <p:nvPr/>
+        </p:nvSpPr>
+        <p:spPr>
+          <a:xfrm>
+            <a:off x="548640" y="6446520"/>
+            <a:ext cx="11091672" cy="320040"/>
+          </a:xfrm>
+          <a:prstGeom prst="rect">
+            <a:avLst/>
+          </a:prstGeom>
+          <a:noFill/>
+        </p:spPr>
+        <p:txBody>
+          <a:bodyPr wrap="none" lIns="0" tIns="0" bIns="0">
+            <a:spAutoFit/>
+          </a:bodyPr>
+          <a:lstStyle/>
+          <a:p>
+            <a:pPr algn="l"/>
+            <a:r>
+              <a:rPr sz="1100" b="0">
+                <a:solidFill>
+                  <a:srgbClr val="6B6B70"/>
+                </a:solidFill>
+                <a:latin typeface="Helvetica Neue"/>
+              </a:rPr>
+              <a:t>Health Insight Agent  ·  Slide 6 / 8</a:t>
+            </a:r>
+          </a:p>
+        </p:txBody>
+      </p:sp>
     </p:spTree>
   </p:cSld>
+  <p:clrMapOvr>
+    <a:masterClrMapping/>
+  </p:clrMapOvr>
 </p:sld>
 </file>
 
-<file path=ppt/slides/slide8.xml><?xml version="1.0" encoding="utf-8"?>
-<p:sld xmlns:a="http://schemas.openxmlformats.org/drawingml/2006/main" xmlns:r="http://schemas.openxmlformats.org/officeDocument/2006/relationships" xmlns:p="http://schemas.openxmlformats.org/presentationml/2006/main">
+<file path=ppt/slides/slide7.xml><?xml version="1.0" encoding="utf-8"?>
+<p:sld xmlns:a="http://schemas.openxmlformats.org/drawingml/2006/main" xmlns:p="http://schemas.openxmlformats.org/presentationml/2006/main" xmlns:r="http://schemas.openxmlformats.org/officeDocument/2006/relationships">
   <p:cSld>
+    <p:bg>
+      <p:bgPr>
+        <a:solidFill>
+          <a:srgbClr val="FFFFFF"/>
+        </a:solidFill>
+        <a:effectLst/>
+      </p:bgPr>
+    </p:bg>
     <p:spTree>
       <p:nvGrpSpPr>
         <p:cNvPr id="1" name=""/>
         <p:cNvGrpSpPr/>
         <p:nvPr/>
       </p:nvGrpSpPr>
-      <p:grpSpPr>
-        <a:xfrm>
-          <a:off x="0" y="0"/>
-          <a:ext cx="0" cy="0"/>
-          <a:chOff x="0" y="0"/>
-          <a:chExt cx="0" cy="0"/>
-        </a:xfrm>
-      </p:grpSpPr>
-      <p:sp>
-        <p:nvSpPr>
-          <p:cNvPr id="3" name="Content Placeholder 2"/>
-          <p:cNvSpPr>
-            <a:spLocks noGrp="1"/>
-          </p:cNvSpPr>
-          <p:nvPr>
-            <p:ph idx="1"/>
-          </p:nvPr>
-        </p:nvSpPr>
-        <p:spPr/>
-        <p:txBody>
-          <a:bodyPr/>
-          <a:lstStyle/>
-          <a:p>
-            <a:pPr lvl="0" indent="0" marL="0">
+      <p:grpSpPr/>
+      <p:sp>
+        <p:nvSpPr>
+          <p:cNvPr id="2" name="Rectangle 1"/>
+          <p:cNvSpPr/>
+          <p:nvPr/>
+        </p:nvSpPr>
+        <p:spPr>
+          <a:xfrm>
+            <a:off x="0" y="0"/>
+            <a:ext cx="12191695" cy="822960"/>
+          </a:xfrm>
+          <a:prstGeom prst="rect">
+            <a:avLst/>
+          </a:prstGeom>
+          <a:solidFill>
+            <a:srgbClr val="0A1F44"/>
+          </a:solidFill>
+          <a:ln>
+            <a:noFill/>
+          </a:ln>
+        </p:spPr>
+        <p:style>
+          <a:lnRef idx="1">
+            <a:schemeClr val="accent1"/>
+          </a:lnRef>
+          <a:fillRef idx="3">
+            <a:schemeClr val="accent1"/>
+          </a:fillRef>
+          <a:effectRef idx="2">
+            <a:schemeClr val="accent1"/>
+          </a:effectRef>
+          <a:fontRef idx="minor">
+            <a:schemeClr val="lt1"/>
+          </a:fontRef>
+        </p:style>
+        <p:txBody>
+          <a:bodyPr rtlCol="0" anchor="ctr" lIns="548640" rIns="548640" tIns="164592" bIns="0"/>
+          <a:lstStyle/>
+          <a:p>
+            <a:pPr algn="l"/>
+            <a:r>
+              <a:rPr sz="2600" b="1">
+                <a:solidFill>
+                  <a:srgbClr val="FFFFFF"/>
+                </a:solidFill>
+                <a:latin typeface="Helvetica Neue"/>
+              </a:rPr>
+              <a:t>Future Directions</a:t>
+            </a:r>
+          </a:p>
+        </p:txBody>
+      </p:sp>
+      <p:sp>
+        <p:nvSpPr>
+          <p:cNvPr id="3" name="Oval 2"/>
+          <p:cNvSpPr/>
+          <p:nvPr/>
+        </p:nvSpPr>
+        <p:spPr>
+          <a:xfrm>
+            <a:off x="640080" y="1444752"/>
+            <a:ext cx="457200" cy="457200"/>
+          </a:xfrm>
+          <a:prstGeom prst="ellipse">
+            <a:avLst/>
+          </a:prstGeom>
+          <a:solidFill>
+            <a:srgbClr val="0A1F44"/>
+          </a:solidFill>
+          <a:ln>
+            <a:noFill/>
+          </a:ln>
+        </p:spPr>
+        <p:style>
+          <a:lnRef idx="1">
+            <a:schemeClr val="accent1"/>
+          </a:lnRef>
+          <a:fillRef idx="3">
+            <a:schemeClr val="accent1"/>
+          </a:fillRef>
+          <a:effectRef idx="2">
+            <a:schemeClr val="accent1"/>
+          </a:effectRef>
+          <a:fontRef idx="minor">
+            <a:schemeClr val="lt1"/>
+          </a:fontRef>
+        </p:style>
+        <p:txBody>
+          <a:bodyPr rtlCol="0" anchor="ctr" bIns="0" lIns="0" rIns="0"/>
+          <a:lstStyle/>
+          <a:p>
+            <a:pPr algn="ctr"/>
+            <a:r>
+              <a:rPr sz="1800" b="1">
+                <a:solidFill>
+                  <a:srgbClr val="FFFFFF"/>
+                </a:solidFill>
+                <a:latin typeface="Helvetica Neue"/>
+              </a:rPr>
+              <a:t>1</a:t>
+            </a:r>
+          </a:p>
+        </p:txBody>
+      </p:sp>
+      <p:sp>
+        <p:nvSpPr>
+          <p:cNvPr id="4" name="TextBox 3"/>
+          <p:cNvSpPr txBox="1"/>
+          <p:nvPr/>
+        </p:nvSpPr>
+        <p:spPr>
+          <a:xfrm>
+            <a:off x="1280160" y="1280160"/>
+            <a:ext cx="10424160" cy="914400"/>
+          </a:xfrm>
+          <a:prstGeom prst="rect">
+            <a:avLst/>
+          </a:prstGeom>
+          <a:noFill/>
+        </p:spPr>
+        <p:txBody>
+          <a:bodyPr wrap="square" anchor="t">
+            <a:spAutoFit/>
+          </a:bodyPr>
+          <a:lstStyle/>
+          <a:p>
+            <a:pPr algn="l">
               <a:spcBef>
-                <a:spcPts val="3000"/>
+                <a:spcPts val="0"/>
               </a:spcBef>
-              <a:buNone/>
+              <a:spcAft>
+                <a:spcPts val="600"/>
+              </a:spcAft>
             </a:pPr>
             <a:r>
-              <a:rPr b="1"/>
-              <a:t>Headline finding</a:t>
-            </a:r>
-          </a:p>
-          <a:p>
-            <a:pPr lvl="0" indent="0" marL="0">
-              <a:buNone/>
+              <a:rPr sz="1800" b="1">
+                <a:solidFill>
+                  <a:srgbClr val="0A1F44"/>
+                </a:solidFill>
+                <a:latin typeface="Helvetica Neue"/>
+              </a:rPr>
+              <a:t>Scale up</a:t>
+            </a:r>
+          </a:p>
+          <a:p>
+            <a:pPr algn="l">
+              <a:spcBef>
+                <a:spcPts val="200"/>
+              </a:spcBef>
+              <a:spcAft>
+                <a:spcPts val="600"/>
+              </a:spcAft>
             </a:pPr>
             <a:r>
-              <a:rPr/>
-              <a:t>Both architectures hit 100% grounding (no hallucinated values). Multi-agent’s win is </a:t>
-            </a:r>
-            <a:r>
-              <a:rPr b="1"/>
-              <a:t>consistency on cross-domain integration</a:t>
-            </a:r>
-            <a:r>
-              <a:rPr/>
-              <a:t> — it never dropped below 100%, while single-shot had one run at 40%. Cost: 2.66× tokens, 1.42× latency.</a:t>
+              <a:rPr sz="1400" b="0">
+                <a:solidFill>
+                  <a:srgbClr val="1C1C1E"/>
+                </a:solidFill>
+                <a:latin typeface="Helvetica Neue"/>
+              </a:rPr>
+              <a:t>Evaluate on public datasets (LifeSnaps, MyHeart Counts) across many users.</a:t>
+            </a:r>
+          </a:p>
+        </p:txBody>
+      </p:sp>
+      <p:sp>
+        <p:nvSpPr>
+          <p:cNvPr id="5" name="Oval 4"/>
+          <p:cNvSpPr/>
+          <p:nvPr/>
+        </p:nvSpPr>
+        <p:spPr>
+          <a:xfrm>
+            <a:off x="640080" y="2359152"/>
+            <a:ext cx="457200" cy="457200"/>
+          </a:xfrm>
+          <a:prstGeom prst="ellipse">
+            <a:avLst/>
+          </a:prstGeom>
+          <a:solidFill>
+            <a:srgbClr val="0A1F44"/>
+          </a:solidFill>
+          <a:ln>
+            <a:noFill/>
+          </a:ln>
+        </p:spPr>
+        <p:style>
+          <a:lnRef idx="1">
+            <a:schemeClr val="accent1"/>
+          </a:lnRef>
+          <a:fillRef idx="3">
+            <a:schemeClr val="accent1"/>
+          </a:fillRef>
+          <a:effectRef idx="2">
+            <a:schemeClr val="accent1"/>
+          </a:effectRef>
+          <a:fontRef idx="minor">
+            <a:schemeClr val="lt1"/>
+          </a:fontRef>
+        </p:style>
+        <p:txBody>
+          <a:bodyPr rtlCol="0" anchor="ctr" bIns="0" lIns="0" rIns="0"/>
+          <a:lstStyle/>
+          <a:p>
+            <a:pPr algn="ctr"/>
+            <a:r>
+              <a:rPr sz="1800" b="1">
+                <a:solidFill>
+                  <a:srgbClr val="FFFFFF"/>
+                </a:solidFill>
+                <a:latin typeface="Helvetica Neue"/>
+              </a:rPr>
+              <a:t>2</a:t>
+            </a:r>
+          </a:p>
+        </p:txBody>
+      </p:sp>
+      <p:sp>
+        <p:nvSpPr>
+          <p:cNvPr id="6" name="TextBox 5"/>
+          <p:cNvSpPr txBox="1"/>
+          <p:nvPr/>
+        </p:nvSpPr>
+        <p:spPr>
+          <a:xfrm>
+            <a:off x="1280160" y="2194560"/>
+            <a:ext cx="10424160" cy="914400"/>
+          </a:xfrm>
+          <a:prstGeom prst="rect">
+            <a:avLst/>
+          </a:prstGeom>
+          <a:noFill/>
+        </p:spPr>
+        <p:txBody>
+          <a:bodyPr wrap="square" anchor="t">
+            <a:spAutoFit/>
+          </a:bodyPr>
+          <a:lstStyle/>
+          <a:p>
+            <a:pPr algn="l">
+              <a:spcBef>
+                <a:spcPts val="0"/>
+              </a:spcBef>
+              <a:spcAft>
+                <a:spcPts val="600"/>
+              </a:spcAft>
+            </a:pPr>
+            <a:r>
+              <a:rPr sz="1800" b="1">
+                <a:solidFill>
+                  <a:srgbClr val="0A1F44"/>
+                </a:solidFill>
+                <a:latin typeface="Helvetica Neue"/>
+              </a:rPr>
+              <a:t>Clinical validation</a:t>
+            </a:r>
+          </a:p>
+          <a:p>
+            <a:pPr algn="l">
+              <a:spcBef>
+                <a:spcPts val="200"/>
+              </a:spcBef>
+              <a:spcAft>
+                <a:spcPts val="600"/>
+              </a:spcAft>
+            </a:pPr>
+            <a:r>
+              <a:rPr sz="1400" b="0">
+                <a:solidFill>
+                  <a:srgbClr val="1C1C1E"/>
+                </a:solidFill>
+                <a:latin typeface="Helvetica Neue"/>
+              </a:rPr>
+              <a:t>Pair LLM outputs with clinician annotation for correctness, not just grounding.</a:t>
+            </a:r>
+          </a:p>
+        </p:txBody>
+      </p:sp>
+      <p:sp>
+        <p:nvSpPr>
+          <p:cNvPr id="7" name="Oval 6"/>
+          <p:cNvSpPr/>
+          <p:nvPr/>
+        </p:nvSpPr>
+        <p:spPr>
+          <a:xfrm>
+            <a:off x="640080" y="3273552"/>
+            <a:ext cx="457200" cy="457200"/>
+          </a:xfrm>
+          <a:prstGeom prst="ellipse">
+            <a:avLst/>
+          </a:prstGeom>
+          <a:solidFill>
+            <a:srgbClr val="0A1F44"/>
+          </a:solidFill>
+          <a:ln>
+            <a:noFill/>
+          </a:ln>
+        </p:spPr>
+        <p:style>
+          <a:lnRef idx="1">
+            <a:schemeClr val="accent1"/>
+          </a:lnRef>
+          <a:fillRef idx="3">
+            <a:schemeClr val="accent1"/>
+          </a:fillRef>
+          <a:effectRef idx="2">
+            <a:schemeClr val="accent1"/>
+          </a:effectRef>
+          <a:fontRef idx="minor">
+            <a:schemeClr val="lt1"/>
+          </a:fontRef>
+        </p:style>
+        <p:txBody>
+          <a:bodyPr rtlCol="0" anchor="ctr" bIns="0" lIns="0" rIns="0"/>
+          <a:lstStyle/>
+          <a:p>
+            <a:pPr algn="ctr"/>
+            <a:r>
+              <a:rPr sz="1800" b="1">
+                <a:solidFill>
+                  <a:srgbClr val="FFFFFF"/>
+                </a:solidFill>
+                <a:latin typeface="Helvetica Neue"/>
+              </a:rPr>
+              <a:t>3</a:t>
+            </a:r>
+          </a:p>
+        </p:txBody>
+      </p:sp>
+      <p:sp>
+        <p:nvSpPr>
+          <p:cNvPr id="8" name="TextBox 7"/>
+          <p:cNvSpPr txBox="1"/>
+          <p:nvPr/>
+        </p:nvSpPr>
+        <p:spPr>
+          <a:xfrm>
+            <a:off x="1280160" y="3108960"/>
+            <a:ext cx="10424160" cy="914400"/>
+          </a:xfrm>
+          <a:prstGeom prst="rect">
+            <a:avLst/>
+          </a:prstGeom>
+          <a:noFill/>
+        </p:spPr>
+        <p:txBody>
+          <a:bodyPr wrap="square" anchor="t">
+            <a:spAutoFit/>
+          </a:bodyPr>
+          <a:lstStyle/>
+          <a:p>
+            <a:pPr algn="l">
+              <a:spcBef>
+                <a:spcPts val="0"/>
+              </a:spcBef>
+              <a:spcAft>
+                <a:spcPts val="600"/>
+              </a:spcAft>
+            </a:pPr>
+            <a:r>
+              <a:rPr sz="1800" b="1">
+                <a:solidFill>
+                  <a:srgbClr val="0A1F44"/>
+                </a:solidFill>
+                <a:latin typeface="Helvetica Neue"/>
+              </a:rPr>
+              <a:t>Adaptive routing</a:t>
+            </a:r>
+          </a:p>
+          <a:p>
+            <a:pPr algn="l">
+              <a:spcBef>
+                <a:spcPts val="200"/>
+              </a:spcBef>
+              <a:spcAft>
+                <a:spcPts val="600"/>
+              </a:spcAft>
+            </a:pPr>
+            <a:r>
+              <a:rPr sz="1400" b="0">
+                <a:solidFill>
+                  <a:srgbClr val="1C1C1E"/>
+                </a:solidFill>
+                <a:latin typeface="Helvetica Neue"/>
+              </a:rPr>
+              <a:t>Dynamically choose which specialists to invoke based on user query.</a:t>
+            </a:r>
+          </a:p>
+        </p:txBody>
+      </p:sp>
+      <p:sp>
+        <p:nvSpPr>
+          <p:cNvPr id="9" name="Oval 8"/>
+          <p:cNvSpPr/>
+          <p:nvPr/>
+        </p:nvSpPr>
+        <p:spPr>
+          <a:xfrm>
+            <a:off x="640080" y="4187952"/>
+            <a:ext cx="457200" cy="457200"/>
+          </a:xfrm>
+          <a:prstGeom prst="ellipse">
+            <a:avLst/>
+          </a:prstGeom>
+          <a:solidFill>
+            <a:srgbClr val="0A1F44"/>
+          </a:solidFill>
+          <a:ln>
+            <a:noFill/>
+          </a:ln>
+        </p:spPr>
+        <p:style>
+          <a:lnRef idx="1">
+            <a:schemeClr val="accent1"/>
+          </a:lnRef>
+          <a:fillRef idx="3">
+            <a:schemeClr val="accent1"/>
+          </a:fillRef>
+          <a:effectRef idx="2">
+            <a:schemeClr val="accent1"/>
+          </a:effectRef>
+          <a:fontRef idx="minor">
+            <a:schemeClr val="lt1"/>
+          </a:fontRef>
+        </p:style>
+        <p:txBody>
+          <a:bodyPr rtlCol="0" anchor="ctr" bIns="0" lIns="0" rIns="0"/>
+          <a:lstStyle/>
+          <a:p>
+            <a:pPr algn="ctr"/>
+            <a:r>
+              <a:rPr sz="1800" b="1">
+                <a:solidFill>
+                  <a:srgbClr val="FFFFFF"/>
+                </a:solidFill>
+                <a:latin typeface="Helvetica Neue"/>
+              </a:rPr>
+              <a:t>4</a:t>
+            </a:r>
+          </a:p>
+        </p:txBody>
+      </p:sp>
+      <p:sp>
+        <p:nvSpPr>
+          <p:cNvPr id="10" name="TextBox 9"/>
+          <p:cNvSpPr txBox="1"/>
+          <p:nvPr/>
+        </p:nvSpPr>
+        <p:spPr>
+          <a:xfrm>
+            <a:off x="1280160" y="4023360"/>
+            <a:ext cx="10424160" cy="914400"/>
+          </a:xfrm>
+          <a:prstGeom prst="rect">
+            <a:avLst/>
+          </a:prstGeom>
+          <a:noFill/>
+        </p:spPr>
+        <p:txBody>
+          <a:bodyPr wrap="square" anchor="t">
+            <a:spAutoFit/>
+          </a:bodyPr>
+          <a:lstStyle/>
+          <a:p>
+            <a:pPr algn="l">
+              <a:spcBef>
+                <a:spcPts val="0"/>
+              </a:spcBef>
+              <a:spcAft>
+                <a:spcPts val="600"/>
+              </a:spcAft>
+            </a:pPr>
+            <a:r>
+              <a:rPr sz="1800" b="1">
+                <a:solidFill>
+                  <a:srgbClr val="0A1F44"/>
+                </a:solidFill>
+                <a:latin typeface="Helvetica Neue"/>
+              </a:rPr>
+              <a:t>On-device inference</a:t>
+            </a:r>
+          </a:p>
+          <a:p>
+            <a:pPr algn="l">
+              <a:spcBef>
+                <a:spcPts val="200"/>
+              </a:spcBef>
+              <a:spcAft>
+                <a:spcPts val="600"/>
+              </a:spcAft>
+            </a:pPr>
+            <a:r>
+              <a:rPr sz="1400" b="0">
+                <a:solidFill>
+                  <a:srgbClr val="1C1C1E"/>
+                </a:solidFill>
+                <a:latin typeface="Helvetica Neue"/>
+              </a:rPr>
+              <a:t>Swap GPT-4o-mini for Apple's Foundation Models framework — privacy-preserving deployment.</a:t>
+            </a:r>
+          </a:p>
+        </p:txBody>
+      </p:sp>
+      <p:sp>
+        <p:nvSpPr>
+          <p:cNvPr id="11" name="Oval 10"/>
+          <p:cNvSpPr/>
+          <p:nvPr/>
+        </p:nvSpPr>
+        <p:spPr>
+          <a:xfrm>
+            <a:off x="640080" y="5102352"/>
+            <a:ext cx="457200" cy="457200"/>
+          </a:xfrm>
+          <a:prstGeom prst="ellipse">
+            <a:avLst/>
+          </a:prstGeom>
+          <a:solidFill>
+            <a:srgbClr val="0A1F44"/>
+          </a:solidFill>
+          <a:ln>
+            <a:noFill/>
+          </a:ln>
+        </p:spPr>
+        <p:style>
+          <a:lnRef idx="1">
+            <a:schemeClr val="accent1"/>
+          </a:lnRef>
+          <a:fillRef idx="3">
+            <a:schemeClr val="accent1"/>
+          </a:fillRef>
+          <a:effectRef idx="2">
+            <a:schemeClr val="accent1"/>
+          </a:effectRef>
+          <a:fontRef idx="minor">
+            <a:schemeClr val="lt1"/>
+          </a:fontRef>
+        </p:style>
+        <p:txBody>
+          <a:bodyPr rtlCol="0" anchor="ctr" bIns="0" lIns="0" rIns="0"/>
+          <a:lstStyle/>
+          <a:p>
+            <a:pPr algn="ctr"/>
+            <a:r>
+              <a:rPr sz="1800" b="1">
+                <a:solidFill>
+                  <a:srgbClr val="FFFFFF"/>
+                </a:solidFill>
+                <a:latin typeface="Helvetica Neue"/>
+              </a:rPr>
+              <a:t>5</a:t>
+            </a:r>
+          </a:p>
+        </p:txBody>
+      </p:sp>
+      <p:sp>
+        <p:nvSpPr>
+          <p:cNvPr id="12" name="TextBox 11"/>
+          <p:cNvSpPr txBox="1"/>
+          <p:nvPr/>
+        </p:nvSpPr>
+        <p:spPr>
+          <a:xfrm>
+            <a:off x="1280160" y="4937760"/>
+            <a:ext cx="10424160" cy="914400"/>
+          </a:xfrm>
+          <a:prstGeom prst="rect">
+            <a:avLst/>
+          </a:prstGeom>
+          <a:noFill/>
+        </p:spPr>
+        <p:txBody>
+          <a:bodyPr wrap="square" anchor="t">
+            <a:spAutoFit/>
+          </a:bodyPr>
+          <a:lstStyle/>
+          <a:p>
+            <a:pPr algn="l">
+              <a:spcBef>
+                <a:spcPts val="0"/>
+              </a:spcBef>
+              <a:spcAft>
+                <a:spcPts val="600"/>
+              </a:spcAft>
+            </a:pPr>
+            <a:r>
+              <a:rPr sz="1800" b="1">
+                <a:solidFill>
+                  <a:srgbClr val="0A1F44"/>
+                </a:solidFill>
+                <a:latin typeface="Helvetica Neue"/>
+              </a:rPr>
+              <a:t>Persistent memory</a:t>
+            </a:r>
+          </a:p>
+          <a:p>
+            <a:pPr algn="l">
+              <a:spcBef>
+                <a:spcPts val="200"/>
+              </a:spcBef>
+              <a:spcAft>
+                <a:spcPts val="600"/>
+              </a:spcAft>
+            </a:pPr>
+            <a:r>
+              <a:rPr sz="1400" b="0">
+                <a:solidFill>
+                  <a:srgbClr val="1C1C1E"/>
+                </a:solidFill>
+                <a:latin typeface="Helvetica Neue"/>
+              </a:rPr>
+              <a:t>Cross-session insight tracking ("did you act on last week's recommendation?").</a:t>
+            </a:r>
+          </a:p>
+        </p:txBody>
+      </p:sp>
+      <p:sp>
+        <p:nvSpPr>
+          <p:cNvPr id="13" name="TextBox 12"/>
+          <p:cNvSpPr txBox="1"/>
+          <p:nvPr/>
+        </p:nvSpPr>
+        <p:spPr>
+          <a:xfrm>
+            <a:off x="548640" y="6446520"/>
+            <a:ext cx="11091672" cy="320040"/>
+          </a:xfrm>
+          <a:prstGeom prst="rect">
+            <a:avLst/>
+          </a:prstGeom>
+          <a:noFill/>
+        </p:spPr>
+        <p:txBody>
+          <a:bodyPr wrap="none" lIns="0" tIns="0" bIns="0">
+            <a:spAutoFit/>
+          </a:bodyPr>
+          <a:lstStyle/>
+          <a:p>
+            <a:pPr algn="l"/>
+            <a:r>
+              <a:rPr sz="1100" b="0">
+                <a:solidFill>
+                  <a:srgbClr val="6B6B70"/>
+                </a:solidFill>
+                <a:latin typeface="Helvetica Neue"/>
+              </a:rPr>
+              <a:t>Health Insight Agent  ·  Slide 7 / 8</a:t>
             </a:r>
           </a:p>
         </p:txBody>
       </p:sp>
     </p:spTree>
   </p:cSld>
+  <p:clrMapOvr>
+    <a:masterClrMapping/>
+  </p:clrMapOvr>
 </p:sld>
 </file>
 
-<file path=ppt/slides/slide9.xml><?xml version="1.0" encoding="utf-8"?>
-<p:sld xmlns:a="http://schemas.openxmlformats.org/drawingml/2006/main" xmlns:r="http://schemas.openxmlformats.org/officeDocument/2006/relationships" xmlns:p="http://schemas.openxmlformats.org/presentationml/2006/main">
+<file path=ppt/slides/slide8.xml><?xml version="1.0" encoding="utf-8"?>
+<p:sld xmlns:a="http://schemas.openxmlformats.org/drawingml/2006/main" xmlns:p="http://schemas.openxmlformats.org/presentationml/2006/main" xmlns:r="http://schemas.openxmlformats.org/officeDocument/2006/relationships">
   <p:cSld>
+    <p:bg>
+      <p:bgPr>
+        <a:solidFill>
+          <a:srgbClr val="FFFFFF"/>
+        </a:solidFill>
+        <a:effectLst/>
+      </p:bgPr>
+    </p:bg>
     <p:spTree>
       <p:nvGrpSpPr>
         <p:cNvPr id="1" name=""/>
         <p:cNvGrpSpPr/>
         <p:nvPr/>
       </p:nvGrpSpPr>
-      <p:grpSpPr>
-        <a:xfrm>
-          <a:off x="0" y="0"/>
-          <a:ext cx="0" cy="0"/>
-          <a:chOff x="0" y="0"/>
-          <a:chExt cx="0" cy="0"/>
-        </a:xfrm>
-      </p:grpSpPr>
-      <p:sp>
-        <p:nvSpPr>
-          <p:cNvPr id="3" name="Content Placeholder 2"/>
-          <p:cNvSpPr>
-            <a:spLocks noGrp="1"/>
-          </p:cNvSpPr>
-          <p:nvPr>
-            <p:ph idx="1"/>
-          </p:nvPr>
-        </p:nvSpPr>
-        <p:spPr/>
-        <p:txBody>
-          <a:bodyPr/>
-          <a:lstStyle/>
-          <a:p>
-            <a:pPr lvl="0" indent="0" marL="0">
+      <p:grpSpPr/>
+      <p:sp>
+        <p:nvSpPr>
+          <p:cNvPr id="2" name="Rectangle 1"/>
+          <p:cNvSpPr/>
+          <p:nvPr/>
+        </p:nvSpPr>
+        <p:spPr>
+          <a:xfrm>
+            <a:off x="0" y="0"/>
+            <a:ext cx="411480" cy="6858000"/>
+          </a:xfrm>
+          <a:prstGeom prst="rect">
+            <a:avLst/>
+          </a:prstGeom>
+          <a:solidFill>
+            <a:srgbClr val="0A1F44"/>
+          </a:solidFill>
+          <a:ln>
+            <a:noFill/>
+          </a:ln>
+        </p:spPr>
+        <p:style>
+          <a:lnRef idx="1">
+            <a:schemeClr val="accent1"/>
+          </a:lnRef>
+          <a:fillRef idx="3">
+            <a:schemeClr val="accent1"/>
+          </a:fillRef>
+          <a:effectRef idx="2">
+            <a:schemeClr val="accent1"/>
+          </a:effectRef>
+          <a:fontRef idx="minor">
+            <a:schemeClr val="lt1"/>
+          </a:fontRef>
+        </p:style>
+        <p:txBody>
+          <a:bodyPr rtlCol="0" anchor="ctr"/>
+          <a:lstStyle/>
+          <a:p>
+            <a:pPr algn="ctr"/>
+          </a:p>
+        </p:txBody>
+      </p:sp>
+      <p:sp>
+        <p:nvSpPr>
+          <p:cNvPr id="3" name="TextBox 2"/>
+          <p:cNvSpPr txBox="1"/>
+          <p:nvPr/>
+        </p:nvSpPr>
+        <p:spPr>
+          <a:xfrm>
+            <a:off x="914400" y="2194560"/>
+            <a:ext cx="10515600" cy="1828800"/>
+          </a:xfrm>
+          <a:prstGeom prst="rect">
+            <a:avLst/>
+          </a:prstGeom>
+          <a:noFill/>
+        </p:spPr>
+        <p:txBody>
+          <a:bodyPr wrap="square" anchor="t">
+            <a:spAutoFit/>
+          </a:bodyPr>
+          <a:lstStyle/>
+          <a:p>
+            <a:pPr algn="l">
               <a:spcBef>
-                <a:spcPts val="3000"/>
+                <a:spcPts val="0"/>
               </a:spcBef>
-              <a:buNone/>
+              <a:spcAft>
+                <a:spcPts val="600"/>
+              </a:spcAft>
             </a:pPr>
             <a:r>
-              <a:rPr b="1"/>
-              <a:t>Slide 7: Future Directions</a:t>
-            </a:r>
-          </a:p>
-          <a:p>
-            <a:pPr lvl="0"/>
-            <a:r>
-              <a:rPr b="1"/>
-              <a:t>Scale up:</a:t>
-            </a:r>
-            <a:r>
-              <a:rPr/>
-              <a:t> evaluate on public datasets (LifeSnaps, MyHeart Counts) across many users</a:t>
-            </a:r>
-          </a:p>
-          <a:p>
-            <a:pPr lvl="0"/>
-            <a:r>
-              <a:rPr b="1"/>
-              <a:t>Clinical validation:</a:t>
-            </a:r>
-            <a:r>
-              <a:rPr/>
-              <a:t> pair LLM outputs with clinician annotation for correctness, not just grounding</a:t>
-            </a:r>
-          </a:p>
-          <a:p>
-            <a:pPr lvl="0"/>
-            <a:r>
-              <a:rPr b="1"/>
-              <a:t>Adaptive routing:</a:t>
-            </a:r>
-            <a:r>
-              <a:rPr/>
-              <a:t> dynamically choose which specialists to invoke based on user query</a:t>
-            </a:r>
-          </a:p>
-          <a:p>
-            <a:pPr lvl="0"/>
-            <a:r>
-              <a:rPr b="1"/>
-              <a:t>On-device inference:</a:t>
-            </a:r>
-            <a:r>
-              <a:rPr/>
-              <a:t> swap GPT-4o-mini for Apple’s Foundation Models framework — privacy-preserving deployment</a:t>
-            </a:r>
-          </a:p>
-          <a:p>
-            <a:pPr lvl="0"/>
-            <a:r>
-              <a:rPr b="1"/>
-              <a:t>Persistent memory:</a:t>
-            </a:r>
-            <a:r>
-              <a:rPr/>
-              <a:t> cross-session insight tracking (“did you act on last week’s recommendation?”)</a:t>
+              <a:rPr sz="6000" b="1">
+                <a:solidFill>
+                  <a:srgbClr val="0A1F44"/>
+                </a:solidFill>
+                <a:latin typeface="Helvetica Neue"/>
+              </a:rPr>
+              <a:t>Thank You</a:t>
+            </a:r>
+          </a:p>
+        </p:txBody>
+      </p:sp>
+      <p:sp>
+        <p:nvSpPr>
+          <p:cNvPr id="4" name="TextBox 3"/>
+          <p:cNvSpPr txBox="1"/>
+          <p:nvPr/>
+        </p:nvSpPr>
+        <p:spPr>
+          <a:xfrm>
+            <a:off x="914400" y="4023360"/>
+            <a:ext cx="10515600" cy="1828800"/>
+          </a:xfrm>
+          <a:prstGeom prst="rect">
+            <a:avLst/>
+          </a:prstGeom>
+          <a:noFill/>
+        </p:spPr>
+        <p:txBody>
+          <a:bodyPr wrap="square" anchor="t">
+            <a:spAutoFit/>
+          </a:bodyPr>
+          <a:lstStyle/>
+          <a:p>
+            <a:pPr algn="l">
+              <a:spcBef>
+                <a:spcPts val="0"/>
+              </a:spcBef>
+              <a:spcAft>
+                <a:spcPts val="600"/>
+              </a:spcAft>
+            </a:pPr>
+            <a:r>
+              <a:rPr sz="2000" b="1">
+                <a:solidFill>
+                  <a:srgbClr val="1C1C1E"/>
+                </a:solidFill>
+                <a:latin typeface="Helvetica Neue"/>
+              </a:rPr>
+              <a:t>Jerome Zhang</a:t>
+            </a:r>
+            <a:r>
+              <a:rPr sz="1800" b="0">
+                <a:solidFill>
+                  <a:srgbClr val="6B6B70"/>
+                </a:solidFill>
+                <a:latin typeface="Helvetica Neue"/>
+              </a:rPr>
+              <a:t>   ·   MSAI High-Risk Project   ·   Spring 2026</a:t>
+            </a:r>
+          </a:p>
+          <a:p>
+            <a:pPr algn="l">
+              <a:spcBef>
+                <a:spcPts val="1800"/>
+              </a:spcBef>
+              <a:spcAft>
+                <a:spcPts val="600"/>
+              </a:spcAft>
+            </a:pPr>
+            <a:r>
+              <a:rPr sz="1600" b="0">
+                <a:solidFill>
+                  <a:srgbClr val="1C1C1E"/>
+                </a:solidFill>
+                <a:latin typeface="Helvetica Neue"/>
+              </a:rPr>
+              <a:t>Code &amp; report:  </a:t>
+            </a:r>
+            <a:r>
+              <a:rPr sz="1600" b="0">
+                <a:solidFill>
+                  <a:srgbClr val="006EE6"/>
+                </a:solidFill>
+                <a:latin typeface="Menlo"/>
+              </a:rPr>
+              <a:t>https://github.com/jeromez0/health-insight-agent</a:t>
+            </a:r>
+          </a:p>
+          <a:p>
+            <a:pPr algn="l">
+              <a:spcBef>
+                <a:spcPts val="1800"/>
+              </a:spcBef>
+              <a:spcAft>
+                <a:spcPts val="600"/>
+              </a:spcAft>
+            </a:pPr>
+            <a:r>
+              <a:rPr sz="1800" b="0">
+                <a:solidFill>
+                  <a:srgbClr val="6B6B70"/>
+                </a:solidFill>
+                <a:latin typeface="Helvetica Neue"/>
+              </a:rPr>
+              <a:t>Questions?</a:t>
             </a:r>
           </a:p>
         </p:txBody>
       </p:sp>
     </p:spTree>
   </p:cSld>
+  <p:clrMapOvr>
+    <a:masterClrMapping/>
+  </p:clrMapOvr>
 </p:sld>
 </file>
 
@@ -4641,265 +6887,4 @@
   </a:objectDefaults>
   <a:extraClrSchemeLst/>
 </a:theme>
-</file>
-
-<file path=ppt/theme/theme2.xml><?xml version="1.0" encoding="utf-8"?>
-<a:theme xmlns:a="http://schemas.openxmlformats.org/drawingml/2006/main" name="Office Theme">
-  <a:themeElements>
-    <a:clrScheme name="Office">
-      <a:dk1>
-        <a:sysClr val="windowText" lastClr="000000"/>
-      </a:dk1>
-      <a:lt1>
-        <a:sysClr val="window" lastClr="FFFFFF"/>
-      </a:lt1>
-      <a:dk2>
-        <a:srgbClr val="44546A"/>
-      </a:dk2>
-      <a:lt2>
-        <a:srgbClr val="E7E6E6"/>
-      </a:lt2>
-      <a:accent1>
-        <a:srgbClr val="5B9BD5"/>
-      </a:accent1>
-      <a:accent2>
-        <a:srgbClr val="ED7D31"/>
-      </a:accent2>
-      <a:accent3>
-        <a:srgbClr val="A5A5A5"/>
-      </a:accent3>
-      <a:accent4>
-        <a:srgbClr val="FFC000"/>
-      </a:accent4>
-      <a:accent5>
-        <a:srgbClr val="4472C4"/>
-      </a:accent5>
-      <a:accent6>
-        <a:srgbClr val="70AD47"/>
-      </a:accent6>
-      <a:hlink>
-        <a:srgbClr val="0563C1"/>
-      </a:hlink>
-      <a:folHlink>
-        <a:srgbClr val="954F72"/>
-      </a:folHlink>
-    </a:clrScheme>
-    <a:fontScheme name="Office">
-      <a:majorFont>
-        <a:latin typeface="Calibri Light" panose="020F0302020204030204"/>
-        <a:ea typeface=""/>
-        <a:cs typeface=""/>
-        <a:font script="Jpan" typeface="ＭＳ Ｐゴシック"/>
-        <a:font script="Hang" typeface="맑은 고딕"/>
-        <a:font script="Hans" typeface="宋体"/>
-        <a:font script="Hant" typeface="新細明體"/>
-        <a:font script="Arab" typeface="Times New Roman"/>
-        <a:font script="Hebr" typeface="Times New Roman"/>
-        <a:font script="Thai" typeface="Angsana New"/>
-        <a:font script="Ethi" typeface="Nyala"/>
-        <a:font script="Beng" typeface="Vrinda"/>
-        <a:font script="Gujr" typeface="Shruti"/>
-        <a:font script="Khmr" typeface="MoolBoran"/>
-        <a:font script="Knda" typeface="Tunga"/>
-        <a:font script="Guru" typeface="Raavi"/>
-        <a:font script="Cans" typeface="Euphemia"/>
-        <a:font script="Cher" typeface="Plantagenet Cherokee"/>
-        <a:font script="Yiii" typeface="Microsoft Yi Baiti"/>
-        <a:font script="Tibt" typeface="Microsoft Himalaya"/>
-        <a:font script="Thaa" typeface="MV Boli"/>
-        <a:font script="Deva" typeface="Mangal"/>
-        <a:font script="Telu" typeface="Gautami"/>
-        <a:font script="Taml" typeface="Latha"/>
-        <a:font script="Syrc" typeface="Estrangelo Edessa"/>
-        <a:font script="Orya" typeface="Kalinga"/>
-        <a:font script="Mlym" typeface="Kartika"/>
-        <a:font script="Laoo" typeface="DokChampa"/>
-        <a:font script="Sinh" typeface="Iskoola Pota"/>
-        <a:font script="Mong" typeface="Mongolian Baiti"/>
-        <a:font script="Viet" typeface="Times New Roman"/>
-        <a:font script="Uigh" typeface="Microsoft Uighur"/>
-        <a:font script="Geor" typeface="Sylfaen"/>
-      </a:majorFont>
-      <a:minorFont>
-        <a:latin typeface="Calibri" panose="020F0502020204030204"/>
-        <a:ea typeface=""/>
-        <a:cs typeface=""/>
-        <a:font script="Jpan" typeface="ＭＳ Ｐゴシック"/>
-        <a:font script="Hang" typeface="맑은 고딕"/>
-        <a:font script="Hans" typeface="宋体"/>
-        <a:font script="Hant" typeface="新細明體"/>
-        <a:font script="Arab" typeface="Arial"/>
-        <a:font script="Hebr" typeface="Arial"/>
-        <a:font script="Thai" typeface="Cordia New"/>
-        <a:font script="Ethi" typeface="Nyala"/>
-        <a:font script="Beng" typeface="Vrinda"/>
-        <a:font script="Gujr" typeface="Shruti"/>
-        <a:font script="Khmr" typeface="DaunPenh"/>
-        <a:font script="Knda" typeface="Tunga"/>
-        <a:font script="Guru" typeface="Raavi"/>
-        <a:font script="Cans" typeface="Euphemia"/>
-        <a:font script="Cher" typeface="Plantagenet Cherokee"/>
-        <a:font script="Yiii" typeface="Microsoft Yi Baiti"/>
-        <a:font script="Tibt" typeface="Microsoft Himalaya"/>
-        <a:font script="Thaa" typeface="MV Boli"/>
-        <a:font script="Deva" typeface="Mangal"/>
-        <a:font script="Telu" typeface="Gautami"/>
-        <a:font script="Taml" typeface="Latha"/>
-        <a:font script="Syrc" typeface="Estrangelo Edessa"/>
-        <a:font script="Orya" typeface="Kalinga"/>
-        <a:font script="Mlym" typeface="Kartika"/>
-        <a:font script="Laoo" typeface="DokChampa"/>
-        <a:font script="Sinh" typeface="Iskoola Pota"/>
-        <a:font script="Mong" typeface="Mongolian Baiti"/>
-        <a:font script="Viet" typeface="Arial"/>
-        <a:font script="Uigh" typeface="Microsoft Uighur"/>
-        <a:font script="Geor" typeface="Sylfaen"/>
-      </a:minorFont>
-    </a:fontScheme>
-    <a:fmtScheme name="Office">
-      <a:fillStyleLst>
-        <a:solidFill>
-          <a:schemeClr val="phClr"/>
-        </a:solidFill>
-        <a:gradFill rotWithShape="1">
-          <a:gsLst>
-            <a:gs pos="0">
-              <a:schemeClr val="phClr">
-                <a:lumMod val="110000"/>
-                <a:satMod val="105000"/>
-                <a:tint val="67000"/>
-              </a:schemeClr>
-            </a:gs>
-            <a:gs pos="50000">
-              <a:schemeClr val="phClr">
-                <a:lumMod val="105000"/>
-                <a:satMod val="103000"/>
-                <a:tint val="73000"/>
-              </a:schemeClr>
-            </a:gs>
-            <a:gs pos="100000">
-              <a:schemeClr val="phClr">
-                <a:lumMod val="105000"/>
-                <a:satMod val="109000"/>
-                <a:tint val="81000"/>
-              </a:schemeClr>
-            </a:gs>
-          </a:gsLst>
-          <a:lin ang="5400000" scaled="0"/>
-        </a:gradFill>
-        <a:gradFill rotWithShape="1">
-          <a:gsLst>
-            <a:gs pos="0">
-              <a:schemeClr val="phClr">
-                <a:satMod val="103000"/>
-                <a:lumMod val="102000"/>
-                <a:tint val="94000"/>
-              </a:schemeClr>
-            </a:gs>
-            <a:gs pos="50000">
-              <a:schemeClr val="phClr">
-                <a:satMod val="110000"/>
-                <a:lumMod val="100000"/>
-                <a:shade val="100000"/>
-              </a:schemeClr>
-            </a:gs>
-            <a:gs pos="100000">
-              <a:schemeClr val="phClr">
-                <a:lumMod val="99000"/>
-                <a:satMod val="120000"/>
-                <a:shade val="78000"/>
-              </a:schemeClr>
-            </a:gs>
-          </a:gsLst>
-          <a:lin ang="5400000" scaled="0"/>
-        </a:gradFill>
-      </a:fillStyleLst>
-      <a:lnStyleLst>
-        <a:ln w="6350" cap="flat" cmpd="sng" algn="ctr">
-          <a:solidFill>
-            <a:schemeClr val="phClr"/>
-          </a:solidFill>
-          <a:prstDash val="solid"/>
-          <a:miter lim="800000"/>
-        </a:ln>
-        <a:ln w="12700" cap="flat" cmpd="sng" algn="ctr">
-          <a:solidFill>
-            <a:schemeClr val="phClr"/>
-          </a:solidFill>
-          <a:prstDash val="solid"/>
-          <a:miter lim="800000"/>
-        </a:ln>
-        <a:ln w="19050" cap="flat" cmpd="sng" algn="ctr">
-          <a:solidFill>
-            <a:schemeClr val="phClr"/>
-          </a:solidFill>
-          <a:prstDash val="solid"/>
-          <a:miter lim="800000"/>
-        </a:ln>
-      </a:lnStyleLst>
-      <a:effectStyleLst>
-        <a:effectStyle>
-          <a:effectLst/>
-        </a:effectStyle>
-        <a:effectStyle>
-          <a:effectLst/>
-        </a:effectStyle>
-        <a:effectStyle>
-          <a:effectLst>
-            <a:outerShdw blurRad="57150" dist="19050" dir="5400000" algn="ctr" rotWithShape="0">
-              <a:srgbClr val="000000">
-                <a:alpha val="63000"/>
-              </a:srgbClr>
-            </a:outerShdw>
-          </a:effectLst>
-        </a:effectStyle>
-      </a:effectStyleLst>
-      <a:bgFillStyleLst>
-        <a:solidFill>
-          <a:schemeClr val="phClr"/>
-        </a:solidFill>
-        <a:solidFill>
-          <a:schemeClr val="phClr">
-            <a:tint val="95000"/>
-            <a:satMod val="170000"/>
-          </a:schemeClr>
-        </a:solidFill>
-        <a:gradFill rotWithShape="1">
-          <a:gsLst>
-            <a:gs pos="0">
-              <a:schemeClr val="phClr">
-                <a:tint val="93000"/>
-                <a:satMod val="150000"/>
-                <a:shade val="98000"/>
-                <a:lumMod val="102000"/>
-              </a:schemeClr>
-            </a:gs>
-            <a:gs pos="50000">
-              <a:schemeClr val="phClr">
-                <a:tint val="98000"/>
-                <a:satMod val="130000"/>
-                <a:shade val="90000"/>
-                <a:lumMod val="103000"/>
-              </a:schemeClr>
-            </a:gs>
-            <a:gs pos="100000">
-              <a:schemeClr val="phClr">
-                <a:shade val="63000"/>
-                <a:satMod val="120000"/>
-              </a:schemeClr>
-            </a:gs>
-          </a:gsLst>
-          <a:lin ang="5400000" scaled="0"/>
-        </a:gradFill>
-      </a:bgFillStyleLst>
-    </a:fmtScheme>
-  </a:themeElements>
-  <a:objectDefaults/>
-  <a:extraClrSchemeLst/>
-  <a:extLst>
-    <a:ext uri="{05A4C25C-085E-4340-85A3-A5531E510DB2}">
-      <thm15:themeFamily xmlns:thm15="http://schemas.microsoft.com/office/thememl/2012/main" name="Office Theme" id="{62F939B6-93AF-4DB8-9C6B-D6C7DFDC589F}" vid="{4A3C46E8-61CC-4603-A589-7422A47A8E4A}"/>
-    </a:ext>
-  </a:extLst>
-</a:theme>
 </file>
--- a/Slides/slides.pptx
+++ b/Slides/slides.pptx
@@ -4908,80 +4908,30 @@
           </a:p>
         </p:txBody>
       </p:sp>
-      <p:sp>
-        <p:nvSpPr>
-          <p:cNvPr id="16" name="Rectangle 15"/>
-          <p:cNvSpPr/>
+      <p:pic>
+        <p:nvPicPr>
+          <p:cNvPr id="16" name="Picture 15" descr="app_screenshot.png"/>
+          <p:cNvPicPr>
+            <a:picLocks noChangeAspect="1"/>
+          </p:cNvPicPr>
           <p:nvPr/>
-        </p:nvSpPr>
-        <p:spPr>
-          <a:xfrm>
-            <a:off x="8595360" y="1280160"/>
-            <a:ext cx="3108960" cy="4937760"/>
+        </p:nvPicPr>
+        <p:blipFill>
+          <a:blip r:embed="rId2"/>
+          <a:stretch>
+            <a:fillRect/>
+          </a:stretch>
+        </p:blipFill>
+        <p:spPr>
+          <a:xfrm>
+            <a:off x="9014268" y="1280160"/>
+            <a:ext cx="2271143" cy="4937760"/>
           </a:xfrm>
           <a:prstGeom prst="rect">
             <a:avLst/>
           </a:prstGeom>
-          <a:solidFill>
-            <a:srgbClr val="FFFFFF"/>
-          </a:solidFill>
-          <a:ln w="12700">
-            <a:solidFill>
-              <a:srgbClr val="C7C7CC"/>
-            </a:solidFill>
-            <a:prstDash val="lgDash"/>
-          </a:ln>
-        </p:spPr>
-        <p:style>
-          <a:lnRef idx="1">
-            <a:schemeClr val="accent1"/>
-          </a:lnRef>
-          <a:fillRef idx="3">
-            <a:schemeClr val="accent1"/>
-          </a:fillRef>
-          <a:effectRef idx="2">
-            <a:schemeClr val="accent1"/>
-          </a:effectRef>
-          <a:fontRef idx="minor">
-            <a:schemeClr val="lt1"/>
-          </a:fontRef>
-        </p:style>
-        <p:txBody>
-          <a:bodyPr rtlCol="0" anchor="ctr"/>
-          <a:lstStyle/>
-          <a:p>
-            <a:pPr algn="ctr"/>
-            <a:r>
-              <a:rPr sz="1400" b="0">
-                <a:solidFill>
-                  <a:srgbClr val="6B6B70"/>
-                </a:solidFill>
-                <a:latin typeface="Helvetica Neue"/>
-              </a:rPr>
-              <a:t>[App screenshot]</a:t>
-            </a:r>
-          </a:p>
-          <a:p>
-            <a:pPr algn="ctr">
-              <a:spcBef>
-                <a:spcPts val="600"/>
-              </a:spcBef>
-              <a:spcAft>
-                <a:spcPts val="600"/>
-              </a:spcAft>
-            </a:pPr>
-            <a:r>
-              <a:rPr sz="1100" b="0">
-                <a:solidFill>
-                  <a:srgbClr val="6B6B70"/>
-                </a:solidFill>
-                <a:latin typeface="Helvetica Neue"/>
-              </a:rPr>
-              <a:t>Drop in the segmented control + insights card view</a:t>
-            </a:r>
-          </a:p>
-        </p:txBody>
-      </p:sp>
+        </p:spPr>
+      </p:pic>
       <p:sp>
         <p:nvSpPr>
           <p:cNvPr id="17" name="TextBox 16"/>
